--- a/examples/skill-md-deck/skill-md.pptx
+++ b/examples/skill-md-deck/skill-md.pptx
@@ -765,8 +765,8 @@
         </p:nvSpPr>
         <p:spPr>
           <a:xfrm>
-            <a:off x="10363200" y="6035040"/>
-            <a:ext cx="1371600" cy="365760"/>
+            <a:off x="11186160" y="6035040"/>
+            <a:ext cx="548640" cy="365760"/>
           </a:xfrm>
         </p:spPr>
         <p:txBody>
@@ -809,7 +809,7 @@
             <a:r>
               <a:rPr sz="6000" b="1" i="0">
                 <a:solidFill>
-                  <a:srgbClr val="1F3A5F"/>
+                  <a:srgbClr val="C1642B"/>
                 </a:solidFill>
                 <a:latin typeface="Arial"/>
               </a:rPr>
@@ -868,8 +868,8 @@
         </p:nvSpPr>
         <p:spPr>
           <a:xfrm>
-            <a:off x="10363200" y="6035040"/>
-            <a:ext cx="1371600" cy="365760"/>
+            <a:off x="11186160" y="6035040"/>
+            <a:ext cx="548640" cy="365760"/>
           </a:xfrm>
         </p:spPr>
         <p:txBody>
@@ -912,7 +912,7 @@
             <a:r>
               <a:rPr sz="4200" b="1" i="0">
                 <a:solidFill>
-                  <a:srgbClr val="1F3A5F"/>
+                  <a:srgbClr val="C1642B"/>
                 </a:solidFill>
                 <a:latin typeface="Arial"/>
               </a:rPr>
@@ -1193,8 +1193,8 @@
         </p:nvSpPr>
         <p:spPr>
           <a:xfrm>
-            <a:off x="10363200" y="6035040"/>
-            <a:ext cx="1371600" cy="365760"/>
+            <a:off x="11186160" y="6035040"/>
+            <a:ext cx="548640" cy="365760"/>
           </a:xfrm>
         </p:spPr>
         <p:txBody>
@@ -1237,7 +1237,7 @@
             <a:r>
               <a:rPr sz="4200" b="1" i="0">
                 <a:solidFill>
-                  <a:srgbClr val="1F3A5F"/>
+                  <a:srgbClr val="C1642B"/>
                 </a:solidFill>
                 <a:latin typeface="Arial"/>
               </a:rPr>
@@ -1518,8 +1518,8 @@
         </p:nvSpPr>
         <p:spPr>
           <a:xfrm>
-            <a:off x="10363200" y="6035040"/>
-            <a:ext cx="1371600" cy="365760"/>
+            <a:off x="11186160" y="6035040"/>
+            <a:ext cx="548640" cy="365760"/>
           </a:xfrm>
         </p:spPr>
         <p:txBody>
@@ -1562,7 +1562,7 @@
             <a:r>
               <a:rPr sz="4200" b="1" i="0">
                 <a:solidFill>
-                  <a:srgbClr val="1F3A5F"/>
+                  <a:srgbClr val="C1642B"/>
                 </a:solidFill>
                 <a:latin typeface="Arial"/>
               </a:rPr>
@@ -1599,7 +1599,7 @@
             <a:r>
               <a:rPr sz="3400" b="1" i="0">
                 <a:solidFill>
-                  <a:srgbClr val="1F3A5F"/>
+                  <a:srgbClr val="C1642B"/>
                 </a:solidFill>
                 <a:latin typeface="Arial"/>
               </a:rPr>
@@ -1636,7 +1636,7 @@
             <a:r>
               <a:rPr sz="3400" b="1" i="0">
                 <a:solidFill>
-                  <a:srgbClr val="1F3A5F"/>
+                  <a:srgbClr val="C1642B"/>
                 </a:solidFill>
                 <a:latin typeface="Arial"/>
               </a:rPr>
@@ -1917,8 +1917,8 @@
         </p:nvSpPr>
         <p:spPr>
           <a:xfrm>
-            <a:off x="10363200" y="6035040"/>
-            <a:ext cx="1371600" cy="365760"/>
+            <a:off x="11186160" y="6035040"/>
+            <a:ext cx="548640" cy="365760"/>
           </a:xfrm>
         </p:spPr>
         <p:txBody>
@@ -1961,7 +1961,7 @@
             <a:r>
               <a:rPr sz="4200" b="1" i="0">
                 <a:solidFill>
-                  <a:srgbClr val="1F3A5F"/>
+                  <a:srgbClr val="C1642B"/>
                 </a:solidFill>
                 <a:latin typeface="Arial"/>
               </a:rPr>
@@ -2464,8 +2464,8 @@
         </p:nvSpPr>
         <p:spPr>
           <a:xfrm>
-            <a:off x="10363200" y="6035040"/>
-            <a:ext cx="1371600" cy="365760"/>
+            <a:off x="11186160" y="6035040"/>
+            <a:ext cx="548640" cy="365760"/>
           </a:xfrm>
         </p:spPr>
         <p:txBody>
@@ -2508,7 +2508,7 @@
             <a:r>
               <a:rPr sz="4200" b="1" i="0">
                 <a:solidFill>
-                  <a:srgbClr val="1F3A5F"/>
+                  <a:srgbClr val="C1642B"/>
                 </a:solidFill>
                 <a:latin typeface="Arial"/>
               </a:rPr>
@@ -2528,6 +2528,43 @@
         <p:spPr>
           <a:xfrm>
             <a:off x="6233160" y="1499616"/>
+            <a:ext cx="5958840" cy="609600"/>
+          </a:xfrm>
+          <a:prstGeom prst="rect">
+            <a:avLst/>
+          </a:prstGeom>
+          <a:noFill/>
+        </p:spPr>
+        <p:txBody>
+          <a:bodyPr wrap="none" lIns="0" rIns="0">
+            <a:noAutofit/>
+          </a:bodyPr>
+          <a:lstStyle/>
+          <a:p>
+            <a:pPr algn="l"/>
+            <a:r>
+              <a:rPr sz="3400" b="0" i="0">
+                <a:solidFill>
+                  <a:srgbClr val="1A1A24"/>
+                </a:solidFill>
+                <a:latin typeface="Arial"/>
+              </a:rPr>
+              <a:t>Built with customers.</a:t>
+            </a:r>
+          </a:p>
+        </p:txBody>
+      </p:sp>
+      <p:sp>
+        <p:nvSpPr>
+          <p:cNvPr id="7" name="TextBox 6"/>
+          <p:cNvSpPr/>
+          <p:nvPr>
+            <p:ph type="body" idx="2"/>
+          </p:nvPr>
+        </p:nvSpPr>
+        <p:spPr>
+          <a:xfrm>
+            <a:off x="6233160" y="2383536"/>
             <a:ext cx="5501640" cy="1127760"/>
           </a:xfrm>
           <a:prstGeom prst="rect">
@@ -2549,44 +2586,7 @@
                 </a:solidFill>
                 <a:latin typeface="Arial"/>
               </a:rPr>
-              <a:t>Built with customers, not just for them.</a:t>
-            </a:r>
-          </a:p>
-        </p:txBody>
-      </p:sp>
-      <p:sp>
-        <p:nvSpPr>
-          <p:cNvPr id="7" name="TextBox 6"/>
-          <p:cNvSpPr/>
-          <p:nvPr>
-            <p:ph type="body" idx="2"/>
-          </p:nvPr>
-        </p:nvSpPr>
-        <p:spPr>
-          <a:xfrm>
-            <a:off x="6233160" y="2901696"/>
-            <a:ext cx="5501640" cy="1127760"/>
-          </a:xfrm>
-          <a:prstGeom prst="rect">
-            <a:avLst/>
-          </a:prstGeom>
-          <a:noFill/>
-        </p:spPr>
-        <p:txBody>
-          <a:bodyPr wrap="square" lIns="0" rIns="0">
-            <a:noAutofit/>
-          </a:bodyPr>
-          <a:lstStyle/>
-          <a:p>
-            <a:pPr algn="l"/>
-            <a:r>
-              <a:rPr sz="3400" b="0" i="0">
-                <a:solidFill>
-                  <a:srgbClr val="1A1A24"/>
-                </a:solidFill>
-                <a:latin typeface="Arial"/>
-              </a:rPr>
-              <a:t>60% faster rollout; 50% fewer tickets.</a:t>
+              <a:t>60% faster; 50% fewer tickets</a:t>
             </a:r>
           </a:p>
         </p:txBody>
@@ -2605,405 +2605,6 @@
 </file>
 
 <file path=ppt/slideLayouts/slideLayout18.xml><?xml version="1.0" encoding="utf-8"?>
-<p:sldLayout xmlns:a="http://schemas.openxmlformats.org/drawingml/2006/main" xmlns:r="http://schemas.openxmlformats.org/officeDocument/2006/relationships" xmlns:p="http://schemas.openxmlformats.org/presentationml/2006/main" type="blank" preserve="1">
-  <p:cSld name="slidekit · Card Grid">
-    <p:bg>
-      <p:bgPr>
-        <a:solidFill>
-          <a:srgbClr val="FFFFFF"/>
-        </a:solidFill>
-        <a:effectLst/>
-      </p:bgPr>
-    </p:bg>
-    <p:spTree>
-      <p:nvGrpSpPr>
-        <p:cNvPr id="1" name=""/>
-        <p:cNvGrpSpPr/>
-        <p:nvPr/>
-      </p:nvGrpSpPr>
-      <p:grpSpPr>
-        <a:xfrm>
-          <a:off x="0" y="0"/>
-          <a:ext cx="0" cy="0"/>
-          <a:chOff x="0" y="0"/>
-          <a:chExt cx="0" cy="0"/>
-        </a:xfrm>
-      </p:grpSpPr>
-      <p:sp>
-        <p:nvSpPr>
-          <p:cNvPr id="4" name="Slide Number Placeholder 3"/>
-          <p:cNvSpPr>
-            <a:spLocks noGrp="1"/>
-          </p:cNvSpPr>
-          <p:nvPr>
-            <p:ph type="sldNum" sz="quarter" idx="12"/>
-          </p:nvPr>
-        </p:nvSpPr>
-        <p:spPr>
-          <a:xfrm>
-            <a:off x="10363200" y="6035040"/>
-            <a:ext cx="1371600" cy="365760"/>
-          </a:xfrm>
-        </p:spPr>
-        <p:txBody>
-          <a:bodyPr/>
-          <a:lstStyle/>
-          <a:p>
-            <a:fld id="{C1FF6DA9-008F-8B48-92A6-B652298478BF}" type="slidenum">
-              <a:rPr lang="en-US" smtClean="0"/>
-              <a:t>‹#›</a:t>
-            </a:fld>
-            <a:endParaRPr lang="en-US"/>
-          </a:p>
-        </p:txBody>
-      </p:sp>
-      <p:sp>
-        <p:nvSpPr>
-          <p:cNvPr id="5" name="TextBox 4"/>
-          <p:cNvSpPr/>
-          <p:nvPr>
-            <p:ph type="title"/>
-          </p:nvPr>
-        </p:nvSpPr>
-        <p:spPr>
-          <a:xfrm>
-            <a:off x="457200" y="457200"/>
-            <a:ext cx="11277600" cy="768096"/>
-          </a:xfrm>
-          <a:prstGeom prst="rect">
-            <a:avLst/>
-          </a:prstGeom>
-          <a:noFill/>
-        </p:spPr>
-        <p:txBody>
-          <a:bodyPr wrap="none" lIns="0" rIns="0">
-            <a:noAutofit/>
-          </a:bodyPr>
-          <a:lstStyle/>
-          <a:p>
-            <a:pPr algn="l"/>
-            <a:r>
-              <a:rPr sz="4200" b="1" i="0">
-                <a:solidFill>
-                  <a:srgbClr val="1F3A5F"/>
-                </a:solidFill>
-                <a:latin typeface="Arial"/>
-              </a:rPr>
-              <a:t>What We Offer</a:t>
-            </a:r>
-          </a:p>
-        </p:txBody>
-      </p:sp>
-      <p:sp>
-        <p:nvSpPr>
-          <p:cNvPr id="6" name="TextBox 5"/>
-          <p:cNvSpPr/>
-          <p:nvPr>
-            <p:ph type="body" idx="1"/>
-          </p:nvPr>
-        </p:nvSpPr>
-        <p:spPr>
-          <a:xfrm>
-            <a:off x="457200" y="1499616"/>
-            <a:ext cx="2831366" cy="518159"/>
-          </a:xfrm>
-          <a:prstGeom prst="rect">
-            <a:avLst/>
-          </a:prstGeom>
-          <a:noFill/>
-        </p:spPr>
-        <p:txBody>
-          <a:bodyPr wrap="none" lIns="0" rIns="0">
-            <a:noAutofit/>
-          </a:bodyPr>
-          <a:lstStyle/>
-          <a:p>
-            <a:pPr algn="l"/>
-            <a:r>
-              <a:rPr sz="3400" b="1" i="0">
-                <a:solidFill>
-                  <a:srgbClr val="1A1A24"/>
-                </a:solidFill>
-                <a:latin typeface="Arial"/>
-              </a:rPr>
-              <a:t>Insights</a:t>
-            </a:r>
-          </a:p>
-        </p:txBody>
-      </p:sp>
-      <p:sp>
-        <p:nvSpPr>
-          <p:cNvPr id="7" name="TextBox 6"/>
-          <p:cNvSpPr/>
-          <p:nvPr>
-            <p:ph type="body" idx="2"/>
-          </p:nvPr>
-        </p:nvSpPr>
-        <p:spPr>
-          <a:xfrm>
-            <a:off x="457200" y="2154935"/>
-            <a:ext cx="2613660" cy="3605785"/>
-          </a:xfrm>
-          <a:prstGeom prst="rect">
-            <a:avLst/>
-          </a:prstGeom>
-          <a:noFill/>
-        </p:spPr>
-        <p:txBody>
-          <a:bodyPr wrap="square" lIns="0" rIns="0">
-            <a:noAutofit/>
-          </a:bodyPr>
-          <a:lstStyle/>
-          <a:p>
-            <a:pPr algn="l"/>
-            <a:r>
-              <a:rPr sz="3400" b="0" i="0">
-                <a:solidFill>
-                  <a:srgbClr val="1A1A24"/>
-                </a:solidFill>
-                <a:latin typeface="Arial"/>
-              </a:rPr>
-              <a:t>Live data and AI analytics.</a:t>
-            </a:r>
-          </a:p>
-        </p:txBody>
-      </p:sp>
-      <p:sp>
-        <p:nvSpPr>
-          <p:cNvPr id="8" name="TextBox 7"/>
-          <p:cNvSpPr/>
-          <p:nvPr>
-            <p:ph type="body" idx="3"/>
-          </p:nvPr>
-        </p:nvSpPr>
-        <p:spPr>
-          <a:xfrm>
-            <a:off x="3345180" y="1499616"/>
-            <a:ext cx="2909292" cy="518159"/>
-          </a:xfrm>
-          <a:prstGeom prst="rect">
-            <a:avLst/>
-          </a:prstGeom>
-          <a:noFill/>
-        </p:spPr>
-        <p:txBody>
-          <a:bodyPr wrap="none" lIns="0" rIns="0">
-            <a:noAutofit/>
-          </a:bodyPr>
-          <a:lstStyle/>
-          <a:p>
-            <a:pPr algn="l"/>
-            <a:r>
-              <a:rPr sz="3400" b="1" i="0">
-                <a:solidFill>
-                  <a:srgbClr val="1A1A24"/>
-                </a:solidFill>
-                <a:latin typeface="Arial"/>
-              </a:rPr>
-              <a:t>Security</a:t>
-            </a:r>
-          </a:p>
-        </p:txBody>
-      </p:sp>
-      <p:sp>
-        <p:nvSpPr>
-          <p:cNvPr id="9" name="TextBox 8"/>
-          <p:cNvSpPr/>
-          <p:nvPr>
-            <p:ph type="body" idx="4"/>
-          </p:nvPr>
-        </p:nvSpPr>
-        <p:spPr>
-          <a:xfrm>
-            <a:off x="3345180" y="2154935"/>
-            <a:ext cx="2613660" cy="3605785"/>
-          </a:xfrm>
-          <a:prstGeom prst="rect">
-            <a:avLst/>
-          </a:prstGeom>
-          <a:noFill/>
-        </p:spPr>
-        <p:txBody>
-          <a:bodyPr wrap="square" lIns="0" rIns="0">
-            <a:noAutofit/>
-          </a:bodyPr>
-          <a:lstStyle/>
-          <a:p>
-            <a:pPr algn="l"/>
-            <a:r>
-              <a:rPr sz="3400" b="0" i="0">
-                <a:solidFill>
-                  <a:srgbClr val="1A1A24"/>
-                </a:solidFill>
-                <a:latin typeface="Arial"/>
-              </a:rPr>
-              <a:t>Zero-trust, SOC 2 ready.</a:t>
-            </a:r>
-          </a:p>
-        </p:txBody>
-      </p:sp>
-      <p:sp>
-        <p:nvSpPr>
-          <p:cNvPr id="10" name="TextBox 9"/>
-          <p:cNvSpPr/>
-          <p:nvPr>
-            <p:ph type="body" idx="5"/>
-          </p:nvPr>
-        </p:nvSpPr>
-        <p:spPr>
-          <a:xfrm>
-            <a:off x="6233160" y="1499616"/>
-            <a:ext cx="2613660" cy="518159"/>
-          </a:xfrm>
-          <a:prstGeom prst="rect">
-            <a:avLst/>
-          </a:prstGeom>
-          <a:noFill/>
-        </p:spPr>
-        <p:txBody>
-          <a:bodyPr wrap="none" lIns="0" rIns="0">
-            <a:noAutofit/>
-          </a:bodyPr>
-          <a:lstStyle/>
-          <a:p>
-            <a:pPr algn="l"/>
-            <a:r>
-              <a:rPr sz="3400" b="1" i="0">
-                <a:solidFill>
-                  <a:srgbClr val="1A1A24"/>
-                </a:solidFill>
-                <a:latin typeface="Arial"/>
-              </a:rPr>
-              <a:t>Speed</a:t>
-            </a:r>
-          </a:p>
-        </p:txBody>
-      </p:sp>
-      <p:sp>
-        <p:nvSpPr>
-          <p:cNvPr id="11" name="TextBox 10"/>
-          <p:cNvSpPr/>
-          <p:nvPr>
-            <p:ph type="body" idx="6"/>
-          </p:nvPr>
-        </p:nvSpPr>
-        <p:spPr>
-          <a:xfrm>
-            <a:off x="6233160" y="2154935"/>
-            <a:ext cx="2613660" cy="3605785"/>
-          </a:xfrm>
-          <a:prstGeom prst="rect">
-            <a:avLst/>
-          </a:prstGeom>
-          <a:noFill/>
-        </p:spPr>
-        <p:txBody>
-          <a:bodyPr wrap="square" lIns="0" rIns="0">
-            <a:noAutofit/>
-          </a:bodyPr>
-          <a:lstStyle/>
-          <a:p>
-            <a:pPr algn="l"/>
-            <a:r>
-              <a:rPr sz="3400" b="0" i="0">
-                <a:solidFill>
-                  <a:srgbClr val="1A1A24"/>
-                </a:solidFill>
-                <a:latin typeface="Arial"/>
-              </a:rPr>
-              <a:t>Sub-100ms p99 latency.</a:t>
-            </a:r>
-          </a:p>
-        </p:txBody>
-      </p:sp>
-      <p:sp>
-        <p:nvSpPr>
-          <p:cNvPr id="12" name="TextBox 11"/>
-          <p:cNvSpPr/>
-          <p:nvPr>
-            <p:ph type="body" idx="7"/>
-          </p:nvPr>
-        </p:nvSpPr>
-        <p:spPr>
-          <a:xfrm>
-            <a:off x="9121140" y="1499616"/>
-            <a:ext cx="2613660" cy="518159"/>
-          </a:xfrm>
-          <a:prstGeom prst="rect">
-            <a:avLst/>
-          </a:prstGeom>
-          <a:noFill/>
-        </p:spPr>
-        <p:txBody>
-          <a:bodyPr wrap="none" lIns="0" rIns="0">
-            <a:noAutofit/>
-          </a:bodyPr>
-          <a:lstStyle/>
-          <a:p>
-            <a:pPr algn="l"/>
-            <a:r>
-              <a:rPr sz="3400" b="1" i="0">
-                <a:solidFill>
-                  <a:srgbClr val="1A1A24"/>
-                </a:solidFill>
-                <a:latin typeface="Arial"/>
-              </a:rPr>
-              <a:t>APIs</a:t>
-            </a:r>
-          </a:p>
-        </p:txBody>
-      </p:sp>
-      <p:sp>
-        <p:nvSpPr>
-          <p:cNvPr id="13" name="TextBox 12"/>
-          <p:cNvSpPr/>
-          <p:nvPr>
-            <p:ph type="body" idx="8"/>
-          </p:nvPr>
-        </p:nvSpPr>
-        <p:spPr>
-          <a:xfrm>
-            <a:off x="9121140" y="2154935"/>
-            <a:ext cx="2613660" cy="3605785"/>
-          </a:xfrm>
-          <a:prstGeom prst="rect">
-            <a:avLst/>
-          </a:prstGeom>
-          <a:noFill/>
-        </p:spPr>
-        <p:txBody>
-          <a:bodyPr wrap="square" lIns="0" rIns="0">
-            <a:noAutofit/>
-          </a:bodyPr>
-          <a:lstStyle/>
-          <a:p>
-            <a:pPr algn="l"/>
-            <a:r>
-              <a:rPr sz="3400" b="0" i="0">
-                <a:solidFill>
-                  <a:srgbClr val="1A1A24"/>
-                </a:solidFill>
-                <a:latin typeface="Arial"/>
-              </a:rPr>
-              <a:t>300+ open connectors.</a:t>
-            </a:r>
-          </a:p>
-        </p:txBody>
-      </p:sp>
-    </p:spTree>
-    <p:extLst>
-      <p:ext uri="{BB962C8B-B14F-4D97-AF65-F5344CB8AC3E}">
-        <p14:creationId xmlns:p14="http://schemas.microsoft.com/office/powerpoint/2010/main" val="1212999818"/>
-      </p:ext>
-    </p:extLst>
-  </p:cSld>
-  <p:clrMapOvr>
-    <a:masterClrMapping/>
-  </p:clrMapOvr>
-</p:sldLayout>
-</file>
-
-<file path=ppt/slideLayouts/slideLayout19.xml><?xml version="1.0" encoding="utf-8"?>
 <p:sldLayout xmlns:a="http://schemas.openxmlformats.org/drawingml/2006/main" xmlns:r="http://schemas.openxmlformats.org/officeDocument/2006/relationships" xmlns:p="http://schemas.openxmlformats.org/presentationml/2006/main" type="blank" preserve="1">
   <p:cSld name="slidekit · Section Divider">
     <p:bg>
@@ -3040,8 +2641,8 @@
         </p:nvSpPr>
         <p:spPr>
           <a:xfrm>
-            <a:off x="10363200" y="6035040"/>
-            <a:ext cx="1371600" cy="365760"/>
+            <a:off x="11186160" y="6035040"/>
+            <a:ext cx="548640" cy="365760"/>
           </a:xfrm>
         </p:spPr>
         <p:txBody>
@@ -3153,11 +2754,516 @@
             <a:r>
               <a:rPr sz="4200" b="1" i="0">
                 <a:solidFill>
+                  <a:srgbClr val="C1642B"/>
+                </a:solidFill>
+                <a:latin typeface="Arial"/>
+              </a:rPr>
+              <a:t>Where We Stand Today</a:t>
+            </a:r>
+          </a:p>
+        </p:txBody>
+      </p:sp>
+    </p:spTree>
+    <p:extLst>
+      <p:ext uri="{BB962C8B-B14F-4D97-AF65-F5344CB8AC3E}">
+        <p14:creationId xmlns:p14="http://schemas.microsoft.com/office/powerpoint/2010/main" val="1212999818"/>
+      </p:ext>
+    </p:extLst>
+  </p:cSld>
+  <p:clrMapOvr>
+    <a:masterClrMapping/>
+  </p:clrMapOvr>
+</p:sldLayout>
+</file>
+
+<file path=ppt/slideLayouts/slideLayout19.xml><?xml version="1.0" encoding="utf-8"?>
+<p:sldLayout xmlns:a="http://schemas.openxmlformats.org/drawingml/2006/main" xmlns:r="http://schemas.openxmlformats.org/officeDocument/2006/relationships" xmlns:p="http://schemas.openxmlformats.org/presentationml/2006/main" type="blank" preserve="1">
+  <p:cSld name="slidekit · Agenda">
+    <p:bg>
+      <p:bgPr>
+        <a:solidFill>
+          <a:srgbClr val="FFFFFF"/>
+        </a:solidFill>
+        <a:effectLst/>
+      </p:bgPr>
+    </p:bg>
+    <p:spTree>
+      <p:nvGrpSpPr>
+        <p:cNvPr id="1" name=""/>
+        <p:cNvGrpSpPr/>
+        <p:nvPr/>
+      </p:nvGrpSpPr>
+      <p:grpSpPr>
+        <a:xfrm>
+          <a:off x="0" y="0"/>
+          <a:ext cx="0" cy="0"/>
+          <a:chOff x="0" y="0"/>
+          <a:chExt cx="0" cy="0"/>
+        </a:xfrm>
+      </p:grpSpPr>
+      <p:sp>
+        <p:nvSpPr>
+          <p:cNvPr id="4" name="Slide Number Placeholder 3"/>
+          <p:cNvSpPr>
+            <a:spLocks noGrp="1"/>
+          </p:cNvSpPr>
+          <p:nvPr>
+            <p:ph type="sldNum" sz="quarter" idx="12"/>
+          </p:nvPr>
+        </p:nvSpPr>
+        <p:spPr>
+          <a:xfrm>
+            <a:off x="11186160" y="6035040"/>
+            <a:ext cx="548640" cy="365760"/>
+          </a:xfrm>
+        </p:spPr>
+        <p:txBody>
+          <a:bodyPr/>
+          <a:lstStyle/>
+          <a:p>
+            <a:fld id="{C1FF6DA9-008F-8B48-92A6-B652298478BF}" type="slidenum">
+              <a:rPr lang="en-US" smtClean="0"/>
+              <a:t>‹#›</a:t>
+            </a:fld>
+            <a:endParaRPr lang="en-US"/>
+          </a:p>
+        </p:txBody>
+      </p:sp>
+      <p:sp>
+        <p:nvSpPr>
+          <p:cNvPr id="5" name="TextBox 4"/>
+          <p:cNvSpPr/>
+          <p:nvPr>
+            <p:ph type="title"/>
+          </p:nvPr>
+        </p:nvSpPr>
+        <p:spPr>
+          <a:xfrm>
+            <a:off x="457200" y="457200"/>
+            <a:ext cx="11277600" cy="768096"/>
+          </a:xfrm>
+          <a:prstGeom prst="rect">
+            <a:avLst/>
+          </a:prstGeom>
+          <a:noFill/>
+        </p:spPr>
+        <p:txBody>
+          <a:bodyPr wrap="none" lIns="0" rIns="0">
+            <a:noAutofit/>
+          </a:bodyPr>
+          <a:lstStyle/>
+          <a:p>
+            <a:pPr algn="l"/>
+            <a:r>
+              <a:rPr sz="4200" b="1" i="0">
+                <a:solidFill>
+                  <a:srgbClr val="C1642B"/>
+                </a:solidFill>
+                <a:latin typeface="Arial"/>
+              </a:rPr>
+              <a:t>What We Will Cover</a:t>
+            </a:r>
+          </a:p>
+        </p:txBody>
+      </p:sp>
+      <p:sp>
+        <p:nvSpPr>
+          <p:cNvPr id="6" name="Rectangle 5"/>
+          <p:cNvSpPr/>
+          <p:nvPr>
+            <p:ph type="body" idx="1"/>
+          </p:nvPr>
+        </p:nvSpPr>
+        <p:spPr>
+          <a:xfrm>
+            <a:off x="457200" y="1280160"/>
+            <a:ext cx="11277600" cy="64008"/>
+          </a:xfrm>
+          <a:prstGeom prst="rect">
+            <a:avLst/>
+          </a:prstGeom>
+          <a:solidFill>
+            <a:srgbClr val="C1642B"/>
+          </a:solidFill>
+          <a:ln>
+            <a:noFill/>
+          </a:ln>
+          <a:effectLst/>
+        </p:spPr>
+        <p:txBody>
+          <a:bodyPr rtlCol="0" anchor="ctr"/>
+          <a:lstStyle/>
+          <a:p>
+            <a:pPr algn="ctr"/>
+          </a:p>
+        </p:txBody>
+      </p:sp>
+      <p:sp>
+        <p:nvSpPr>
+          <p:cNvPr id="7" name="TextBox 6"/>
+          <p:cNvSpPr/>
+          <p:nvPr>
+            <p:ph type="body" idx="2"/>
+          </p:nvPr>
+        </p:nvSpPr>
+        <p:spPr>
+          <a:xfrm>
+            <a:off x="457200" y="1618488"/>
+            <a:ext cx="951348" cy="518159"/>
+          </a:xfrm>
+          <a:prstGeom prst="rect">
+            <a:avLst/>
+          </a:prstGeom>
+          <a:noFill/>
+        </p:spPr>
+        <p:txBody>
+          <a:bodyPr wrap="none" lIns="0" rIns="0">
+            <a:noAutofit/>
+          </a:bodyPr>
+          <a:lstStyle/>
+          <a:p>
+            <a:pPr algn="l"/>
+            <a:r>
+              <a:rPr sz="3400" b="1" i="0">
+                <a:solidFill>
+                  <a:srgbClr val="C1642B"/>
+                </a:solidFill>
+                <a:latin typeface="Arial"/>
+              </a:rPr>
+              <a:t>01</a:t>
+            </a:r>
+          </a:p>
+        </p:txBody>
+      </p:sp>
+      <p:sp>
+        <p:nvSpPr>
+          <p:cNvPr id="8" name="TextBox 7"/>
+          <p:cNvSpPr/>
+          <p:nvPr>
+            <p:ph type="body" idx="3"/>
+          </p:nvPr>
+        </p:nvSpPr>
+        <p:spPr>
+          <a:xfrm>
+            <a:off x="1371600" y="1618488"/>
+            <a:ext cx="10363200" cy="518159"/>
+          </a:xfrm>
+          <a:prstGeom prst="rect">
+            <a:avLst/>
+          </a:prstGeom>
+          <a:noFill/>
+        </p:spPr>
+        <p:txBody>
+          <a:bodyPr wrap="none" lIns="0" rIns="0">
+            <a:noAutofit/>
+          </a:bodyPr>
+          <a:lstStyle/>
+          <a:p>
+            <a:pPr algn="l"/>
+            <a:r>
+              <a:rPr sz="3400" b="0" i="0">
+                <a:solidFill>
                   <a:srgbClr val="1A1A24"/>
                 </a:solidFill>
                 <a:latin typeface="Arial"/>
               </a:rPr>
-              <a:t>Where We Stand Today</a:t>
+              <a:t>Performance against targets</a:t>
+            </a:r>
+          </a:p>
+        </p:txBody>
+      </p:sp>
+      <p:sp>
+        <p:nvSpPr>
+          <p:cNvPr id="9" name="TextBox 8"/>
+          <p:cNvSpPr/>
+          <p:nvPr>
+            <p:ph type="body" idx="4"/>
+          </p:nvPr>
+        </p:nvSpPr>
+        <p:spPr>
+          <a:xfrm>
+            <a:off x="457200" y="2501798"/>
+            <a:ext cx="951348" cy="518159"/>
+          </a:xfrm>
+          <a:prstGeom prst="rect">
+            <a:avLst/>
+          </a:prstGeom>
+          <a:noFill/>
+        </p:spPr>
+        <p:txBody>
+          <a:bodyPr wrap="none" lIns="0" rIns="0">
+            <a:noAutofit/>
+          </a:bodyPr>
+          <a:lstStyle/>
+          <a:p>
+            <a:pPr algn="l"/>
+            <a:r>
+              <a:rPr sz="3400" b="1" i="0">
+                <a:solidFill>
+                  <a:srgbClr val="C1642B"/>
+                </a:solidFill>
+                <a:latin typeface="Arial"/>
+              </a:rPr>
+              <a:t>02</a:t>
+            </a:r>
+          </a:p>
+        </p:txBody>
+      </p:sp>
+      <p:sp>
+        <p:nvSpPr>
+          <p:cNvPr id="10" name="TextBox 9"/>
+          <p:cNvSpPr/>
+          <p:nvPr>
+            <p:ph type="body" idx="5"/>
+          </p:nvPr>
+        </p:nvSpPr>
+        <p:spPr>
+          <a:xfrm>
+            <a:off x="1371600" y="2501798"/>
+            <a:ext cx="10363200" cy="518159"/>
+          </a:xfrm>
+          <a:prstGeom prst="rect">
+            <a:avLst/>
+          </a:prstGeom>
+          <a:noFill/>
+        </p:spPr>
+        <p:txBody>
+          <a:bodyPr wrap="none" lIns="0" rIns="0">
+            <a:noAutofit/>
+          </a:bodyPr>
+          <a:lstStyle/>
+          <a:p>
+            <a:pPr algn="l"/>
+            <a:r>
+              <a:rPr sz="3400" b="0" i="0">
+                <a:solidFill>
+                  <a:srgbClr val="1A1A24"/>
+                </a:solidFill>
+                <a:latin typeface="Arial"/>
+              </a:rPr>
+              <a:t>Customer and market signals</a:t>
+            </a:r>
+          </a:p>
+        </p:txBody>
+      </p:sp>
+      <p:sp>
+        <p:nvSpPr>
+          <p:cNvPr id="11" name="TextBox 10"/>
+          <p:cNvSpPr/>
+          <p:nvPr>
+            <p:ph type="body" idx="6"/>
+          </p:nvPr>
+        </p:nvSpPr>
+        <p:spPr>
+          <a:xfrm>
+            <a:off x="457200" y="3385108"/>
+            <a:ext cx="951348" cy="518159"/>
+          </a:xfrm>
+          <a:prstGeom prst="rect">
+            <a:avLst/>
+          </a:prstGeom>
+          <a:noFill/>
+        </p:spPr>
+        <p:txBody>
+          <a:bodyPr wrap="none" lIns="0" rIns="0">
+            <a:noAutofit/>
+          </a:bodyPr>
+          <a:lstStyle/>
+          <a:p>
+            <a:pPr algn="l"/>
+            <a:r>
+              <a:rPr sz="3400" b="1" i="0">
+                <a:solidFill>
+                  <a:srgbClr val="C1642B"/>
+                </a:solidFill>
+                <a:latin typeface="Arial"/>
+              </a:rPr>
+              <a:t>03</a:t>
+            </a:r>
+          </a:p>
+        </p:txBody>
+      </p:sp>
+      <p:sp>
+        <p:nvSpPr>
+          <p:cNvPr id="12" name="TextBox 11"/>
+          <p:cNvSpPr/>
+          <p:nvPr>
+            <p:ph type="body" idx="7"/>
+          </p:nvPr>
+        </p:nvSpPr>
+        <p:spPr>
+          <a:xfrm>
+            <a:off x="1371600" y="3385108"/>
+            <a:ext cx="10363200" cy="518159"/>
+          </a:xfrm>
+          <a:prstGeom prst="rect">
+            <a:avLst/>
+          </a:prstGeom>
+          <a:noFill/>
+        </p:spPr>
+        <p:txBody>
+          <a:bodyPr wrap="none" lIns="0" rIns="0">
+            <a:noAutofit/>
+          </a:bodyPr>
+          <a:lstStyle/>
+          <a:p>
+            <a:pPr algn="l"/>
+            <a:r>
+              <a:rPr sz="3400" b="0" i="0">
+                <a:solidFill>
+                  <a:srgbClr val="1A1A24"/>
+                </a:solidFill>
+                <a:latin typeface="Arial"/>
+              </a:rPr>
+              <a:t>Operational health and risks</a:t>
+            </a:r>
+          </a:p>
+        </p:txBody>
+      </p:sp>
+      <p:sp>
+        <p:nvSpPr>
+          <p:cNvPr id="13" name="TextBox 12"/>
+          <p:cNvSpPr/>
+          <p:nvPr>
+            <p:ph type="body" idx="8"/>
+          </p:nvPr>
+        </p:nvSpPr>
+        <p:spPr>
+          <a:xfrm>
+            <a:off x="457200" y="4268418"/>
+            <a:ext cx="951348" cy="518159"/>
+          </a:xfrm>
+          <a:prstGeom prst="rect">
+            <a:avLst/>
+          </a:prstGeom>
+          <a:noFill/>
+        </p:spPr>
+        <p:txBody>
+          <a:bodyPr wrap="none" lIns="0" rIns="0">
+            <a:noAutofit/>
+          </a:bodyPr>
+          <a:lstStyle/>
+          <a:p>
+            <a:pPr algn="l"/>
+            <a:r>
+              <a:rPr sz="3400" b="1" i="0">
+                <a:solidFill>
+                  <a:srgbClr val="C1642B"/>
+                </a:solidFill>
+                <a:latin typeface="Arial"/>
+              </a:rPr>
+              <a:t>04</a:t>
+            </a:r>
+          </a:p>
+        </p:txBody>
+      </p:sp>
+      <p:sp>
+        <p:nvSpPr>
+          <p:cNvPr id="14" name="TextBox 13"/>
+          <p:cNvSpPr/>
+          <p:nvPr>
+            <p:ph type="body" idx="9"/>
+          </p:nvPr>
+        </p:nvSpPr>
+        <p:spPr>
+          <a:xfrm>
+            <a:off x="1371600" y="4268418"/>
+            <a:ext cx="10363200" cy="518159"/>
+          </a:xfrm>
+          <a:prstGeom prst="rect">
+            <a:avLst/>
+          </a:prstGeom>
+          <a:noFill/>
+        </p:spPr>
+        <p:txBody>
+          <a:bodyPr wrap="none" lIns="0" rIns="0">
+            <a:noAutofit/>
+          </a:bodyPr>
+          <a:lstStyle/>
+          <a:p>
+            <a:pPr algn="l"/>
+            <a:r>
+              <a:rPr sz="3400" b="0" i="0">
+                <a:solidFill>
+                  <a:srgbClr val="1A1A24"/>
+                </a:solidFill>
+                <a:latin typeface="Arial"/>
+              </a:rPr>
+              <a:t>Roadmap for next quarter</a:t>
+            </a:r>
+          </a:p>
+        </p:txBody>
+      </p:sp>
+      <p:sp>
+        <p:nvSpPr>
+          <p:cNvPr id="15" name="TextBox 14"/>
+          <p:cNvSpPr/>
+          <p:nvPr>
+            <p:ph type="body" idx="13"/>
+          </p:nvPr>
+        </p:nvSpPr>
+        <p:spPr>
+          <a:xfrm>
+            <a:off x="457200" y="5151728"/>
+            <a:ext cx="951348" cy="518159"/>
+          </a:xfrm>
+          <a:prstGeom prst="rect">
+            <a:avLst/>
+          </a:prstGeom>
+          <a:noFill/>
+        </p:spPr>
+        <p:txBody>
+          <a:bodyPr wrap="none" lIns="0" rIns="0">
+            <a:noAutofit/>
+          </a:bodyPr>
+          <a:lstStyle/>
+          <a:p>
+            <a:pPr algn="l"/>
+            <a:r>
+              <a:rPr sz="3400" b="1" i="0">
+                <a:solidFill>
+                  <a:srgbClr val="C1642B"/>
+                </a:solidFill>
+                <a:latin typeface="Arial"/>
+              </a:rPr>
+              <a:t>05</a:t>
+            </a:r>
+          </a:p>
+        </p:txBody>
+      </p:sp>
+      <p:sp>
+        <p:nvSpPr>
+          <p:cNvPr id="16" name="TextBox 15"/>
+          <p:cNvSpPr/>
+          <p:nvPr>
+            <p:ph type="body" idx="14"/>
+          </p:nvPr>
+        </p:nvSpPr>
+        <p:spPr>
+          <a:xfrm>
+            <a:off x="1371600" y="5151728"/>
+            <a:ext cx="10363200" cy="518159"/>
+          </a:xfrm>
+          <a:prstGeom prst="rect">
+            <a:avLst/>
+          </a:prstGeom>
+          <a:noFill/>
+        </p:spPr>
+        <p:txBody>
+          <a:bodyPr wrap="none" lIns="0" rIns="0">
+            <a:noAutofit/>
+          </a:bodyPr>
+          <a:lstStyle/>
+          <a:p>
+            <a:pPr algn="l"/>
+            <a:r>
+              <a:rPr sz="3400" b="0" i="0">
+                <a:solidFill>
+                  <a:srgbClr val="1A1A24"/>
+                </a:solidFill>
+                <a:latin typeface="Arial"/>
+              </a:rPr>
+              <a:t>Decisions we need today</a:t>
             </a:r>
           </a:p>
         </p:txBody>
@@ -3347,511 +3453,6 @@
 
 <file path=ppt/slideLayouts/slideLayout20.xml><?xml version="1.0" encoding="utf-8"?>
 <p:sldLayout xmlns:a="http://schemas.openxmlformats.org/drawingml/2006/main" xmlns:r="http://schemas.openxmlformats.org/officeDocument/2006/relationships" xmlns:p="http://schemas.openxmlformats.org/presentationml/2006/main" type="blank" preserve="1">
-  <p:cSld name="slidekit · Agenda">
-    <p:bg>
-      <p:bgPr>
-        <a:solidFill>
-          <a:srgbClr val="FFFFFF"/>
-        </a:solidFill>
-        <a:effectLst/>
-      </p:bgPr>
-    </p:bg>
-    <p:spTree>
-      <p:nvGrpSpPr>
-        <p:cNvPr id="1" name=""/>
-        <p:cNvGrpSpPr/>
-        <p:nvPr/>
-      </p:nvGrpSpPr>
-      <p:grpSpPr>
-        <a:xfrm>
-          <a:off x="0" y="0"/>
-          <a:ext cx="0" cy="0"/>
-          <a:chOff x="0" y="0"/>
-          <a:chExt cx="0" cy="0"/>
-        </a:xfrm>
-      </p:grpSpPr>
-      <p:sp>
-        <p:nvSpPr>
-          <p:cNvPr id="4" name="Slide Number Placeholder 3"/>
-          <p:cNvSpPr>
-            <a:spLocks noGrp="1"/>
-          </p:cNvSpPr>
-          <p:nvPr>
-            <p:ph type="sldNum" sz="quarter" idx="12"/>
-          </p:nvPr>
-        </p:nvSpPr>
-        <p:spPr>
-          <a:xfrm>
-            <a:off x="10363200" y="6035040"/>
-            <a:ext cx="1371600" cy="365760"/>
-          </a:xfrm>
-        </p:spPr>
-        <p:txBody>
-          <a:bodyPr/>
-          <a:lstStyle/>
-          <a:p>
-            <a:fld id="{C1FF6DA9-008F-8B48-92A6-B652298478BF}" type="slidenum">
-              <a:rPr lang="en-US" smtClean="0"/>
-              <a:t>‹#›</a:t>
-            </a:fld>
-            <a:endParaRPr lang="en-US"/>
-          </a:p>
-        </p:txBody>
-      </p:sp>
-      <p:sp>
-        <p:nvSpPr>
-          <p:cNvPr id="5" name="TextBox 4"/>
-          <p:cNvSpPr/>
-          <p:nvPr>
-            <p:ph type="title"/>
-          </p:nvPr>
-        </p:nvSpPr>
-        <p:spPr>
-          <a:xfrm>
-            <a:off x="457200" y="457200"/>
-            <a:ext cx="11277600" cy="768096"/>
-          </a:xfrm>
-          <a:prstGeom prst="rect">
-            <a:avLst/>
-          </a:prstGeom>
-          <a:noFill/>
-        </p:spPr>
-        <p:txBody>
-          <a:bodyPr wrap="none" lIns="0" rIns="0">
-            <a:noAutofit/>
-          </a:bodyPr>
-          <a:lstStyle/>
-          <a:p>
-            <a:pPr algn="l"/>
-            <a:r>
-              <a:rPr sz="4200" b="1" i="0">
-                <a:solidFill>
-                  <a:srgbClr val="1A1A24"/>
-                </a:solidFill>
-                <a:latin typeface="Arial"/>
-              </a:rPr>
-              <a:t>What We Will Cover</a:t>
-            </a:r>
-          </a:p>
-        </p:txBody>
-      </p:sp>
-      <p:sp>
-        <p:nvSpPr>
-          <p:cNvPr id="6" name="Rectangle 5"/>
-          <p:cNvSpPr/>
-          <p:nvPr>
-            <p:ph type="body" idx="1"/>
-          </p:nvPr>
-        </p:nvSpPr>
-        <p:spPr>
-          <a:xfrm>
-            <a:off x="457200" y="1280160"/>
-            <a:ext cx="11277600" cy="64008"/>
-          </a:xfrm>
-          <a:prstGeom prst="rect">
-            <a:avLst/>
-          </a:prstGeom>
-          <a:solidFill>
-            <a:srgbClr val="C1642B"/>
-          </a:solidFill>
-          <a:ln>
-            <a:noFill/>
-          </a:ln>
-          <a:effectLst/>
-        </p:spPr>
-        <p:txBody>
-          <a:bodyPr rtlCol="0" anchor="ctr"/>
-          <a:lstStyle/>
-          <a:p>
-            <a:pPr algn="ctr"/>
-          </a:p>
-        </p:txBody>
-      </p:sp>
-      <p:sp>
-        <p:nvSpPr>
-          <p:cNvPr id="7" name="TextBox 6"/>
-          <p:cNvSpPr/>
-          <p:nvPr>
-            <p:ph type="body" idx="2"/>
-          </p:nvPr>
-        </p:nvSpPr>
-        <p:spPr>
-          <a:xfrm>
-            <a:off x="457200" y="1618488"/>
-            <a:ext cx="951348" cy="518159"/>
-          </a:xfrm>
-          <a:prstGeom prst="rect">
-            <a:avLst/>
-          </a:prstGeom>
-          <a:noFill/>
-        </p:spPr>
-        <p:txBody>
-          <a:bodyPr wrap="none" lIns="0" rIns="0">
-            <a:noAutofit/>
-          </a:bodyPr>
-          <a:lstStyle/>
-          <a:p>
-            <a:pPr algn="l"/>
-            <a:r>
-              <a:rPr sz="3400" b="1" i="0">
-                <a:solidFill>
-                  <a:srgbClr val="C1642B"/>
-                </a:solidFill>
-                <a:latin typeface="Arial"/>
-              </a:rPr>
-              <a:t>01</a:t>
-            </a:r>
-          </a:p>
-        </p:txBody>
-      </p:sp>
-      <p:sp>
-        <p:nvSpPr>
-          <p:cNvPr id="8" name="TextBox 7"/>
-          <p:cNvSpPr/>
-          <p:nvPr>
-            <p:ph type="body" idx="3"/>
-          </p:nvPr>
-        </p:nvSpPr>
-        <p:spPr>
-          <a:xfrm>
-            <a:off x="1371600" y="1618488"/>
-            <a:ext cx="10363200" cy="518159"/>
-          </a:xfrm>
-          <a:prstGeom prst="rect">
-            <a:avLst/>
-          </a:prstGeom>
-          <a:noFill/>
-        </p:spPr>
-        <p:txBody>
-          <a:bodyPr wrap="none" lIns="0" rIns="0">
-            <a:noAutofit/>
-          </a:bodyPr>
-          <a:lstStyle/>
-          <a:p>
-            <a:pPr algn="l"/>
-            <a:r>
-              <a:rPr sz="3400" b="0" i="0">
-                <a:solidFill>
-                  <a:srgbClr val="1A1A24"/>
-                </a:solidFill>
-                <a:latin typeface="Arial"/>
-              </a:rPr>
-              <a:t>Performance against targets</a:t>
-            </a:r>
-          </a:p>
-        </p:txBody>
-      </p:sp>
-      <p:sp>
-        <p:nvSpPr>
-          <p:cNvPr id="9" name="TextBox 8"/>
-          <p:cNvSpPr/>
-          <p:nvPr>
-            <p:ph type="body" idx="4"/>
-          </p:nvPr>
-        </p:nvSpPr>
-        <p:spPr>
-          <a:xfrm>
-            <a:off x="457200" y="2501798"/>
-            <a:ext cx="951348" cy="518159"/>
-          </a:xfrm>
-          <a:prstGeom prst="rect">
-            <a:avLst/>
-          </a:prstGeom>
-          <a:noFill/>
-        </p:spPr>
-        <p:txBody>
-          <a:bodyPr wrap="none" lIns="0" rIns="0">
-            <a:noAutofit/>
-          </a:bodyPr>
-          <a:lstStyle/>
-          <a:p>
-            <a:pPr algn="l"/>
-            <a:r>
-              <a:rPr sz="3400" b="1" i="0">
-                <a:solidFill>
-                  <a:srgbClr val="C1642B"/>
-                </a:solidFill>
-                <a:latin typeface="Arial"/>
-              </a:rPr>
-              <a:t>02</a:t>
-            </a:r>
-          </a:p>
-        </p:txBody>
-      </p:sp>
-      <p:sp>
-        <p:nvSpPr>
-          <p:cNvPr id="10" name="TextBox 9"/>
-          <p:cNvSpPr/>
-          <p:nvPr>
-            <p:ph type="body" idx="5"/>
-          </p:nvPr>
-        </p:nvSpPr>
-        <p:spPr>
-          <a:xfrm>
-            <a:off x="1371600" y="2501798"/>
-            <a:ext cx="10363200" cy="518159"/>
-          </a:xfrm>
-          <a:prstGeom prst="rect">
-            <a:avLst/>
-          </a:prstGeom>
-          <a:noFill/>
-        </p:spPr>
-        <p:txBody>
-          <a:bodyPr wrap="none" lIns="0" rIns="0">
-            <a:noAutofit/>
-          </a:bodyPr>
-          <a:lstStyle/>
-          <a:p>
-            <a:pPr algn="l"/>
-            <a:r>
-              <a:rPr sz="3400" b="0" i="0">
-                <a:solidFill>
-                  <a:srgbClr val="1A1A24"/>
-                </a:solidFill>
-                <a:latin typeface="Arial"/>
-              </a:rPr>
-              <a:t>Customer and market signals</a:t>
-            </a:r>
-          </a:p>
-        </p:txBody>
-      </p:sp>
-      <p:sp>
-        <p:nvSpPr>
-          <p:cNvPr id="11" name="TextBox 10"/>
-          <p:cNvSpPr/>
-          <p:nvPr>
-            <p:ph type="body" idx="6"/>
-          </p:nvPr>
-        </p:nvSpPr>
-        <p:spPr>
-          <a:xfrm>
-            <a:off x="457200" y="3385108"/>
-            <a:ext cx="951348" cy="518159"/>
-          </a:xfrm>
-          <a:prstGeom prst="rect">
-            <a:avLst/>
-          </a:prstGeom>
-          <a:noFill/>
-        </p:spPr>
-        <p:txBody>
-          <a:bodyPr wrap="none" lIns="0" rIns="0">
-            <a:noAutofit/>
-          </a:bodyPr>
-          <a:lstStyle/>
-          <a:p>
-            <a:pPr algn="l"/>
-            <a:r>
-              <a:rPr sz="3400" b="1" i="0">
-                <a:solidFill>
-                  <a:srgbClr val="C1642B"/>
-                </a:solidFill>
-                <a:latin typeface="Arial"/>
-              </a:rPr>
-              <a:t>03</a:t>
-            </a:r>
-          </a:p>
-        </p:txBody>
-      </p:sp>
-      <p:sp>
-        <p:nvSpPr>
-          <p:cNvPr id="12" name="TextBox 11"/>
-          <p:cNvSpPr/>
-          <p:nvPr>
-            <p:ph type="body" idx="7"/>
-          </p:nvPr>
-        </p:nvSpPr>
-        <p:spPr>
-          <a:xfrm>
-            <a:off x="1371600" y="3385108"/>
-            <a:ext cx="10363200" cy="518159"/>
-          </a:xfrm>
-          <a:prstGeom prst="rect">
-            <a:avLst/>
-          </a:prstGeom>
-          <a:noFill/>
-        </p:spPr>
-        <p:txBody>
-          <a:bodyPr wrap="none" lIns="0" rIns="0">
-            <a:noAutofit/>
-          </a:bodyPr>
-          <a:lstStyle/>
-          <a:p>
-            <a:pPr algn="l"/>
-            <a:r>
-              <a:rPr sz="3400" b="0" i="0">
-                <a:solidFill>
-                  <a:srgbClr val="1A1A24"/>
-                </a:solidFill>
-                <a:latin typeface="Arial"/>
-              </a:rPr>
-              <a:t>Operational health and risks</a:t>
-            </a:r>
-          </a:p>
-        </p:txBody>
-      </p:sp>
-      <p:sp>
-        <p:nvSpPr>
-          <p:cNvPr id="13" name="TextBox 12"/>
-          <p:cNvSpPr/>
-          <p:nvPr>
-            <p:ph type="body" idx="8"/>
-          </p:nvPr>
-        </p:nvSpPr>
-        <p:spPr>
-          <a:xfrm>
-            <a:off x="457200" y="4268418"/>
-            <a:ext cx="951348" cy="518159"/>
-          </a:xfrm>
-          <a:prstGeom prst="rect">
-            <a:avLst/>
-          </a:prstGeom>
-          <a:noFill/>
-        </p:spPr>
-        <p:txBody>
-          <a:bodyPr wrap="none" lIns="0" rIns="0">
-            <a:noAutofit/>
-          </a:bodyPr>
-          <a:lstStyle/>
-          <a:p>
-            <a:pPr algn="l"/>
-            <a:r>
-              <a:rPr sz="3400" b="1" i="0">
-                <a:solidFill>
-                  <a:srgbClr val="C1642B"/>
-                </a:solidFill>
-                <a:latin typeface="Arial"/>
-              </a:rPr>
-              <a:t>04</a:t>
-            </a:r>
-          </a:p>
-        </p:txBody>
-      </p:sp>
-      <p:sp>
-        <p:nvSpPr>
-          <p:cNvPr id="14" name="TextBox 13"/>
-          <p:cNvSpPr/>
-          <p:nvPr>
-            <p:ph type="body" idx="9"/>
-          </p:nvPr>
-        </p:nvSpPr>
-        <p:spPr>
-          <a:xfrm>
-            <a:off x="1371600" y="4268418"/>
-            <a:ext cx="10363200" cy="518159"/>
-          </a:xfrm>
-          <a:prstGeom prst="rect">
-            <a:avLst/>
-          </a:prstGeom>
-          <a:noFill/>
-        </p:spPr>
-        <p:txBody>
-          <a:bodyPr wrap="none" lIns="0" rIns="0">
-            <a:noAutofit/>
-          </a:bodyPr>
-          <a:lstStyle/>
-          <a:p>
-            <a:pPr algn="l"/>
-            <a:r>
-              <a:rPr sz="3400" b="0" i="0">
-                <a:solidFill>
-                  <a:srgbClr val="1A1A24"/>
-                </a:solidFill>
-                <a:latin typeface="Arial"/>
-              </a:rPr>
-              <a:t>Roadmap for next quarter</a:t>
-            </a:r>
-          </a:p>
-        </p:txBody>
-      </p:sp>
-      <p:sp>
-        <p:nvSpPr>
-          <p:cNvPr id="15" name="TextBox 14"/>
-          <p:cNvSpPr/>
-          <p:nvPr>
-            <p:ph type="body" idx="13"/>
-          </p:nvPr>
-        </p:nvSpPr>
-        <p:spPr>
-          <a:xfrm>
-            <a:off x="457200" y="5151728"/>
-            <a:ext cx="951348" cy="518159"/>
-          </a:xfrm>
-          <a:prstGeom prst="rect">
-            <a:avLst/>
-          </a:prstGeom>
-          <a:noFill/>
-        </p:spPr>
-        <p:txBody>
-          <a:bodyPr wrap="none" lIns="0" rIns="0">
-            <a:noAutofit/>
-          </a:bodyPr>
-          <a:lstStyle/>
-          <a:p>
-            <a:pPr algn="l"/>
-            <a:r>
-              <a:rPr sz="3400" b="1" i="0">
-                <a:solidFill>
-                  <a:srgbClr val="C1642B"/>
-                </a:solidFill>
-                <a:latin typeface="Arial"/>
-              </a:rPr>
-              <a:t>05</a:t>
-            </a:r>
-          </a:p>
-        </p:txBody>
-      </p:sp>
-      <p:sp>
-        <p:nvSpPr>
-          <p:cNvPr id="16" name="TextBox 15"/>
-          <p:cNvSpPr/>
-          <p:nvPr>
-            <p:ph type="body" idx="14"/>
-          </p:nvPr>
-        </p:nvSpPr>
-        <p:spPr>
-          <a:xfrm>
-            <a:off x="1371600" y="5151728"/>
-            <a:ext cx="10363200" cy="518159"/>
-          </a:xfrm>
-          <a:prstGeom prst="rect">
-            <a:avLst/>
-          </a:prstGeom>
-          <a:noFill/>
-        </p:spPr>
-        <p:txBody>
-          <a:bodyPr wrap="none" lIns="0" rIns="0">
-            <a:noAutofit/>
-          </a:bodyPr>
-          <a:lstStyle/>
-          <a:p>
-            <a:pPr algn="l"/>
-            <a:r>
-              <a:rPr sz="3400" b="0" i="0">
-                <a:solidFill>
-                  <a:srgbClr val="1A1A24"/>
-                </a:solidFill>
-                <a:latin typeface="Arial"/>
-              </a:rPr>
-              <a:t>Decisions we need today</a:t>
-            </a:r>
-          </a:p>
-        </p:txBody>
-      </p:sp>
-    </p:spTree>
-    <p:extLst>
-      <p:ext uri="{BB962C8B-B14F-4D97-AF65-F5344CB8AC3E}">
-        <p14:creationId xmlns:p14="http://schemas.microsoft.com/office/powerpoint/2010/main" val="1212999818"/>
-      </p:ext>
-    </p:extLst>
-  </p:cSld>
-  <p:clrMapOvr>
-    <a:masterClrMapping/>
-  </p:clrMapOvr>
-</p:sldLayout>
-</file>
-
-<file path=ppt/slideLayouts/slideLayout21.xml><?xml version="1.0" encoding="utf-8"?>
-<p:sldLayout xmlns:a="http://schemas.openxmlformats.org/drawingml/2006/main" xmlns:r="http://schemas.openxmlformats.org/officeDocument/2006/relationships" xmlns:p="http://schemas.openxmlformats.org/presentationml/2006/main" type="blank" preserve="1">
   <p:cSld name="slidekit · Big Number">
     <p:bg>
       <p:bgPr>
@@ -3887,8 +3488,8 @@
         </p:nvSpPr>
         <p:spPr>
           <a:xfrm>
-            <a:off x="10363200" y="6035040"/>
-            <a:ext cx="1371600" cy="365760"/>
+            <a:off x="11186160" y="6035040"/>
+            <a:ext cx="548640" cy="365760"/>
           </a:xfrm>
         </p:spPr>
         <p:txBody>
@@ -4022,7 +3623,7 @@
 </p:sldLayout>
 </file>
 
-<file path=ppt/slideLayouts/slideLayout22.xml><?xml version="1.0" encoding="utf-8"?>
+<file path=ppt/slideLayouts/slideLayout21.xml><?xml version="1.0" encoding="utf-8"?>
 <p:sldLayout xmlns:a="http://schemas.openxmlformats.org/drawingml/2006/main" xmlns:r="http://schemas.openxmlformats.org/officeDocument/2006/relationships" xmlns:p="http://schemas.openxmlformats.org/presentationml/2006/main" type="blank" preserve="1">
   <p:cSld name="slidekit · Pull Quote">
     <p:bg>
@@ -4059,8 +3660,8 @@
         </p:nvSpPr>
         <p:spPr>
           <a:xfrm>
-            <a:off x="10363200" y="6035040"/>
-            <a:ext cx="1371600" cy="365760"/>
+            <a:off x="11186160" y="6035040"/>
+            <a:ext cx="548640" cy="365760"/>
           </a:xfrm>
         </p:spPr>
         <p:txBody>
@@ -4085,8 +3686,8 @@
         </p:nvSpPr>
         <p:spPr>
           <a:xfrm>
-            <a:off x="457200" y="2301240"/>
-            <a:ext cx="128016" cy="2255520"/>
+            <a:off x="457200" y="2621280"/>
+            <a:ext cx="128016" cy="1615440"/>
           </a:xfrm>
           <a:prstGeom prst="rect">
             <a:avLst/>
@@ -4117,16 +3718,16 @@
         </p:nvSpPr>
         <p:spPr>
           <a:xfrm>
-            <a:off x="996696" y="2301240"/>
-            <a:ext cx="10738104" cy="1371600"/>
-          </a:xfrm>
-          <a:prstGeom prst="rect">
-            <a:avLst/>
-          </a:prstGeom>
-          <a:noFill/>
-        </p:spPr>
-        <p:txBody>
-          <a:bodyPr wrap="square" lIns="0" rIns="0">
+            <a:off x="996696" y="2621280"/>
+            <a:ext cx="11195304" cy="731520"/>
+          </a:xfrm>
+          <a:prstGeom prst="rect">
+            <a:avLst/>
+          </a:prstGeom>
+          <a:noFill/>
+        </p:spPr>
+        <p:txBody>
+          <a:bodyPr wrap="none" lIns="0" rIns="0">
             <a:noAutofit/>
           </a:bodyPr>
           <a:lstStyle/>
@@ -4139,7 +3740,7 @@
                 </a:solidFill>
                 <a:latin typeface="Arial"/>
               </a:rPr>
-              <a:t>"We stopped buying tools and started buying outcomes."</a:t>
+              <a:t>"We buy outcomes, not tools."</a:t>
             </a:r>
           </a:p>
         </p:txBody>
@@ -4154,7 +3755,7 @@
         </p:nvSpPr>
         <p:spPr>
           <a:xfrm>
-            <a:off x="996696" y="3947160"/>
+            <a:off x="996696" y="3627120"/>
             <a:ext cx="11195304" cy="609600"/>
           </a:xfrm>
           <a:prstGeom prst="rect">
@@ -4172,7 +3773,7 @@
             <a:r>
               <a:rPr sz="3400" b="0" i="0">
                 <a:solidFill>
-                  <a:srgbClr val="7C8794"/>
+                  <a:srgbClr val="1A1A24"/>
                 </a:solidFill>
                 <a:latin typeface="Arial"/>
               </a:rPr>
@@ -4194,7 +3795,7 @@
 </p:sldLayout>
 </file>
 
-<file path=ppt/slideLayouts/slideLayout23.xml><?xml version="1.0" encoding="utf-8"?>
+<file path=ppt/slideLayouts/slideLayout22.xml><?xml version="1.0" encoding="utf-8"?>
 <p:sldLayout xmlns:a="http://schemas.openxmlformats.org/drawingml/2006/main" xmlns:r="http://schemas.openxmlformats.org/officeDocument/2006/relationships" xmlns:p="http://schemas.openxmlformats.org/presentationml/2006/main" type="blank" preserve="1">
   <p:cSld name="slidekit · Definition">
     <p:bg>
@@ -4231,8 +3832,8 @@
         </p:nvSpPr>
         <p:spPr>
           <a:xfrm>
-            <a:off x="10363200" y="6035040"/>
-            <a:ext cx="1371600" cy="365760"/>
+            <a:off x="11186160" y="6035040"/>
+            <a:ext cx="548640" cy="365760"/>
           </a:xfrm>
         </p:spPr>
         <p:txBody>
@@ -4257,8 +3858,8 @@
         </p:nvSpPr>
         <p:spPr>
           <a:xfrm>
-            <a:off x="457200" y="1965960"/>
-            <a:ext cx="128016" cy="2926080"/>
+            <a:off x="457200" y="2484120"/>
+            <a:ext cx="128016" cy="1889760"/>
           </a:xfrm>
           <a:prstGeom prst="rect">
             <a:avLst/>
@@ -4289,7 +3890,7 @@
         </p:nvSpPr>
         <p:spPr>
           <a:xfrm>
-            <a:off x="996696" y="1965960"/>
+            <a:off x="996696" y="2484120"/>
             <a:ext cx="11195304" cy="1005840"/>
           </a:xfrm>
           <a:prstGeom prst="rect">
@@ -4326,16 +3927,16 @@
         </p:nvSpPr>
         <p:spPr>
           <a:xfrm>
-            <a:off x="996696" y="3246120"/>
-            <a:ext cx="10738104" cy="1645920"/>
-          </a:xfrm>
-          <a:prstGeom prst="rect">
-            <a:avLst/>
-          </a:prstGeom>
-          <a:noFill/>
-        </p:spPr>
-        <p:txBody>
-          <a:bodyPr wrap="square" lIns="0" rIns="0">
+            <a:off x="996696" y="3764280"/>
+            <a:ext cx="11195304" cy="609600"/>
+          </a:xfrm>
+          <a:prstGeom prst="rect">
+            <a:avLst/>
+          </a:prstGeom>
+          <a:noFill/>
+        </p:spPr>
+        <p:txBody>
+          <a:bodyPr wrap="none" lIns="0" rIns="0">
             <a:noAutofit/>
           </a:bodyPr>
           <a:lstStyle/>
@@ -4348,7 +3949,7 @@
                 </a:solidFill>
                 <a:latin typeface="Arial"/>
               </a:rPr>
-              <a:t>The percentage of recurring revenue retained from existing customers over a period, including expansion and after churn.</a:t>
+              <a:t>Revenue kept from existing customers.</a:t>
             </a:r>
           </a:p>
         </p:txBody>
@@ -4366,7 +3967,7 @@
 </p:sldLayout>
 </file>
 
-<file path=ppt/slideLayouts/slideLayout24.xml><?xml version="1.0" encoding="utf-8"?>
+<file path=ppt/slideLayouts/slideLayout23.xml><?xml version="1.0" encoding="utf-8"?>
 <p:sldLayout xmlns:a="http://schemas.openxmlformats.org/drawingml/2006/main" xmlns:r="http://schemas.openxmlformats.org/officeDocument/2006/relationships" xmlns:p="http://schemas.openxmlformats.org/presentationml/2006/main" type="blank" preserve="1">
   <p:cSld name="slidekit · Question">
     <p:bg>
@@ -4403,8 +4004,8 @@
         </p:nvSpPr>
         <p:spPr>
           <a:xfrm>
-            <a:off x="10363200" y="6035040"/>
-            <a:ext cx="1371600" cy="365760"/>
+            <a:off x="11186160" y="6035040"/>
+            <a:ext cx="548640" cy="365760"/>
           </a:xfrm>
         </p:spPr>
         <p:txBody>
@@ -4429,8 +4030,8 @@
         </p:nvSpPr>
         <p:spPr>
           <a:xfrm>
-            <a:off x="457200" y="2011680"/>
-            <a:ext cx="128016" cy="2834640"/>
+            <a:off x="457200" y="2926080"/>
+            <a:ext cx="128016" cy="1005840"/>
           </a:xfrm>
           <a:prstGeom prst="rect">
             <a:avLst/>
@@ -4461,16 +4062,16 @@
         </p:nvSpPr>
         <p:spPr>
           <a:xfrm>
-            <a:off x="996696" y="2011680"/>
-            <a:ext cx="10738104" cy="2834640"/>
-          </a:xfrm>
-          <a:prstGeom prst="rect">
-            <a:avLst/>
-          </a:prstGeom>
-          <a:noFill/>
-        </p:spPr>
-        <p:txBody>
-          <a:bodyPr wrap="square" lIns="0" rIns="0">
+            <a:off x="996696" y="2926080"/>
+            <a:ext cx="11195304" cy="1005840"/>
+          </a:xfrm>
+          <a:prstGeom prst="rect">
+            <a:avLst/>
+          </a:prstGeom>
+          <a:noFill/>
+        </p:spPr>
+        <p:txBody>
+          <a:bodyPr wrap="none" lIns="0" rIns="0">
             <a:noAutofit/>
           </a:bodyPr>
           <a:lstStyle/>
@@ -4483,7 +4084,7 @@
                 </a:solidFill>
                 <a:latin typeface="Arial"/>
               </a:rPr>
-              <a:t>What would we build if we trusted our customers completely?</a:t>
+              <a:t>What if we trusted users?</a:t>
             </a:r>
           </a:p>
         </p:txBody>
@@ -4501,7 +4102,7 @@
 </p:sldLayout>
 </file>
 
-<file path=ppt/slideLayouts/slideLayout25.xml><?xml version="1.0" encoding="utf-8"?>
+<file path=ppt/slideLayouts/slideLayout24.xml><?xml version="1.0" encoding="utf-8"?>
 <p:sldLayout xmlns:a="http://schemas.openxmlformats.org/drawingml/2006/main" xmlns:r="http://schemas.openxmlformats.org/officeDocument/2006/relationships" xmlns:p="http://schemas.openxmlformats.org/presentationml/2006/main" type="blank" preserve="1">
   <p:cSld name="slidekit · Bullet List">
     <p:bg>
@@ -4538,8 +4139,8 @@
         </p:nvSpPr>
         <p:spPr>
           <a:xfrm>
-            <a:off x="10363200" y="6035040"/>
-            <a:ext cx="1371600" cy="365760"/>
+            <a:off x="11186160" y="6035040"/>
+            <a:ext cx="548640" cy="365760"/>
           </a:xfrm>
         </p:spPr>
         <p:txBody>
@@ -4582,7 +4183,7 @@
             <a:r>
               <a:rPr sz="4200" b="1" i="0">
                 <a:solidFill>
-                  <a:srgbClr val="1A1A24"/>
+                  <a:srgbClr val="C1642B"/>
                 </a:solidFill>
                 <a:latin typeface="Arial"/>
               </a:rPr>
@@ -4715,7 +4316,7 @@
 </p:sldLayout>
 </file>
 
-<file path=ppt/slideLayouts/slideLayout26.xml><?xml version="1.0" encoding="utf-8"?>
+<file path=ppt/slideLayouts/slideLayout25.xml><?xml version="1.0" encoding="utf-8"?>
 <p:sldLayout xmlns:a="http://schemas.openxmlformats.org/drawingml/2006/main" xmlns:r="http://schemas.openxmlformats.org/officeDocument/2006/relationships" xmlns:p="http://schemas.openxmlformats.org/presentationml/2006/main" type="blank" preserve="1">
   <p:cSld name="slidekit · Code Block">
     <p:bg>
@@ -4752,8 +4353,8 @@
         </p:nvSpPr>
         <p:spPr>
           <a:xfrm>
-            <a:off x="10363200" y="6035040"/>
-            <a:ext cx="1371600" cy="365760"/>
+            <a:off x="11186160" y="6035040"/>
+            <a:ext cx="548640" cy="365760"/>
           </a:xfrm>
         </p:spPr>
         <p:txBody>
@@ -4785,7 +4386,7 @@
             <a:avLst/>
           </a:prstGeom>
           <a:solidFill>
-            <a:srgbClr val="FF5F56"/>
+            <a:srgbClr val="FFFFFF"/>
           </a:solidFill>
           <a:ln>
             <a:noFill/>
@@ -4817,7 +4418,7 @@
             <a:avLst/>
           </a:prstGeom>
           <a:solidFill>
-            <a:srgbClr val="FFBD2E"/>
+            <a:srgbClr val="FFFFFF"/>
           </a:solidFill>
           <a:ln>
             <a:noFill/>
@@ -4849,7 +4450,7 @@
             <a:avLst/>
           </a:prstGeom>
           <a:solidFill>
-            <a:srgbClr val="27C93F"/>
+            <a:srgbClr val="FFFFFF"/>
           </a:solidFill>
           <a:ln>
             <a:noFill/>
@@ -4892,7 +4493,7 @@
             <a:r>
               <a:rPr sz="4200" b="0" i="0">
                 <a:solidFill>
-                  <a:srgbClr val="D4D4D4"/>
+                  <a:srgbClr val="FFFFFF"/>
                 </a:solidFill>
                 <a:latin typeface="Arial"/>
               </a:rPr>
@@ -4929,7 +4530,7 @@
             <a:r>
               <a:rPr sz="3400" b="0" i="0">
                 <a:solidFill>
-                  <a:srgbClr val="6A9955"/>
+                  <a:srgbClr val="FFFFFF"/>
                 </a:solidFill>
                 <a:latin typeface="Arial"/>
               </a:rPr>
@@ -4986,7 +4587,7 @@
         <p:spPr>
           <a:xfrm>
             <a:off x="1057461" y="2356103"/>
-            <a:ext cx="302848" cy="518159"/>
+            <a:ext cx="2524382" cy="518159"/>
           </a:xfrm>
           <a:prstGeom prst="rect">
             <a:avLst/>
@@ -5003,11 +4604,11 @@
             <a:r>
               <a:rPr sz="3400" b="0" i="0">
                 <a:solidFill>
-                  <a:srgbClr val="D4D4D4"/>
-                </a:solidFill>
-                <a:latin typeface="Arial"/>
-              </a:rPr>
-              <a:t> </a:t>
+                  <a:srgbClr val="FFFFFF"/>
+                </a:solidFill>
+                <a:latin typeface="Arial"/>
+              </a:rPr>
+              <a:t> main():</a:t>
             </a:r>
           </a:p>
         </p:txBody>
@@ -5022,8 +4623,8 @@
         </p:nvSpPr>
         <p:spPr>
           <a:xfrm>
-            <a:off x="1177429" y="2356103"/>
-            <a:ext cx="1680348" cy="518159"/>
+            <a:off x="457200" y="2874262"/>
+            <a:ext cx="7046475" cy="518159"/>
           </a:xfrm>
           <a:prstGeom prst="rect">
             <a:avLst/>
@@ -5040,11 +4641,11 @@
             <a:r>
               <a:rPr sz="3400" b="0" i="0">
                 <a:solidFill>
-                  <a:srgbClr val="DCDCAA"/>
-                </a:solidFill>
-                <a:latin typeface="Arial"/>
-              </a:rPr>
-              <a:t>main</a:t>
+                  <a:srgbClr val="FFFFFF"/>
+                </a:solidFill>
+                <a:latin typeface="Arial"/>
+              </a:rPr>
+              <a:t>    print("Hello, world!")</a:t>
             </a:r>
           </a:p>
         </p:txBody>
@@ -5059,8 +4660,8 @@
         </p:nvSpPr>
         <p:spPr>
           <a:xfrm>
-            <a:off x="2113347" y="2356103"/>
-            <a:ext cx="834964" cy="518159"/>
+            <a:off x="457200" y="3910580"/>
+            <a:ext cx="2140486" cy="518159"/>
           </a:xfrm>
           <a:prstGeom prst="rect">
             <a:avLst/>
@@ -5077,11 +4678,11 @@
             <a:r>
               <a:rPr sz="3400" b="0" i="0">
                 <a:solidFill>
-                  <a:srgbClr val="D4D4D4"/>
-                </a:solidFill>
-                <a:latin typeface="Arial"/>
-              </a:rPr>
-              <a:t>():</a:t>
+                  <a:srgbClr val="FFFFFF"/>
+                </a:solidFill>
+                <a:latin typeface="Arial"/>
+              </a:rPr>
+              <a:t>main()</a:t>
             </a:r>
           </a:p>
         </p:txBody>
@@ -5092,265 +4693,6 @@
           <p:cNvSpPr/>
           <p:nvPr>
             <p:ph type="body" idx="13"/>
-          </p:nvPr>
-        </p:nvSpPr>
-        <p:spPr>
-          <a:xfrm>
-            <a:off x="457200" y="2874262"/>
-            <a:ext cx="662751" cy="518159"/>
-          </a:xfrm>
-          <a:prstGeom prst="rect">
-            <a:avLst/>
-          </a:prstGeom>
-          <a:noFill/>
-        </p:spPr>
-        <p:txBody>
-          <a:bodyPr wrap="none" lIns="0" rIns="0">
-            <a:noAutofit/>
-          </a:bodyPr>
-          <a:lstStyle/>
-          <a:p>
-            <a:pPr algn="l"/>
-            <a:r>
-              <a:rPr sz="3400" b="0" i="0">
-                <a:solidFill>
-                  <a:srgbClr val="D4D4D4"/>
-                </a:solidFill>
-                <a:latin typeface="Arial"/>
-              </a:rPr>
-              <a:t>    </a:t>
-            </a:r>
-          </a:p>
-        </p:txBody>
-      </p:sp>
-      <p:sp>
-        <p:nvSpPr>
-          <p:cNvPr id="15" name="TextBox 14"/>
-          <p:cNvSpPr/>
-          <p:nvPr>
-            <p:ph type="body" idx="14"/>
-          </p:nvPr>
-        </p:nvSpPr>
-        <p:spPr>
-          <a:xfrm>
-            <a:off x="937071" y="2874262"/>
-            <a:ext cx="1526857" cy="518159"/>
-          </a:xfrm>
-          <a:prstGeom prst="rect">
-            <a:avLst/>
-          </a:prstGeom>
-          <a:noFill/>
-        </p:spPr>
-        <p:txBody>
-          <a:bodyPr wrap="none" lIns="0" rIns="0">
-            <a:noAutofit/>
-          </a:bodyPr>
-          <a:lstStyle/>
-          <a:p>
-            <a:pPr algn="l"/>
-            <a:r>
-              <a:rPr sz="3400" b="0" i="0">
-                <a:solidFill>
-                  <a:srgbClr val="DCDCAA"/>
-                </a:solidFill>
-                <a:latin typeface="Arial"/>
-              </a:rPr>
-              <a:t>print</a:t>
-            </a:r>
-          </a:p>
-        </p:txBody>
-      </p:sp>
-      <p:sp>
-        <p:nvSpPr>
-          <p:cNvPr id="16" name="TextBox 15"/>
-          <p:cNvSpPr/>
-          <p:nvPr>
-            <p:ph type="body" idx="15"/>
-          </p:nvPr>
-        </p:nvSpPr>
-        <p:spPr>
-          <a:xfrm>
-            <a:off x="1777057" y="2874262"/>
-            <a:ext cx="412948" cy="518159"/>
-          </a:xfrm>
-          <a:prstGeom prst="rect">
-            <a:avLst/>
-          </a:prstGeom>
-          <a:noFill/>
-        </p:spPr>
-        <p:txBody>
-          <a:bodyPr wrap="none" lIns="0" rIns="0">
-            <a:noAutofit/>
-          </a:bodyPr>
-          <a:lstStyle/>
-          <a:p>
-            <a:pPr algn="l"/>
-            <a:r>
-              <a:rPr sz="3400" b="0" i="0">
-                <a:solidFill>
-                  <a:srgbClr val="D4D4D4"/>
-                </a:solidFill>
-                <a:latin typeface="Arial"/>
-              </a:rPr>
-              <a:t>(</a:t>
-            </a:r>
-          </a:p>
-        </p:txBody>
-      </p:sp>
-      <p:sp>
-        <p:nvSpPr>
-          <p:cNvPr id="17" name="TextBox 16"/>
-          <p:cNvSpPr/>
-          <p:nvPr>
-            <p:ph type="body" idx="16"/>
-          </p:nvPr>
-        </p:nvSpPr>
-        <p:spPr>
-          <a:xfrm>
-            <a:off x="1920850" y="2874262"/>
-            <a:ext cx="4474566" cy="518159"/>
-          </a:xfrm>
-          <a:prstGeom prst="rect">
-            <a:avLst/>
-          </a:prstGeom>
-          <a:noFill/>
-        </p:spPr>
-        <p:txBody>
-          <a:bodyPr wrap="none" lIns="0" rIns="0">
-            <a:noAutofit/>
-          </a:bodyPr>
-          <a:lstStyle/>
-          <a:p>
-            <a:pPr algn="l"/>
-            <a:r>
-              <a:rPr sz="3400" b="0" i="0">
-                <a:solidFill>
-                  <a:srgbClr val="CE9178"/>
-                </a:solidFill>
-                <a:latin typeface="Arial"/>
-              </a:rPr>
-              <a:t>"Hello, world!"</a:t>
-            </a:r>
-          </a:p>
-        </p:txBody>
-      </p:sp>
-      <p:sp>
-        <p:nvSpPr>
-          <p:cNvPr id="18" name="TextBox 17"/>
-          <p:cNvSpPr/>
-          <p:nvPr>
-            <p:ph type="body" idx="17"/>
-          </p:nvPr>
-        </p:nvSpPr>
-        <p:spPr>
-          <a:xfrm>
-            <a:off x="4603155" y="2874262"/>
-            <a:ext cx="412948" cy="518159"/>
-          </a:xfrm>
-          <a:prstGeom prst="rect">
-            <a:avLst/>
-          </a:prstGeom>
-          <a:noFill/>
-        </p:spPr>
-        <p:txBody>
-          <a:bodyPr wrap="none" lIns="0" rIns="0">
-            <a:noAutofit/>
-          </a:bodyPr>
-          <a:lstStyle/>
-          <a:p>
-            <a:pPr algn="l"/>
-            <a:r>
-              <a:rPr sz="3400" b="0" i="0">
-                <a:solidFill>
-                  <a:srgbClr val="D4D4D4"/>
-                </a:solidFill>
-                <a:latin typeface="Arial"/>
-              </a:rPr>
-              <a:t>)</a:t>
-            </a:r>
-          </a:p>
-        </p:txBody>
-      </p:sp>
-      <p:sp>
-        <p:nvSpPr>
-          <p:cNvPr id="19" name="TextBox 18"/>
-          <p:cNvSpPr/>
-          <p:nvPr>
-            <p:ph type="body" idx="18"/>
-          </p:nvPr>
-        </p:nvSpPr>
-        <p:spPr>
-          <a:xfrm>
-            <a:off x="457200" y="3910580"/>
-            <a:ext cx="1680348" cy="518159"/>
-          </a:xfrm>
-          <a:prstGeom prst="rect">
-            <a:avLst/>
-          </a:prstGeom>
-          <a:noFill/>
-        </p:spPr>
-        <p:txBody>
-          <a:bodyPr wrap="none" lIns="0" rIns="0">
-            <a:noAutofit/>
-          </a:bodyPr>
-          <a:lstStyle/>
-          <a:p>
-            <a:pPr algn="l"/>
-            <a:r>
-              <a:rPr sz="3400" b="0" i="0">
-                <a:solidFill>
-                  <a:srgbClr val="DCDCAA"/>
-                </a:solidFill>
-                <a:latin typeface="Arial"/>
-              </a:rPr>
-              <a:t>main</a:t>
-            </a:r>
-          </a:p>
-        </p:txBody>
-      </p:sp>
-      <p:sp>
-        <p:nvSpPr>
-          <p:cNvPr id="20" name="TextBox 19"/>
-          <p:cNvSpPr/>
-          <p:nvPr>
-            <p:ph type="body" idx="19"/>
-          </p:nvPr>
-        </p:nvSpPr>
-        <p:spPr>
-          <a:xfrm>
-            <a:off x="1393118" y="3910580"/>
-            <a:ext cx="643017" cy="518159"/>
-          </a:xfrm>
-          <a:prstGeom prst="rect">
-            <a:avLst/>
-          </a:prstGeom>
-          <a:noFill/>
-        </p:spPr>
-        <p:txBody>
-          <a:bodyPr wrap="none" lIns="0" rIns="0">
-            <a:noAutofit/>
-          </a:bodyPr>
-          <a:lstStyle/>
-          <a:p>
-            <a:pPr algn="l"/>
-            <a:r>
-              <a:rPr sz="3400" b="0" i="0">
-                <a:solidFill>
-                  <a:srgbClr val="D4D4D4"/>
-                </a:solidFill>
-                <a:latin typeface="Arial"/>
-              </a:rPr>
-              <a:t>()</a:t>
-            </a:r>
-          </a:p>
-        </p:txBody>
-      </p:sp>
-      <p:sp>
-        <p:nvSpPr>
-          <p:cNvPr id="21" name="TextBox 20"/>
-          <p:cNvSpPr/>
-          <p:nvPr>
-            <p:ph type="body" idx="20"/>
           </p:nvPr>
         </p:nvSpPr>
         <p:spPr>
@@ -5373,7 +4715,7 @@
             <a:r>
               <a:rPr sz="3400" b="0" i="0">
                 <a:solidFill>
-                  <a:srgbClr val="4EC9B0"/>
+                  <a:srgbClr val="569CD6"/>
                 </a:solidFill>
                 <a:latin typeface="Arial"/>
               </a:rPr>
@@ -5384,10 +4726,10 @@
       </p:sp>
       <p:sp>
         <p:nvSpPr>
-          <p:cNvPr id="22" name="TextBox 21"/>
-          <p:cNvSpPr/>
-          <p:nvPr>
-            <p:ph type="body" idx="21"/>
+          <p:cNvPr id="15" name="TextBox 14"/>
+          <p:cNvSpPr/>
+          <p:nvPr>
+            <p:ph type="body" idx="14"/>
           </p:nvPr>
         </p:nvSpPr>
         <p:spPr>
@@ -5410,7 +4752,7 @@
             <a:r>
               <a:rPr sz="3400" b="0" i="0">
                 <a:solidFill>
-                  <a:srgbClr val="D4D4D4"/>
+                  <a:srgbClr val="FFFFFF"/>
                 </a:solidFill>
                 <a:latin typeface="Arial"/>
               </a:rPr>
@@ -5421,10 +4763,10 @@
       </p:sp>
       <p:sp>
         <p:nvSpPr>
-          <p:cNvPr id="23" name="TextBox 22"/>
-          <p:cNvSpPr/>
-          <p:nvPr>
-            <p:ph type="body" idx="22"/>
+          <p:cNvPr id="16" name="TextBox 15"/>
+          <p:cNvSpPr/>
+          <p:nvPr>
+            <p:ph type="body" idx="15"/>
           </p:nvPr>
         </p:nvSpPr>
         <p:spPr>
@@ -5447,7 +4789,7 @@
             <a:r>
               <a:rPr sz="3400" b="0" i="0">
                 <a:solidFill>
-                  <a:srgbClr val="D4D4D4"/>
+                  <a:srgbClr val="FFFFFF"/>
                 </a:solidFill>
                 <a:latin typeface="Arial"/>
               </a:rPr>
@@ -5469,7 +4811,7 @@
 </p:sldLayout>
 </file>
 
-<file path=ppt/slideLayouts/slideLayout27.xml><?xml version="1.0" encoding="utf-8"?>
+<file path=ppt/slideLayouts/slideLayout26.xml><?xml version="1.0" encoding="utf-8"?>
 <p:sldLayout xmlns:a="http://schemas.openxmlformats.org/drawingml/2006/main" xmlns:r="http://schemas.openxmlformats.org/officeDocument/2006/relationships" xmlns:p="http://schemas.openxmlformats.org/presentationml/2006/main" type="blank" preserve="1">
   <p:cSld name="slidekit · File Tree">
     <p:bg>
@@ -5506,8 +4848,8 @@
         </p:nvSpPr>
         <p:spPr>
           <a:xfrm>
-            <a:off x="10363200" y="6035040"/>
-            <a:ext cx="1371600" cy="365760"/>
+            <a:off x="11186160" y="6035040"/>
+            <a:ext cx="548640" cy="365760"/>
           </a:xfrm>
         </p:spPr>
         <p:txBody>
@@ -5550,7 +4892,7 @@
             <a:r>
               <a:rPr sz="4200" b="1" i="0">
                 <a:solidFill>
-                  <a:srgbClr val="1F3A5F"/>
+                  <a:srgbClr val="C1642B"/>
                 </a:solidFill>
                 <a:latin typeface="Arial"/>
               </a:rPr>
@@ -5578,7 +4920,7 @@
             </a:avLst>
           </a:prstGeom>
           <a:solidFill>
-            <a:srgbClr val="0C1A1C"/>
+            <a:srgbClr val="1A1A24"/>
           </a:solidFill>
           <a:ln>
             <a:noFill/>
@@ -5621,7 +4963,7 @@
             <a:r>
               <a:rPr sz="2600" b="1" i="0">
                 <a:solidFill>
-                  <a:srgbClr val="569CD6"/>
+                  <a:srgbClr val="C1642B"/>
                 </a:solidFill>
                 <a:latin typeface="Courier New"/>
               </a:rPr>
@@ -5658,7 +5000,7 @@
             <a:r>
               <a:rPr sz="2600" b="0" i="0">
                 <a:solidFill>
-                  <a:srgbClr val="55707A"/>
+                  <a:srgbClr val="C1642B"/>
                 </a:solidFill>
                 <a:latin typeface="Courier New"/>
               </a:rPr>
@@ -5695,7 +5037,7 @@
             <a:r>
               <a:rPr sz="2600" b="1" i="0">
                 <a:solidFill>
-                  <a:srgbClr val="569CD6"/>
+                  <a:srgbClr val="C1642B"/>
                 </a:solidFill>
                 <a:latin typeface="Courier New"/>
               </a:rPr>
@@ -5732,7 +5074,7 @@
             <a:r>
               <a:rPr sz="2600" b="0" i="0">
                 <a:solidFill>
-                  <a:srgbClr val="55707A"/>
+                  <a:srgbClr val="C1642B"/>
                 </a:solidFill>
                 <a:latin typeface="Courier New"/>
               </a:rPr>
@@ -5769,7 +5111,7 @@
             <a:r>
               <a:rPr sz="2600" b="1" i="0">
                 <a:solidFill>
-                  <a:srgbClr val="569CD6"/>
+                  <a:srgbClr val="C1642B"/>
                 </a:solidFill>
                 <a:latin typeface="Courier New"/>
               </a:rPr>
@@ -5806,7 +5148,7 @@
             <a:r>
               <a:rPr sz="2600" b="0" i="0">
                 <a:solidFill>
-                  <a:srgbClr val="55707A"/>
+                  <a:srgbClr val="C1642B"/>
                 </a:solidFill>
                 <a:latin typeface="Courier New"/>
               </a:rPr>
@@ -5843,7 +5185,7 @@
             <a:r>
               <a:rPr sz="2600" b="0" i="0">
                 <a:solidFill>
-                  <a:srgbClr val="D4D4D4"/>
+                  <a:srgbClr val="FFFFFF"/>
                 </a:solidFill>
                 <a:latin typeface="Courier New"/>
               </a:rPr>
@@ -5880,7 +5222,7 @@
             <a:r>
               <a:rPr sz="2600" b="0" i="0">
                 <a:solidFill>
-                  <a:srgbClr val="55707A"/>
+                  <a:srgbClr val="C1642B"/>
                 </a:solidFill>
                 <a:latin typeface="Courier New"/>
               </a:rPr>
@@ -5917,7 +5259,7 @@
             <a:r>
               <a:rPr sz="2600" b="0" i="0">
                 <a:solidFill>
-                  <a:srgbClr val="D4D4D4"/>
+                  <a:srgbClr val="FFFFFF"/>
                 </a:solidFill>
                 <a:latin typeface="Courier New"/>
               </a:rPr>
@@ -5954,7 +5296,7 @@
             <a:r>
               <a:rPr sz="2600" b="0" i="0">
                 <a:solidFill>
-                  <a:srgbClr val="55707A"/>
+                  <a:srgbClr val="C1642B"/>
                 </a:solidFill>
                 <a:latin typeface="Courier New"/>
               </a:rPr>
@@ -5991,7 +5333,7 @@
             <a:r>
               <a:rPr sz="2600" b="0" i="0">
                 <a:solidFill>
-                  <a:srgbClr val="D4D4D4"/>
+                  <a:srgbClr val="FFFFFF"/>
                 </a:solidFill>
                 <a:latin typeface="Courier New"/>
               </a:rPr>
@@ -6028,7 +5370,7 @@
             <a:r>
               <a:rPr sz="2600" b="0" i="0">
                 <a:solidFill>
-                  <a:srgbClr val="55707A"/>
+                  <a:srgbClr val="C1642B"/>
                 </a:solidFill>
                 <a:latin typeface="Courier New"/>
               </a:rPr>
@@ -6065,7 +5407,7 @@
             <a:r>
               <a:rPr sz="2600" b="0" i="0">
                 <a:solidFill>
-                  <a:srgbClr val="D4D4D4"/>
+                  <a:srgbClr val="FFFFFF"/>
                 </a:solidFill>
                 <a:latin typeface="Courier New"/>
               </a:rPr>
@@ -6102,7 +5444,7 @@
             <a:r>
               <a:rPr sz="2600" b="0" i="0">
                 <a:solidFill>
-                  <a:srgbClr val="55707A"/>
+                  <a:srgbClr val="C1642B"/>
                 </a:solidFill>
                 <a:latin typeface="Courier New"/>
               </a:rPr>
@@ -6139,7 +5481,7 @@
             <a:r>
               <a:rPr sz="2600" b="0" i="0">
                 <a:solidFill>
-                  <a:srgbClr val="D4D4D4"/>
+                  <a:srgbClr val="FFFFFF"/>
                 </a:solidFill>
                 <a:latin typeface="Courier New"/>
               </a:rPr>
@@ -6161,7 +5503,7 @@
 </p:sldLayout>
 </file>
 
-<file path=ppt/slideLayouts/slideLayout28.xml><?xml version="1.0" encoding="utf-8"?>
+<file path=ppt/slideLayouts/slideLayout27.xml><?xml version="1.0" encoding="utf-8"?>
 <p:sldLayout xmlns:a="http://schemas.openxmlformats.org/drawingml/2006/main" xmlns:r="http://schemas.openxmlformats.org/officeDocument/2006/relationships" xmlns:p="http://schemas.openxmlformats.org/presentationml/2006/main" type="blank" preserve="1">
   <p:cSld name="slidekit · Numbered Steps">
     <p:bg>
@@ -6198,8 +5540,8 @@
         </p:nvSpPr>
         <p:spPr>
           <a:xfrm>
-            <a:off x="10363200" y="6035040"/>
-            <a:ext cx="1371600" cy="365760"/>
+            <a:off x="11186160" y="6035040"/>
+            <a:ext cx="548640" cy="365760"/>
           </a:xfrm>
         </p:spPr>
         <p:txBody>
@@ -6242,7 +5584,7 @@
             <a:r>
               <a:rPr sz="4200" b="1" i="0">
                 <a:solidFill>
-                  <a:srgbClr val="1A1A24"/>
+                  <a:srgbClr val="C1642B"/>
                 </a:solidFill>
                 <a:latin typeface="Arial"/>
               </a:rPr>
@@ -6279,7 +5621,7 @@
             <a:r>
               <a:rPr sz="4200" b="1" i="0">
                 <a:solidFill>
-                  <a:srgbClr val="1F3A5F"/>
+                  <a:srgbClr val="C1642B"/>
                 </a:solidFill>
                 <a:latin typeface="Arial"/>
               </a:rPr>
@@ -6316,7 +5658,7 @@
             <a:r>
               <a:rPr sz="4200" b="1" i="0">
                 <a:solidFill>
-                  <a:srgbClr val="1F3A5F"/>
+                  <a:srgbClr val="C1642B"/>
                 </a:solidFill>
                 <a:latin typeface="Arial"/>
               </a:rPr>
@@ -6390,7 +5732,7 @@
             <a:r>
               <a:rPr sz="4200" b="1" i="0">
                 <a:solidFill>
-                  <a:srgbClr val="1F3A5F"/>
+                  <a:srgbClr val="C1642B"/>
                 </a:solidFill>
                 <a:latin typeface="Arial"/>
               </a:rPr>
@@ -6427,7 +5769,7 @@
             <a:r>
               <a:rPr sz="4200" b="1" i="0">
                 <a:solidFill>
-                  <a:srgbClr val="1F3A5F"/>
+                  <a:srgbClr val="C1642B"/>
                 </a:solidFill>
                 <a:latin typeface="Arial"/>
               </a:rPr>
@@ -6501,7 +5843,7 @@
             <a:r>
               <a:rPr sz="4200" b="1" i="0">
                 <a:solidFill>
-                  <a:srgbClr val="1F3A5F"/>
+                  <a:srgbClr val="C1642B"/>
                 </a:solidFill>
                 <a:latin typeface="Arial"/>
               </a:rPr>
@@ -6538,7 +5880,7 @@
             <a:r>
               <a:rPr sz="4200" b="1" i="0">
                 <a:solidFill>
-                  <a:srgbClr val="1F3A5F"/>
+                  <a:srgbClr val="C1642B"/>
                 </a:solidFill>
                 <a:latin typeface="Arial"/>
               </a:rPr>
@@ -6597,7 +5939,7 @@
 </p:sldLayout>
 </file>
 
-<file path=ppt/slideLayouts/slideLayout29.xml><?xml version="1.0" encoding="utf-8"?>
+<file path=ppt/slideLayouts/slideLayout28.xml><?xml version="1.0" encoding="utf-8"?>
 <p:sldLayout xmlns:a="http://schemas.openxmlformats.org/drawingml/2006/main" xmlns:r="http://schemas.openxmlformats.org/officeDocument/2006/relationships" xmlns:p="http://schemas.openxmlformats.org/presentationml/2006/main" type="blank" preserve="1">
   <p:cSld name="slidekit · Two Panel List">
     <p:bg>
@@ -6634,8 +5976,8 @@
         </p:nvSpPr>
         <p:spPr>
           <a:xfrm>
-            <a:off x="10363200" y="6035040"/>
-            <a:ext cx="1371600" cy="365760"/>
+            <a:off x="11186160" y="6035040"/>
+            <a:ext cx="548640" cy="365760"/>
           </a:xfrm>
         </p:spPr>
         <p:txBody>
@@ -6678,7 +6020,7 @@
             <a:r>
               <a:rPr sz="4200" b="1" i="0">
                 <a:solidFill>
-                  <a:srgbClr val="1F3A5F"/>
+                  <a:srgbClr val="C1642B"/>
                 </a:solidFill>
                 <a:latin typeface="Arial"/>
               </a:rPr>
@@ -6715,7 +6057,7 @@
             <a:r>
               <a:rPr sz="3400" b="1" i="0">
                 <a:solidFill>
-                  <a:srgbClr val="1F3A5F"/>
+                  <a:srgbClr val="C1642B"/>
                 </a:solidFill>
                 <a:latin typeface="Arial"/>
               </a:rPr>
@@ -6734,14 +6076,14 @@
         </p:nvSpPr>
         <p:spPr>
           <a:xfrm>
-            <a:off x="548640" y="2176271"/>
-            <a:ext cx="1650492" cy="54864"/>
+            <a:off x="457200" y="2176271"/>
+            <a:ext cx="1367718" cy="54864"/>
           </a:xfrm>
           <a:prstGeom prst="rect">
             <a:avLst/>
           </a:prstGeom>
           <a:solidFill>
-            <a:srgbClr val="1F3A5F"/>
+            <a:srgbClr val="C1642B"/>
           </a:solidFill>
           <a:ln>
             <a:noFill/>
@@ -6784,7 +6126,7 @@
             <a:r>
               <a:rPr sz="3400" b="1" i="0">
                 <a:solidFill>
-                  <a:srgbClr val="7C8794"/>
+                  <a:srgbClr val="1A1A24"/>
                 </a:solidFill>
                 <a:latin typeface="Arial"/>
               </a:rPr>
@@ -6803,14 +6145,14 @@
         </p:nvSpPr>
         <p:spPr>
           <a:xfrm>
-            <a:off x="6324600" y="2176271"/>
-            <a:ext cx="1650492" cy="54864"/>
+            <a:off x="6233160" y="2176271"/>
+            <a:ext cx="1007604" cy="54864"/>
           </a:xfrm>
           <a:prstGeom prst="rect">
             <a:avLst/>
           </a:prstGeom>
           <a:solidFill>
-            <a:srgbClr val="7C8794"/>
+            <a:srgbClr val="1A1A24"/>
           </a:solidFill>
           <a:ln>
             <a:noFill/>
@@ -7043,6 +6385,294 @@
                 <a:latin typeface="Arial"/>
               </a:rPr>
               <a:t>In-product live chat</a:t>
+            </a:r>
+          </a:p>
+        </p:txBody>
+      </p:sp>
+    </p:spTree>
+    <p:extLst>
+      <p:ext uri="{BB962C8B-B14F-4D97-AF65-F5344CB8AC3E}">
+        <p14:creationId xmlns:p14="http://schemas.microsoft.com/office/powerpoint/2010/main" val="1212999818"/>
+      </p:ext>
+    </p:extLst>
+  </p:cSld>
+  <p:clrMapOvr>
+    <a:masterClrMapping/>
+  </p:clrMapOvr>
+</p:sldLayout>
+</file>
+
+<file path=ppt/slideLayouts/slideLayout29.xml><?xml version="1.0" encoding="utf-8"?>
+<p:sldLayout xmlns:a="http://schemas.openxmlformats.org/drawingml/2006/main" xmlns:r="http://schemas.openxmlformats.org/officeDocument/2006/relationships" xmlns:p="http://schemas.openxmlformats.org/presentationml/2006/main" type="blank" preserve="1">
+  <p:cSld name="slidekit · This vs That">
+    <p:bg>
+      <p:bgPr>
+        <a:solidFill>
+          <a:srgbClr val="FFFFFF"/>
+        </a:solidFill>
+        <a:effectLst/>
+      </p:bgPr>
+    </p:bg>
+    <p:spTree>
+      <p:nvGrpSpPr>
+        <p:cNvPr id="1" name=""/>
+        <p:cNvGrpSpPr/>
+        <p:nvPr/>
+      </p:nvGrpSpPr>
+      <p:grpSpPr>
+        <a:xfrm>
+          <a:off x="0" y="0"/>
+          <a:ext cx="0" cy="0"/>
+          <a:chOff x="0" y="0"/>
+          <a:chExt cx="0" cy="0"/>
+        </a:xfrm>
+      </p:grpSpPr>
+      <p:sp>
+        <p:nvSpPr>
+          <p:cNvPr id="4" name="Slide Number Placeholder 3"/>
+          <p:cNvSpPr>
+            <a:spLocks noGrp="1"/>
+          </p:cNvSpPr>
+          <p:nvPr>
+            <p:ph type="sldNum" sz="quarter" idx="12"/>
+          </p:nvPr>
+        </p:nvSpPr>
+        <p:spPr>
+          <a:xfrm>
+            <a:off x="11186160" y="6035040"/>
+            <a:ext cx="548640" cy="365760"/>
+          </a:xfrm>
+        </p:spPr>
+        <p:txBody>
+          <a:bodyPr/>
+          <a:lstStyle/>
+          <a:p>
+            <a:fld id="{C1FF6DA9-008F-8B48-92A6-B652298478BF}" type="slidenum">
+              <a:rPr lang="en-US" smtClean="0"/>
+              <a:t>‹#›</a:t>
+            </a:fld>
+            <a:endParaRPr lang="en-US"/>
+          </a:p>
+        </p:txBody>
+      </p:sp>
+      <p:sp>
+        <p:nvSpPr>
+          <p:cNvPr id="5" name="TextBox 4"/>
+          <p:cNvSpPr/>
+          <p:nvPr>
+            <p:ph type="title"/>
+          </p:nvPr>
+        </p:nvSpPr>
+        <p:spPr>
+          <a:xfrm>
+            <a:off x="457200" y="457200"/>
+            <a:ext cx="11277600" cy="768096"/>
+          </a:xfrm>
+          <a:prstGeom prst="rect">
+            <a:avLst/>
+          </a:prstGeom>
+          <a:noFill/>
+        </p:spPr>
+        <p:txBody>
+          <a:bodyPr wrap="none" lIns="0" rIns="0">
+            <a:noAutofit/>
+          </a:bodyPr>
+          <a:lstStyle/>
+          <a:p>
+            <a:pPr algn="l"/>
+            <a:r>
+              <a:rPr sz="4200" b="1" i="0">
+                <a:solidFill>
+                  <a:srgbClr val="C1642B"/>
+                </a:solidFill>
+                <a:latin typeface="Arial"/>
+              </a:rPr>
+              <a:t>Cloud or On-Prem</a:t>
+            </a:r>
+          </a:p>
+        </p:txBody>
+      </p:sp>
+      <p:sp>
+        <p:nvSpPr>
+          <p:cNvPr id="6" name="TextBox 5"/>
+          <p:cNvSpPr/>
+          <p:nvPr>
+            <p:ph type="body" idx="1"/>
+          </p:nvPr>
+        </p:nvSpPr>
+        <p:spPr>
+          <a:xfrm>
+            <a:off x="457200" y="2776728"/>
+            <a:ext cx="4792980" cy="914400"/>
+          </a:xfrm>
+          <a:prstGeom prst="rect">
+            <a:avLst/>
+          </a:prstGeom>
+          <a:noFill/>
+        </p:spPr>
+        <p:txBody>
+          <a:bodyPr wrap="none" lIns="0" rIns="0">
+            <a:noAutofit/>
+          </a:bodyPr>
+          <a:lstStyle/>
+          <a:p>
+            <a:pPr algn="ctr"/>
+            <a:r>
+              <a:rPr sz="6000" b="1" i="0">
+                <a:solidFill>
+                  <a:srgbClr val="1A1A24"/>
+                </a:solidFill>
+                <a:latin typeface="Arial"/>
+              </a:rPr>
+              <a:t>3 wks</a:t>
+            </a:r>
+          </a:p>
+        </p:txBody>
+      </p:sp>
+      <p:sp>
+        <p:nvSpPr>
+          <p:cNvPr id="7" name="TextBox 6"/>
+          <p:cNvSpPr/>
+          <p:nvPr>
+            <p:ph type="body" idx="2"/>
+          </p:nvPr>
+        </p:nvSpPr>
+        <p:spPr>
+          <a:xfrm>
+            <a:off x="0" y="3965448"/>
+            <a:ext cx="5707380" cy="518159"/>
+          </a:xfrm>
+          <a:prstGeom prst="rect">
+            <a:avLst/>
+          </a:prstGeom>
+          <a:noFill/>
+        </p:spPr>
+        <p:txBody>
+          <a:bodyPr wrap="none" lIns="0" rIns="0">
+            <a:noAutofit/>
+          </a:bodyPr>
+          <a:lstStyle/>
+          <a:p>
+            <a:pPr algn="ctr"/>
+            <a:r>
+              <a:rPr sz="3400" b="0" i="0">
+                <a:solidFill>
+                  <a:srgbClr val="1A1A24"/>
+                </a:solidFill>
+                <a:latin typeface="Arial"/>
+              </a:rPr>
+              <a:t>Cloud time-to-launch</a:t>
+            </a:r>
+          </a:p>
+        </p:txBody>
+      </p:sp>
+      <p:sp>
+        <p:nvSpPr>
+          <p:cNvPr id="8" name="TextBox 7"/>
+          <p:cNvSpPr/>
+          <p:nvPr>
+            <p:ph type="body" idx="3"/>
+          </p:nvPr>
+        </p:nvSpPr>
+        <p:spPr>
+          <a:xfrm>
+            <a:off x="6941820" y="2776728"/>
+            <a:ext cx="4792980" cy="914400"/>
+          </a:xfrm>
+          <a:prstGeom prst="rect">
+            <a:avLst/>
+          </a:prstGeom>
+          <a:noFill/>
+        </p:spPr>
+        <p:txBody>
+          <a:bodyPr wrap="none" lIns="0" rIns="0">
+            <a:noAutofit/>
+          </a:bodyPr>
+          <a:lstStyle/>
+          <a:p>
+            <a:pPr algn="ctr"/>
+            <a:r>
+              <a:rPr sz="6000" b="1" i="0">
+                <a:solidFill>
+                  <a:srgbClr val="1A1A24"/>
+                </a:solidFill>
+                <a:latin typeface="Arial"/>
+              </a:rPr>
+              <a:t>6 mo</a:t>
+            </a:r>
+          </a:p>
+        </p:txBody>
+      </p:sp>
+      <p:sp>
+        <p:nvSpPr>
+          <p:cNvPr id="9" name="TextBox 8"/>
+          <p:cNvSpPr/>
+          <p:nvPr>
+            <p:ph type="body" idx="4"/>
+          </p:nvPr>
+        </p:nvSpPr>
+        <p:spPr>
+          <a:xfrm>
+            <a:off x="6484620" y="3965448"/>
+            <a:ext cx="5707380" cy="518159"/>
+          </a:xfrm>
+          <a:prstGeom prst="rect">
+            <a:avLst/>
+          </a:prstGeom>
+          <a:noFill/>
+        </p:spPr>
+        <p:txBody>
+          <a:bodyPr wrap="none" lIns="0" rIns="0">
+            <a:noAutofit/>
+          </a:bodyPr>
+          <a:lstStyle/>
+          <a:p>
+            <a:pPr algn="ctr"/>
+            <a:r>
+              <a:rPr sz="3400" b="0" i="0">
+                <a:solidFill>
+                  <a:srgbClr val="1A1A24"/>
+                </a:solidFill>
+                <a:latin typeface="Arial"/>
+              </a:rPr>
+              <a:t>On-prem time-to-launch</a:t>
+            </a:r>
+          </a:p>
+        </p:txBody>
+      </p:sp>
+      <p:sp>
+        <p:nvSpPr>
+          <p:cNvPr id="10" name="TextBox 9"/>
+          <p:cNvSpPr/>
+          <p:nvPr>
+            <p:ph type="body" idx="5"/>
+          </p:nvPr>
+        </p:nvSpPr>
+        <p:spPr>
+          <a:xfrm>
+            <a:off x="5435323" y="3310127"/>
+            <a:ext cx="1321354" cy="640080"/>
+          </a:xfrm>
+          <a:prstGeom prst="rect">
+            <a:avLst/>
+          </a:prstGeom>
+          <a:noFill/>
+        </p:spPr>
+        <p:txBody>
+          <a:bodyPr wrap="none" lIns="0" rIns="0">
+            <a:noAutofit/>
+          </a:bodyPr>
+          <a:lstStyle/>
+          <a:p>
+            <a:pPr algn="ctr"/>
+            <a:r>
+              <a:rPr sz="4200" b="1" i="0">
+                <a:solidFill>
+                  <a:srgbClr val="1A1A24"/>
+                </a:solidFill>
+                <a:latin typeface="Arial"/>
+              </a:rPr>
+              <a:t>VS</a:t>
             </a:r>
           </a:p>
         </p:txBody>
@@ -7308,294 +6938,6 @@
 
 <file path=ppt/slideLayouts/slideLayout30.xml><?xml version="1.0" encoding="utf-8"?>
 <p:sldLayout xmlns:a="http://schemas.openxmlformats.org/drawingml/2006/main" xmlns:r="http://schemas.openxmlformats.org/officeDocument/2006/relationships" xmlns:p="http://schemas.openxmlformats.org/presentationml/2006/main" type="blank" preserve="1">
-  <p:cSld name="slidekit · This vs That">
-    <p:bg>
-      <p:bgPr>
-        <a:solidFill>
-          <a:srgbClr val="FFFFFF"/>
-        </a:solidFill>
-        <a:effectLst/>
-      </p:bgPr>
-    </p:bg>
-    <p:spTree>
-      <p:nvGrpSpPr>
-        <p:cNvPr id="1" name=""/>
-        <p:cNvGrpSpPr/>
-        <p:nvPr/>
-      </p:nvGrpSpPr>
-      <p:grpSpPr>
-        <a:xfrm>
-          <a:off x="0" y="0"/>
-          <a:ext cx="0" cy="0"/>
-          <a:chOff x="0" y="0"/>
-          <a:chExt cx="0" cy="0"/>
-        </a:xfrm>
-      </p:grpSpPr>
-      <p:sp>
-        <p:nvSpPr>
-          <p:cNvPr id="4" name="Slide Number Placeholder 3"/>
-          <p:cNvSpPr>
-            <a:spLocks noGrp="1"/>
-          </p:cNvSpPr>
-          <p:nvPr>
-            <p:ph type="sldNum" sz="quarter" idx="12"/>
-          </p:nvPr>
-        </p:nvSpPr>
-        <p:spPr>
-          <a:xfrm>
-            <a:off x="10363200" y="6035040"/>
-            <a:ext cx="1371600" cy="365760"/>
-          </a:xfrm>
-        </p:spPr>
-        <p:txBody>
-          <a:bodyPr/>
-          <a:lstStyle/>
-          <a:p>
-            <a:fld id="{C1FF6DA9-008F-8B48-92A6-B652298478BF}" type="slidenum">
-              <a:rPr lang="en-US" smtClean="0"/>
-              <a:t>‹#›</a:t>
-            </a:fld>
-            <a:endParaRPr lang="en-US"/>
-          </a:p>
-        </p:txBody>
-      </p:sp>
-      <p:sp>
-        <p:nvSpPr>
-          <p:cNvPr id="5" name="TextBox 4"/>
-          <p:cNvSpPr/>
-          <p:nvPr>
-            <p:ph type="title"/>
-          </p:nvPr>
-        </p:nvSpPr>
-        <p:spPr>
-          <a:xfrm>
-            <a:off x="457200" y="457200"/>
-            <a:ext cx="11277600" cy="768096"/>
-          </a:xfrm>
-          <a:prstGeom prst="rect">
-            <a:avLst/>
-          </a:prstGeom>
-          <a:noFill/>
-        </p:spPr>
-        <p:txBody>
-          <a:bodyPr wrap="none" lIns="0" rIns="0">
-            <a:noAutofit/>
-          </a:bodyPr>
-          <a:lstStyle/>
-          <a:p>
-            <a:pPr algn="l"/>
-            <a:r>
-              <a:rPr sz="4200" b="1" i="0">
-                <a:solidFill>
-                  <a:srgbClr val="1F3A5F"/>
-                </a:solidFill>
-                <a:latin typeface="Arial"/>
-              </a:rPr>
-              <a:t>Cloud or On-Prem</a:t>
-            </a:r>
-          </a:p>
-        </p:txBody>
-      </p:sp>
-      <p:sp>
-        <p:nvSpPr>
-          <p:cNvPr id="6" name="TextBox 5"/>
-          <p:cNvSpPr/>
-          <p:nvPr>
-            <p:ph type="body" idx="1"/>
-          </p:nvPr>
-        </p:nvSpPr>
-        <p:spPr>
-          <a:xfrm>
-            <a:off x="457200" y="2776728"/>
-            <a:ext cx="4792980" cy="914400"/>
-          </a:xfrm>
-          <a:prstGeom prst="rect">
-            <a:avLst/>
-          </a:prstGeom>
-          <a:noFill/>
-        </p:spPr>
-        <p:txBody>
-          <a:bodyPr wrap="none" lIns="0" rIns="0">
-            <a:noAutofit/>
-          </a:bodyPr>
-          <a:lstStyle/>
-          <a:p>
-            <a:pPr algn="ctr"/>
-            <a:r>
-              <a:rPr sz="6000" b="1" i="0">
-                <a:solidFill>
-                  <a:srgbClr val="1A1A24"/>
-                </a:solidFill>
-                <a:latin typeface="Arial"/>
-              </a:rPr>
-              <a:t>3 wks</a:t>
-            </a:r>
-          </a:p>
-        </p:txBody>
-      </p:sp>
-      <p:sp>
-        <p:nvSpPr>
-          <p:cNvPr id="7" name="TextBox 6"/>
-          <p:cNvSpPr/>
-          <p:nvPr>
-            <p:ph type="body" idx="2"/>
-          </p:nvPr>
-        </p:nvSpPr>
-        <p:spPr>
-          <a:xfrm>
-            <a:off x="0" y="3965448"/>
-            <a:ext cx="5707380" cy="518159"/>
-          </a:xfrm>
-          <a:prstGeom prst="rect">
-            <a:avLst/>
-          </a:prstGeom>
-          <a:noFill/>
-        </p:spPr>
-        <p:txBody>
-          <a:bodyPr wrap="none" lIns="0" rIns="0">
-            <a:noAutofit/>
-          </a:bodyPr>
-          <a:lstStyle/>
-          <a:p>
-            <a:pPr algn="ctr"/>
-            <a:r>
-              <a:rPr sz="3400" b="0" i="0">
-                <a:solidFill>
-                  <a:srgbClr val="1A1A24"/>
-                </a:solidFill>
-                <a:latin typeface="Arial"/>
-              </a:rPr>
-              <a:t>Cloud time-to-launch</a:t>
-            </a:r>
-          </a:p>
-        </p:txBody>
-      </p:sp>
-      <p:sp>
-        <p:nvSpPr>
-          <p:cNvPr id="8" name="TextBox 7"/>
-          <p:cNvSpPr/>
-          <p:nvPr>
-            <p:ph type="body" idx="3"/>
-          </p:nvPr>
-        </p:nvSpPr>
-        <p:spPr>
-          <a:xfrm>
-            <a:off x="6941820" y="2776728"/>
-            <a:ext cx="4792980" cy="914400"/>
-          </a:xfrm>
-          <a:prstGeom prst="rect">
-            <a:avLst/>
-          </a:prstGeom>
-          <a:noFill/>
-        </p:spPr>
-        <p:txBody>
-          <a:bodyPr wrap="none" lIns="0" rIns="0">
-            <a:noAutofit/>
-          </a:bodyPr>
-          <a:lstStyle/>
-          <a:p>
-            <a:pPr algn="ctr"/>
-            <a:r>
-              <a:rPr sz="6000" b="1" i="0">
-                <a:solidFill>
-                  <a:srgbClr val="1A1A24"/>
-                </a:solidFill>
-                <a:latin typeface="Arial"/>
-              </a:rPr>
-              <a:t>6 mo</a:t>
-            </a:r>
-          </a:p>
-        </p:txBody>
-      </p:sp>
-      <p:sp>
-        <p:nvSpPr>
-          <p:cNvPr id="9" name="TextBox 8"/>
-          <p:cNvSpPr/>
-          <p:nvPr>
-            <p:ph type="body" idx="4"/>
-          </p:nvPr>
-        </p:nvSpPr>
-        <p:spPr>
-          <a:xfrm>
-            <a:off x="6484620" y="3965448"/>
-            <a:ext cx="5707380" cy="518159"/>
-          </a:xfrm>
-          <a:prstGeom prst="rect">
-            <a:avLst/>
-          </a:prstGeom>
-          <a:noFill/>
-        </p:spPr>
-        <p:txBody>
-          <a:bodyPr wrap="none" lIns="0" rIns="0">
-            <a:noAutofit/>
-          </a:bodyPr>
-          <a:lstStyle/>
-          <a:p>
-            <a:pPr algn="ctr"/>
-            <a:r>
-              <a:rPr sz="3400" b="0" i="0">
-                <a:solidFill>
-                  <a:srgbClr val="1A1A24"/>
-                </a:solidFill>
-                <a:latin typeface="Arial"/>
-              </a:rPr>
-              <a:t>On-prem time-to-launch</a:t>
-            </a:r>
-          </a:p>
-        </p:txBody>
-      </p:sp>
-      <p:sp>
-        <p:nvSpPr>
-          <p:cNvPr id="10" name="TextBox 9"/>
-          <p:cNvSpPr/>
-          <p:nvPr>
-            <p:ph type="body" idx="5"/>
-          </p:nvPr>
-        </p:nvSpPr>
-        <p:spPr>
-          <a:xfrm>
-            <a:off x="5435323" y="3310127"/>
-            <a:ext cx="1321354" cy="640080"/>
-          </a:xfrm>
-          <a:prstGeom prst="rect">
-            <a:avLst/>
-          </a:prstGeom>
-          <a:noFill/>
-        </p:spPr>
-        <p:txBody>
-          <a:bodyPr wrap="none" lIns="0" rIns="0">
-            <a:noAutofit/>
-          </a:bodyPr>
-          <a:lstStyle/>
-          <a:p>
-            <a:pPr algn="ctr"/>
-            <a:r>
-              <a:rPr sz="4200" b="1" i="0">
-                <a:solidFill>
-                  <a:srgbClr val="7C8794"/>
-                </a:solidFill>
-                <a:latin typeface="Arial"/>
-              </a:rPr>
-              <a:t>VS</a:t>
-            </a:r>
-          </a:p>
-        </p:txBody>
-      </p:sp>
-    </p:spTree>
-    <p:extLst>
-      <p:ext uri="{BB962C8B-B14F-4D97-AF65-F5344CB8AC3E}">
-        <p14:creationId xmlns:p14="http://schemas.microsoft.com/office/powerpoint/2010/main" val="1212999818"/>
-      </p:ext>
-    </p:extLst>
-  </p:cSld>
-  <p:clrMapOvr>
-    <a:masterClrMapping/>
-  </p:clrMapOvr>
-</p:sldLayout>
-</file>
-
-<file path=ppt/slideLayouts/slideLayout31.xml><?xml version="1.0" encoding="utf-8"?>
-<p:sldLayout xmlns:a="http://schemas.openxmlformats.org/drawingml/2006/main" xmlns:r="http://schemas.openxmlformats.org/officeDocument/2006/relationships" xmlns:p="http://schemas.openxmlformats.org/presentationml/2006/main" type="blank" preserve="1">
   <p:cSld name="slidekit · KPI Grid">
     <p:bg>
       <p:bgPr>
@@ -7631,8 +6973,8 @@
         </p:nvSpPr>
         <p:spPr>
           <a:xfrm>
-            <a:off x="10363200" y="6035040"/>
-            <a:ext cx="1371600" cy="365760"/>
+            <a:off x="11186160" y="6035040"/>
+            <a:ext cx="548640" cy="365760"/>
           </a:xfrm>
         </p:spPr>
         <p:txBody>
@@ -7675,7 +7017,7 @@
             <a:r>
               <a:rPr sz="4200" b="1" i="0">
                 <a:solidFill>
-                  <a:srgbClr val="1F3A5F"/>
+                  <a:srgbClr val="C1642B"/>
                 </a:solidFill>
                 <a:latin typeface="Arial"/>
               </a:rPr>
@@ -8118,7 +7460,7 @@
         </p:nvSpPr>
         <p:spPr>
           <a:xfrm>
-            <a:off x="4307840" y="3797808"/>
+            <a:off x="4307840" y="4056888"/>
             <a:ext cx="3576320" cy="640080"/>
           </a:xfrm>
           <a:prstGeom prst="rect">
@@ -8155,7 +7497,7 @@
         </p:nvSpPr>
         <p:spPr>
           <a:xfrm>
-            <a:off x="5559552" y="4492752"/>
+            <a:off x="5559552" y="4751832"/>
             <a:ext cx="1072896" cy="54864"/>
           </a:xfrm>
           <a:prstGeom prst="rect">
@@ -8187,16 +7529,16 @@
         </p:nvSpPr>
         <p:spPr>
           <a:xfrm>
-            <a:off x="4307840" y="4602480"/>
-            <a:ext cx="3576320" cy="1127760"/>
-          </a:xfrm>
-          <a:prstGeom prst="rect">
-            <a:avLst/>
-          </a:prstGeom>
-          <a:noFill/>
-        </p:spPr>
-        <p:txBody>
-          <a:bodyPr wrap="square" lIns="0" rIns="0">
+            <a:off x="3943896" y="4861560"/>
+            <a:ext cx="4304208" cy="609600"/>
+          </a:xfrm>
+          <a:prstGeom prst="rect">
+            <a:avLst/>
+          </a:prstGeom>
+          <a:noFill/>
+        </p:spPr>
+        <p:txBody>
+          <a:bodyPr wrap="none" lIns="0" rIns="0">
             <a:noAutofit/>
           </a:bodyPr>
           <a:lstStyle/>
@@ -8209,7 +7551,7 @@
                 </a:solidFill>
                 <a:latin typeface="Arial"/>
               </a:rPr>
-              <a:t>Avg. time to value</a:t>
+              <a:t>Time to value</a:t>
             </a:r>
           </a:p>
         </p:txBody>
@@ -8333,7 +7675,7 @@
 </p:sldLayout>
 </file>
 
-<file path=ppt/slideLayouts/slideLayout32.xml><?xml version="1.0" encoding="utf-8"?>
+<file path=ppt/slideLayouts/slideLayout31.xml><?xml version="1.0" encoding="utf-8"?>
 <p:sldLayout xmlns:a="http://schemas.openxmlformats.org/drawingml/2006/main" xmlns:r="http://schemas.openxmlformats.org/officeDocument/2006/relationships" xmlns:p="http://schemas.openxmlformats.org/presentationml/2006/main" type="blank" preserve="1">
   <p:cSld name="slidekit · Chart With Insight">
     <p:bg>
@@ -8370,8 +7712,8 @@
         </p:nvSpPr>
         <p:spPr>
           <a:xfrm>
-            <a:off x="10363200" y="6035040"/>
-            <a:ext cx="1371600" cy="365760"/>
+            <a:off x="11186160" y="6035040"/>
+            <a:ext cx="548640" cy="365760"/>
           </a:xfrm>
         </p:spPr>
         <p:txBody>
@@ -8414,7 +7756,7 @@
             <a:r>
               <a:rPr sz="4200" b="1" i="0">
                 <a:solidFill>
-                  <a:srgbClr val="1F3A5F"/>
+                  <a:srgbClr val="C1642B"/>
                 </a:solidFill>
                 <a:latin typeface="Arial"/>
               </a:rPr>
@@ -8520,7 +7862,7 @@
             <a:r>
               <a:rPr sz="2500" b="0" i="0">
                 <a:solidFill>
-                  <a:srgbClr val="7C8794"/>
+                  <a:srgbClr val="1A1A24"/>
                 </a:solidFill>
                 <a:latin typeface="Arial"/>
               </a:rPr>
@@ -8626,7 +7968,7 @@
             <a:r>
               <a:rPr sz="2500" b="0" i="0">
                 <a:solidFill>
-                  <a:srgbClr val="7C8794"/>
+                  <a:srgbClr val="1A1A24"/>
                 </a:solidFill>
                 <a:latin typeface="Arial"/>
               </a:rPr>
@@ -8732,7 +8074,7 @@
             <a:r>
               <a:rPr sz="2500" b="0" i="0">
                 <a:solidFill>
-                  <a:srgbClr val="7C8794"/>
+                  <a:srgbClr val="1A1A24"/>
                 </a:solidFill>
                 <a:latin typeface="Arial"/>
               </a:rPr>
@@ -8838,7 +8180,7 @@
             <a:r>
               <a:rPr sz="2500" b="0" i="0">
                 <a:solidFill>
-                  <a:srgbClr val="7C8794"/>
+                  <a:srgbClr val="1A1A24"/>
                 </a:solidFill>
                 <a:latin typeface="Arial"/>
               </a:rPr>
@@ -8857,8 +8199,8 @@
         </p:nvSpPr>
         <p:spPr>
           <a:xfrm>
-            <a:off x="7498080" y="1770888"/>
-            <a:ext cx="128016" cy="3718560"/>
+            <a:off x="7498080" y="3325368"/>
+            <a:ext cx="128016" cy="609600"/>
           </a:xfrm>
           <a:prstGeom prst="rect">
             <a:avLst/>
@@ -8889,16 +8231,16 @@
         </p:nvSpPr>
         <p:spPr>
           <a:xfrm>
-            <a:off x="8037576" y="1770888"/>
-            <a:ext cx="3697224" cy="3718560"/>
-          </a:xfrm>
-          <a:prstGeom prst="rect">
-            <a:avLst/>
-          </a:prstGeom>
-          <a:noFill/>
-        </p:spPr>
-        <p:txBody>
-          <a:bodyPr wrap="square" lIns="0" rIns="0">
+            <a:off x="8037576" y="3325368"/>
+            <a:ext cx="4154424" cy="609600"/>
+          </a:xfrm>
+          <a:prstGeom prst="rect">
+            <a:avLst/>
+          </a:prstGeom>
+          <a:noFill/>
+        </p:spPr>
+        <p:txBody>
+          <a:bodyPr wrap="none" lIns="0" rIns="0">
             <a:noAutofit/>
           </a:bodyPr>
           <a:lstStyle/>
@@ -8911,7 +8253,7 @@
                 </a:solidFill>
                 <a:latin typeface="Arial"/>
               </a:rPr>
-              <a:t>Activations nearly quadrupled once self-serve onboarding shipped in February.</a:t>
+              <a:t>Activations 4x.</a:t>
             </a:r>
           </a:p>
         </p:txBody>
@@ -8929,7 +8271,7 @@
 </p:sldLayout>
 </file>
 
-<file path=ppt/slideLayouts/slideLayout33.xml><?xml version="1.0" encoding="utf-8"?>
+<file path=ppt/slideLayouts/slideLayout32.xml><?xml version="1.0" encoding="utf-8"?>
 <p:sldLayout xmlns:a="http://schemas.openxmlformats.org/drawingml/2006/main" xmlns:r="http://schemas.openxmlformats.org/officeDocument/2006/relationships" xmlns:p="http://schemas.openxmlformats.org/presentationml/2006/main" type="blank" preserve="1">
   <p:cSld name="slidekit · Table">
     <p:bg>
@@ -8966,8 +8308,8 @@
         </p:nvSpPr>
         <p:spPr>
           <a:xfrm>
-            <a:off x="10363200" y="6035040"/>
-            <a:ext cx="1371600" cy="365760"/>
+            <a:off x="11186160" y="6035040"/>
+            <a:ext cx="548640" cy="365760"/>
           </a:xfrm>
         </p:spPr>
         <p:txBody>
@@ -9010,7 +8352,7 @@
             <a:r>
               <a:rPr sz="4200" b="1" i="0">
                 <a:solidFill>
-                  <a:srgbClr val="1F3A5F"/>
+                  <a:srgbClr val="C1642B"/>
                 </a:solidFill>
                 <a:latin typeface="Arial"/>
               </a:rPr>
@@ -9047,7 +8389,7 @@
             <a:r>
               <a:rPr sz="3400" b="1" i="0">
                 <a:solidFill>
-                  <a:srgbClr val="1F3A5F"/>
+                  <a:srgbClr val="C1642B"/>
                 </a:solidFill>
                 <a:latin typeface="Arial"/>
               </a:rPr>
@@ -9084,7 +8426,7 @@
             <a:r>
               <a:rPr sz="3400" b="1" i="0">
                 <a:solidFill>
-                  <a:srgbClr val="1F3A5F"/>
+                  <a:srgbClr val="C1642B"/>
                 </a:solidFill>
                 <a:latin typeface="Arial"/>
               </a:rPr>
@@ -9121,7 +8463,7 @@
             <a:r>
               <a:rPr sz="3400" b="1" i="0">
                 <a:solidFill>
-                  <a:srgbClr val="1F3A5F"/>
+                  <a:srgbClr val="C1642B"/>
                 </a:solidFill>
                 <a:latin typeface="Arial"/>
               </a:rPr>
@@ -9619,7 +8961,7 @@
 </p:sldLayout>
 </file>
 
-<file path=ppt/slideLayouts/slideLayout34.xml><?xml version="1.0" encoding="utf-8"?>
+<file path=ppt/slideLayouts/slideLayout33.xml><?xml version="1.0" encoding="utf-8"?>
 <p:sldLayout xmlns:a="http://schemas.openxmlformats.org/drawingml/2006/main" xmlns:r="http://schemas.openxmlformats.org/officeDocument/2006/relationships" xmlns:p="http://schemas.openxmlformats.org/presentationml/2006/main" type="blank" preserve="1">
   <p:cSld name="slidekit · Metric Comparison">
     <p:bg>
@@ -9656,8 +8998,8 @@
         </p:nvSpPr>
         <p:spPr>
           <a:xfrm>
-            <a:off x="10363200" y="6035040"/>
-            <a:ext cx="1371600" cy="365760"/>
+            <a:off x="11186160" y="6035040"/>
+            <a:ext cx="548640" cy="365760"/>
           </a:xfrm>
         </p:spPr>
         <p:txBody>
@@ -9700,7 +9042,7 @@
             <a:r>
               <a:rPr sz="4200" b="1" i="0">
                 <a:solidFill>
-                  <a:srgbClr val="1F3A5F"/>
+                  <a:srgbClr val="C1642B"/>
                 </a:solidFill>
                 <a:latin typeface="Arial"/>
               </a:rPr>
@@ -9719,7 +9061,7 @@
         </p:nvSpPr>
         <p:spPr>
           <a:xfrm>
-            <a:off x="457200" y="2075688"/>
+            <a:off x="457200" y="2334768"/>
             <a:ext cx="3576320" cy="914400"/>
           </a:xfrm>
           <a:prstGeom prst="rect">
@@ -9756,16 +9098,16 @@
         </p:nvSpPr>
         <p:spPr>
           <a:xfrm>
-            <a:off x="457200" y="3264408"/>
-            <a:ext cx="3576320" cy="1127760"/>
-          </a:xfrm>
-          <a:prstGeom prst="rect">
-            <a:avLst/>
-          </a:prstGeom>
-          <a:noFill/>
-        </p:spPr>
-        <p:txBody>
-          <a:bodyPr wrap="square" lIns="0" rIns="0">
+            <a:off x="457200" y="3523488"/>
+            <a:ext cx="3576320" cy="609600"/>
+          </a:xfrm>
+          <a:prstGeom prst="rect">
+            <a:avLst/>
+          </a:prstGeom>
+          <a:noFill/>
+        </p:spPr>
+        <p:txBody>
+          <a:bodyPr wrap="none" lIns="0" rIns="0">
             <a:noAutofit/>
           </a:bodyPr>
           <a:lstStyle/>
@@ -9778,7 +9120,7 @@
                 </a:solidFill>
                 <a:latin typeface="Arial"/>
               </a:rPr>
-              <a:t>Annual recurring revenue</a:t>
+              <a:t>Revenue</a:t>
             </a:r>
           </a:p>
         </p:txBody>
@@ -9793,7 +9135,7 @@
         </p:nvSpPr>
         <p:spPr>
           <a:xfrm>
-            <a:off x="1522569" y="4666488"/>
+            <a:off x="1522569" y="4407408"/>
             <a:ext cx="1445581" cy="518159"/>
           </a:xfrm>
           <a:prstGeom prst="rect">
@@ -9825,7 +9167,7 @@
         </p:nvSpPr>
         <p:spPr>
           <a:xfrm>
-            <a:off x="1260802" y="4666488"/>
+            <a:off x="1260802" y="4407408"/>
             <a:ext cx="1969115" cy="518159"/>
           </a:xfrm>
           <a:prstGeom prst="rect">
@@ -9862,7 +9204,7 @@
         </p:nvSpPr>
         <p:spPr>
           <a:xfrm>
-            <a:off x="4307840" y="2075688"/>
+            <a:off x="4307840" y="2334768"/>
             <a:ext cx="3576320" cy="914400"/>
           </a:xfrm>
           <a:prstGeom prst="rect">
@@ -9899,8 +9241,8 @@
         </p:nvSpPr>
         <p:spPr>
           <a:xfrm>
-            <a:off x="3834934" y="3264408"/>
-            <a:ext cx="4522132" cy="1127760"/>
+            <a:off x="3834934" y="3523488"/>
+            <a:ext cx="4522132" cy="609600"/>
           </a:xfrm>
           <a:prstGeom prst="rect">
             <a:avLst/>
@@ -9936,7 +9278,7 @@
         </p:nvSpPr>
         <p:spPr>
           <a:xfrm>
-            <a:off x="5175547" y="4666488"/>
+            <a:off x="5175547" y="4407408"/>
             <a:ext cx="1840906" cy="518159"/>
           </a:xfrm>
           <a:prstGeom prst="rect">
@@ -9968,7 +9310,7 @@
         </p:nvSpPr>
         <p:spPr>
           <a:xfrm>
-            <a:off x="4795183" y="4666488"/>
+            <a:off x="4795183" y="4407408"/>
             <a:ext cx="2601634" cy="518159"/>
           </a:xfrm>
           <a:prstGeom prst="rect">
@@ -10005,7 +9347,7 @@
         </p:nvSpPr>
         <p:spPr>
           <a:xfrm>
-            <a:off x="8158480" y="2075688"/>
+            <a:off x="8158480" y="2334768"/>
             <a:ext cx="3576320" cy="914400"/>
           </a:xfrm>
           <a:prstGeom prst="rect">
@@ -10042,16 +9384,16 @@
         </p:nvSpPr>
         <p:spPr>
           <a:xfrm>
-            <a:off x="8158480" y="3264408"/>
-            <a:ext cx="3576320" cy="1127760"/>
-          </a:xfrm>
-          <a:prstGeom prst="rect">
-            <a:avLst/>
-          </a:prstGeom>
-          <a:noFill/>
-        </p:spPr>
-        <p:txBody>
-          <a:bodyPr wrap="square" lIns="0" rIns="0">
+            <a:off x="7701280" y="3523488"/>
+            <a:ext cx="4490720" cy="609600"/>
+          </a:xfrm>
+          <a:prstGeom prst="rect">
+            <a:avLst/>
+          </a:prstGeom>
+          <a:noFill/>
+        </p:spPr>
+        <p:txBody>
+          <a:bodyPr wrap="none" lIns="0" rIns="0">
             <a:noAutofit/>
           </a:bodyPr>
           <a:lstStyle/>
@@ -10064,7 +9406,7 @@
                 </a:solidFill>
                 <a:latin typeface="Arial"/>
               </a:rPr>
-              <a:t>Net promoter score</a:t>
+              <a:t>Promoter score</a:t>
             </a:r>
           </a:p>
         </p:txBody>
@@ -10079,7 +9421,7 @@
         </p:nvSpPr>
         <p:spPr>
           <a:xfrm>
-            <a:off x="9427731" y="4666488"/>
+            <a:off x="9427731" y="4407408"/>
             <a:ext cx="1037817" cy="518159"/>
           </a:xfrm>
           <a:prstGeom prst="rect">
@@ -10111,7 +9453,7 @@
         </p:nvSpPr>
         <p:spPr>
           <a:xfrm>
-            <a:off x="9288294" y="4666488"/>
+            <a:off x="9288294" y="4407408"/>
             <a:ext cx="1316691" cy="518159"/>
           </a:xfrm>
           <a:prstGeom prst="rect">
@@ -10151,7 +9493,7 @@
 </p:sldLayout>
 </file>
 
-<file path=ppt/slideLayouts/slideLayout35.xml><?xml version="1.0" encoding="utf-8"?>
+<file path=ppt/slideLayouts/slideLayout34.xml><?xml version="1.0" encoding="utf-8"?>
 <p:sldLayout xmlns:a="http://schemas.openxmlformats.org/drawingml/2006/main" xmlns:r="http://schemas.openxmlformats.org/officeDocument/2006/relationships" xmlns:p="http://schemas.openxmlformats.org/presentationml/2006/main" type="blank" preserve="1">
   <p:cSld name="slidekit · Process Steps">
     <p:bg>
@@ -10188,8 +9530,8 @@
         </p:nvSpPr>
         <p:spPr>
           <a:xfrm>
-            <a:off x="10363200" y="6035040"/>
-            <a:ext cx="1371600" cy="365760"/>
+            <a:off x="11186160" y="6035040"/>
+            <a:ext cx="548640" cy="365760"/>
           </a:xfrm>
         </p:spPr>
         <p:txBody>
@@ -10232,7 +9574,7 @@
             <a:r>
               <a:rPr sz="4200" b="1" i="0">
                 <a:solidFill>
-                  <a:srgbClr val="1F3A5F"/>
+                  <a:srgbClr val="C1642B"/>
                 </a:solidFill>
                 <a:latin typeface="Arial"/>
               </a:rPr>
@@ -10269,7 +9611,7 @@
             <a:r>
               <a:rPr sz="4200" b="1" i="0">
                 <a:solidFill>
-                  <a:srgbClr val="1F3A5F"/>
+                  <a:srgbClr val="C1642B"/>
                 </a:solidFill>
                 <a:latin typeface="Arial"/>
               </a:rPr>
@@ -10289,13 +9631,13 @@
         <p:spPr>
           <a:xfrm>
             <a:off x="457200" y="2194560"/>
-            <a:ext cx="784098" cy="54864"/>
+            <a:ext cx="593303" cy="54864"/>
           </a:xfrm>
           <a:prstGeom prst="rect">
             <a:avLst/>
           </a:prstGeom>
           <a:solidFill>
-            <a:srgbClr val="1F3A5F"/>
+            <a:srgbClr val="C1642B"/>
           </a:solidFill>
           <a:ln>
             <a:noFill/>
@@ -10338,7 +9680,7 @@
             <a:r>
               <a:rPr sz="3400" b="1" i="0">
                 <a:solidFill>
-                  <a:srgbClr val="1F3A5F"/>
+                  <a:srgbClr val="C1642B"/>
                 </a:solidFill>
                 <a:latin typeface="Arial"/>
               </a:rPr>
@@ -10412,7 +9754,7 @@
             <a:r>
               <a:rPr sz="4200" b="1" i="0">
                 <a:solidFill>
-                  <a:srgbClr val="1F3A5F"/>
+                  <a:srgbClr val="C1642B"/>
                 </a:solidFill>
                 <a:latin typeface="Arial"/>
               </a:rPr>
@@ -10432,13 +9774,13 @@
         <p:spPr>
           <a:xfrm>
             <a:off x="3345180" y="2194560"/>
-            <a:ext cx="784098" cy="54864"/>
+            <a:ext cx="593303" cy="54864"/>
           </a:xfrm>
           <a:prstGeom prst="rect">
             <a:avLst/>
           </a:prstGeom>
           <a:solidFill>
-            <a:srgbClr val="1F3A5F"/>
+            <a:srgbClr val="C1642B"/>
           </a:solidFill>
           <a:ln>
             <a:noFill/>
@@ -10481,7 +9823,7 @@
             <a:r>
               <a:rPr sz="3400" b="1" i="0">
                 <a:solidFill>
-                  <a:srgbClr val="1F3A5F"/>
+                  <a:srgbClr val="C1642B"/>
                 </a:solidFill>
                 <a:latin typeface="Arial"/>
               </a:rPr>
@@ -10555,7 +9897,7 @@
             <a:r>
               <a:rPr sz="4200" b="1" i="0">
                 <a:solidFill>
-                  <a:srgbClr val="1F3A5F"/>
+                  <a:srgbClr val="C1642B"/>
                 </a:solidFill>
                 <a:latin typeface="Arial"/>
               </a:rPr>
@@ -10575,13 +9917,13 @@
         <p:spPr>
           <a:xfrm>
             <a:off x="6233160" y="2194560"/>
-            <a:ext cx="784098" cy="54864"/>
+            <a:ext cx="593303" cy="54864"/>
           </a:xfrm>
           <a:prstGeom prst="rect">
             <a:avLst/>
           </a:prstGeom>
           <a:solidFill>
-            <a:srgbClr val="1F3A5F"/>
+            <a:srgbClr val="C1642B"/>
           </a:solidFill>
           <a:ln>
             <a:noFill/>
@@ -10624,7 +9966,7 @@
             <a:r>
               <a:rPr sz="3400" b="1" i="0">
                 <a:solidFill>
-                  <a:srgbClr val="1F3A5F"/>
+                  <a:srgbClr val="C1642B"/>
                 </a:solidFill>
                 <a:latin typeface="Arial"/>
               </a:rPr>
@@ -10698,7 +10040,7 @@
             <a:r>
               <a:rPr sz="4200" b="1" i="0">
                 <a:solidFill>
-                  <a:srgbClr val="1F3A5F"/>
+                  <a:srgbClr val="C1642B"/>
                 </a:solidFill>
                 <a:latin typeface="Arial"/>
               </a:rPr>
@@ -10718,13 +10060,13 @@
         <p:spPr>
           <a:xfrm>
             <a:off x="9121140" y="2194560"/>
-            <a:ext cx="784098" cy="54864"/>
+            <a:ext cx="593303" cy="54864"/>
           </a:xfrm>
           <a:prstGeom prst="rect">
             <a:avLst/>
           </a:prstGeom>
           <a:solidFill>
-            <a:srgbClr val="1F3A5F"/>
+            <a:srgbClr val="C1642B"/>
           </a:solidFill>
           <a:ln>
             <a:noFill/>
@@ -10767,7 +10109,7 @@
             <a:r>
               <a:rPr sz="3400" b="1" i="0">
                 <a:solidFill>
-                  <a:srgbClr val="1F3A5F"/>
+                  <a:srgbClr val="C1642B"/>
                 </a:solidFill>
                 <a:latin typeface="Arial"/>
               </a:rPr>
@@ -10826,7 +10168,7 @@
 </p:sldLayout>
 </file>
 
-<file path=ppt/slideLayouts/slideLayout36.xml><?xml version="1.0" encoding="utf-8"?>
+<file path=ppt/slideLayouts/slideLayout35.xml><?xml version="1.0" encoding="utf-8"?>
 <p:sldLayout xmlns:a="http://schemas.openxmlformats.org/drawingml/2006/main" xmlns:r="http://schemas.openxmlformats.org/officeDocument/2006/relationships" xmlns:p="http://schemas.openxmlformats.org/presentationml/2006/main" type="blank" preserve="1">
   <p:cSld name="slidekit · Roadmap">
     <p:bg>
@@ -10863,8 +10205,8 @@
         </p:nvSpPr>
         <p:spPr>
           <a:xfrm>
-            <a:off x="10363200" y="6035040"/>
-            <a:ext cx="1371600" cy="365760"/>
+            <a:off x="11186160" y="6035040"/>
+            <a:ext cx="548640" cy="365760"/>
           </a:xfrm>
         </p:spPr>
         <p:txBody>
@@ -10907,7 +10249,7 @@
             <a:r>
               <a:rPr sz="4200" b="1" i="0">
                 <a:solidFill>
-                  <a:srgbClr val="1F3A5F"/>
+                  <a:srgbClr val="C1642B"/>
                 </a:solidFill>
                 <a:latin typeface="Arial"/>
               </a:rPr>
@@ -11358,7 +10700,7 @@
 </p:sldLayout>
 </file>
 
-<file path=ppt/slideLayouts/slideLayout37.xml><?xml version="1.0" encoding="utf-8"?>
+<file path=ppt/slideLayouts/slideLayout36.xml><?xml version="1.0" encoding="utf-8"?>
 <p:sldLayout xmlns:a="http://schemas.openxmlformats.org/drawingml/2006/main" xmlns:r="http://schemas.openxmlformats.org/officeDocument/2006/relationships" xmlns:p="http://schemas.openxmlformats.org/presentationml/2006/main" type="blank" preserve="1">
   <p:cSld name="slidekit · Funnel">
     <p:bg>
@@ -11395,8 +10737,8 @@
         </p:nvSpPr>
         <p:spPr>
           <a:xfrm>
-            <a:off x="10363200" y="6035040"/>
-            <a:ext cx="1371600" cy="365760"/>
+            <a:off x="11186160" y="6035040"/>
+            <a:ext cx="548640" cy="365760"/>
           </a:xfrm>
         </p:spPr>
         <p:txBody>
@@ -11439,7 +10781,7 @@
             <a:r>
               <a:rPr sz="4200" b="1" i="0">
                 <a:solidFill>
-                  <a:srgbClr val="1F3A5F"/>
+                  <a:srgbClr val="C1642B"/>
                 </a:solidFill>
                 <a:latin typeface="Arial"/>
               </a:rPr>
@@ -11737,7 +11079,7 @@
 </p:sldLayout>
 </file>
 
-<file path=ppt/slideLayouts/slideLayout38.xml><?xml version="1.0" encoding="utf-8"?>
+<file path=ppt/slideLayouts/slideLayout37.xml><?xml version="1.0" encoding="utf-8"?>
 <p:sldLayout xmlns:a="http://schemas.openxmlformats.org/drawingml/2006/main" xmlns:r="http://schemas.openxmlformats.org/officeDocument/2006/relationships" xmlns:p="http://schemas.openxmlformats.org/presentationml/2006/main" type="blank" preserve="1">
   <p:cSld name="slidekit · Nested Circles">
     <p:bg>
@@ -11774,8 +11116,8 @@
         </p:nvSpPr>
         <p:spPr>
           <a:xfrm>
-            <a:off x="10363200" y="6035040"/>
-            <a:ext cx="1371600" cy="365760"/>
+            <a:off x="11186160" y="6035040"/>
+            <a:ext cx="548640" cy="365760"/>
           </a:xfrm>
         </p:spPr>
         <p:txBody>
@@ -11818,7 +11160,7 @@
             <a:r>
               <a:rPr sz="4200" b="1" i="0">
                 <a:solidFill>
-                  <a:srgbClr val="1F3A5F"/>
+                  <a:srgbClr val="C1642B"/>
                 </a:solidFill>
                 <a:latin typeface="Arial"/>
               </a:rPr>
@@ -11844,7 +11186,7 @@
             <a:avLst/>
           </a:prstGeom>
           <a:solidFill>
-            <a:srgbClr val="7C8794"/>
+            <a:srgbClr val="1A1A24"/>
           </a:solidFill>
           <a:ln>
             <a:noFill/>
@@ -11908,7 +11250,7 @@
             <a:avLst/>
           </a:prstGeom>
           <a:solidFill>
-            <a:srgbClr val="1F3A5F"/>
+            <a:srgbClr val="1A1A24"/>
           </a:solidFill>
           <a:ln>
             <a:noFill/>
@@ -12158,7 +11500,7 @@
 </p:sldLayout>
 </file>
 
-<file path=ppt/slideLayouts/slideLayout39.xml><?xml version="1.0" encoding="utf-8"?>
+<file path=ppt/slideLayouts/slideLayout38.xml><?xml version="1.0" encoding="utf-8"?>
 <p:sldLayout xmlns:a="http://schemas.openxmlformats.org/drawingml/2006/main" xmlns:r="http://schemas.openxmlformats.org/officeDocument/2006/relationships" xmlns:p="http://schemas.openxmlformats.org/presentationml/2006/main" type="blank" preserve="1">
   <p:cSld name="slidekit · Pyramid">
     <p:bg>
@@ -12195,8 +11537,8 @@
         </p:nvSpPr>
         <p:spPr>
           <a:xfrm>
-            <a:off x="10363200" y="6035040"/>
-            <a:ext cx="1371600" cy="365760"/>
+            <a:off x="11186160" y="6035040"/>
+            <a:ext cx="548640" cy="365760"/>
           </a:xfrm>
         </p:spPr>
         <p:txBody>
@@ -12239,7 +11581,7 @@
             <a:r>
               <a:rPr sz="4200" b="1" i="0">
                 <a:solidFill>
-                  <a:srgbClr val="1F3A5F"/>
+                  <a:srgbClr val="C1642B"/>
                 </a:solidFill>
                 <a:latin typeface="Arial"/>
               </a:rPr>
@@ -12260,75 +11602,6 @@
           <a:xfrm>
             <a:off x="3840480" y="1499616"/>
             <a:ext cx="4511040" cy="859536"/>
-          </a:xfrm>
-          <a:prstGeom prst="rect">
-            <a:avLst/>
-          </a:prstGeom>
-          <a:solidFill>
-            <a:srgbClr val="1F3A5F"/>
-          </a:solidFill>
-          <a:ln>
-            <a:noFill/>
-          </a:ln>
-          <a:effectLst/>
-        </p:spPr>
-        <p:txBody>
-          <a:bodyPr rtlCol="0" anchor="ctr"/>
-          <a:lstStyle/>
-          <a:p>
-            <a:pPr algn="ctr"/>
-          </a:p>
-        </p:txBody>
-      </p:sp>
-      <p:sp>
-        <p:nvSpPr>
-          <p:cNvPr id="7" name="TextBox 6"/>
-          <p:cNvSpPr/>
-          <p:nvPr>
-            <p:ph type="body" idx="2"/>
-          </p:nvPr>
-        </p:nvSpPr>
-        <p:spPr>
-          <a:xfrm>
-            <a:off x="3840480" y="1499616"/>
-            <a:ext cx="4511040" cy="859536"/>
-          </a:xfrm>
-          <a:prstGeom prst="rect">
-            <a:avLst/>
-          </a:prstGeom>
-          <a:noFill/>
-        </p:spPr>
-        <p:txBody>
-          <a:bodyPr wrap="none" lIns="0" rIns="0">
-            <a:noAutofit/>
-          </a:bodyPr>
-          <a:lstStyle/>
-          <a:p>
-            <a:pPr algn="l"/>
-            <a:r>
-              <a:rPr sz="3400" b="1" i="0">
-                <a:solidFill>
-                  <a:srgbClr val="FFFFFF"/>
-                </a:solidFill>
-                <a:latin typeface="Arial"/>
-              </a:rPr>
-              <a:t>Vision</a:t>
-            </a:r>
-          </a:p>
-        </p:txBody>
-      </p:sp>
-      <p:sp>
-        <p:nvSpPr>
-          <p:cNvPr id="8" name="Rectangle 7"/>
-          <p:cNvSpPr/>
-          <p:nvPr>
-            <p:ph type="body" idx="3"/>
-          </p:nvPr>
-        </p:nvSpPr>
-        <p:spPr>
-          <a:xfrm>
-            <a:off x="2712720" y="2633472"/>
-            <a:ext cx="6766560" cy="859536"/>
           </a:xfrm>
           <a:prstGeom prst="rect">
             <a:avLst/>
@@ -12351,122 +11624,53 @@
       </p:sp>
       <p:sp>
         <p:nvSpPr>
-          <p:cNvPr id="9" name="TextBox 8"/>
-          <p:cNvSpPr/>
-          <p:nvPr>
-            <p:ph type="body" idx="4"/>
+          <p:cNvPr id="7" name="TextBox 6"/>
+          <p:cNvSpPr/>
+          <p:nvPr>
+            <p:ph type="body" idx="2"/>
+          </p:nvPr>
+        </p:nvSpPr>
+        <p:spPr>
+          <a:xfrm>
+            <a:off x="3840480" y="1499616"/>
+            <a:ext cx="4511040" cy="859536"/>
+          </a:xfrm>
+          <a:prstGeom prst="rect">
+            <a:avLst/>
+          </a:prstGeom>
+          <a:noFill/>
+        </p:spPr>
+        <p:txBody>
+          <a:bodyPr wrap="none" lIns="0" rIns="0">
+            <a:noAutofit/>
+          </a:bodyPr>
+          <a:lstStyle/>
+          <a:p>
+            <a:pPr algn="l"/>
+            <a:r>
+              <a:rPr sz="3400" b="1" i="0">
+                <a:solidFill>
+                  <a:srgbClr val="FFFFFF"/>
+                </a:solidFill>
+                <a:latin typeface="Arial"/>
+              </a:rPr>
+              <a:t>Vision</a:t>
+            </a:r>
+          </a:p>
+        </p:txBody>
+      </p:sp>
+      <p:sp>
+        <p:nvSpPr>
+          <p:cNvPr id="8" name="Rectangle 7"/>
+          <p:cNvSpPr/>
+          <p:nvPr>
+            <p:ph type="body" idx="3"/>
           </p:nvPr>
         </p:nvSpPr>
         <p:spPr>
           <a:xfrm>
             <a:off x="2712720" y="2633472"/>
             <a:ext cx="6766560" cy="859536"/>
-          </a:xfrm>
-          <a:prstGeom prst="rect">
-            <a:avLst/>
-          </a:prstGeom>
-          <a:noFill/>
-        </p:spPr>
-        <p:txBody>
-          <a:bodyPr wrap="none" lIns="0" rIns="0">
-            <a:noAutofit/>
-          </a:bodyPr>
-          <a:lstStyle/>
-          <a:p>
-            <a:pPr algn="l"/>
-            <a:r>
-              <a:rPr sz="3400" b="1" i="0">
-                <a:solidFill>
-                  <a:srgbClr val="FFFFFF"/>
-                </a:solidFill>
-                <a:latin typeface="Arial"/>
-              </a:rPr>
-              <a:t>Strategy</a:t>
-            </a:r>
-          </a:p>
-        </p:txBody>
-      </p:sp>
-      <p:sp>
-        <p:nvSpPr>
-          <p:cNvPr id="10" name="Rectangle 9"/>
-          <p:cNvSpPr/>
-          <p:nvPr>
-            <p:ph type="body" idx="5"/>
-          </p:nvPr>
-        </p:nvSpPr>
-        <p:spPr>
-          <a:xfrm>
-            <a:off x="1584960" y="3767328"/>
-            <a:ext cx="9022080" cy="859536"/>
-          </a:xfrm>
-          <a:prstGeom prst="rect">
-            <a:avLst/>
-          </a:prstGeom>
-          <a:solidFill>
-            <a:srgbClr val="1F3A5F"/>
-          </a:solidFill>
-          <a:ln>
-            <a:noFill/>
-          </a:ln>
-          <a:effectLst/>
-        </p:spPr>
-        <p:txBody>
-          <a:bodyPr rtlCol="0" anchor="ctr"/>
-          <a:lstStyle/>
-          <a:p>
-            <a:pPr algn="ctr"/>
-          </a:p>
-        </p:txBody>
-      </p:sp>
-      <p:sp>
-        <p:nvSpPr>
-          <p:cNvPr id="11" name="TextBox 10"/>
-          <p:cNvSpPr/>
-          <p:nvPr>
-            <p:ph type="body" idx="6"/>
-          </p:nvPr>
-        </p:nvSpPr>
-        <p:spPr>
-          <a:xfrm>
-            <a:off x="1584960" y="3767328"/>
-            <a:ext cx="9022080" cy="859536"/>
-          </a:xfrm>
-          <a:prstGeom prst="rect">
-            <a:avLst/>
-          </a:prstGeom>
-          <a:noFill/>
-        </p:spPr>
-        <p:txBody>
-          <a:bodyPr wrap="none" lIns="0" rIns="0">
-            <a:noAutofit/>
-          </a:bodyPr>
-          <a:lstStyle/>
-          <a:p>
-            <a:pPr algn="l"/>
-            <a:r>
-              <a:rPr sz="3400" b="1" i="0">
-                <a:solidFill>
-                  <a:srgbClr val="FFFFFF"/>
-                </a:solidFill>
-                <a:latin typeface="Arial"/>
-              </a:rPr>
-              <a:t>Goals</a:t>
-            </a:r>
-          </a:p>
-        </p:txBody>
-      </p:sp>
-      <p:sp>
-        <p:nvSpPr>
-          <p:cNvPr id="12" name="Rectangle 11"/>
-          <p:cNvSpPr/>
-          <p:nvPr>
-            <p:ph type="body" idx="7"/>
-          </p:nvPr>
-        </p:nvSpPr>
-        <p:spPr>
-          <a:xfrm>
-            <a:off x="457200" y="4901184"/>
-            <a:ext cx="11277600" cy="859536"/>
           </a:xfrm>
           <a:prstGeom prst="rect">
             <a:avLst/>
@@ -12489,10 +11693,116 @@
       </p:sp>
       <p:sp>
         <p:nvSpPr>
-          <p:cNvPr id="13" name="TextBox 12"/>
-          <p:cNvSpPr/>
-          <p:nvPr>
-            <p:ph type="body" idx="8"/>
+          <p:cNvPr id="9" name="TextBox 8"/>
+          <p:cNvSpPr/>
+          <p:nvPr>
+            <p:ph type="body" idx="4"/>
+          </p:nvPr>
+        </p:nvSpPr>
+        <p:spPr>
+          <a:xfrm>
+            <a:off x="2712720" y="2633472"/>
+            <a:ext cx="6766560" cy="859536"/>
+          </a:xfrm>
+          <a:prstGeom prst="rect">
+            <a:avLst/>
+          </a:prstGeom>
+          <a:noFill/>
+        </p:spPr>
+        <p:txBody>
+          <a:bodyPr wrap="none" lIns="0" rIns="0">
+            <a:noAutofit/>
+          </a:bodyPr>
+          <a:lstStyle/>
+          <a:p>
+            <a:pPr algn="l"/>
+            <a:r>
+              <a:rPr sz="3400" b="1" i="0">
+                <a:solidFill>
+                  <a:srgbClr val="FFFFFF"/>
+                </a:solidFill>
+                <a:latin typeface="Arial"/>
+              </a:rPr>
+              <a:t>Strategy</a:t>
+            </a:r>
+          </a:p>
+        </p:txBody>
+      </p:sp>
+      <p:sp>
+        <p:nvSpPr>
+          <p:cNvPr id="10" name="Rectangle 9"/>
+          <p:cNvSpPr/>
+          <p:nvPr>
+            <p:ph type="body" idx="5"/>
+          </p:nvPr>
+        </p:nvSpPr>
+        <p:spPr>
+          <a:xfrm>
+            <a:off x="1584960" y="3767328"/>
+            <a:ext cx="9022080" cy="859536"/>
+          </a:xfrm>
+          <a:prstGeom prst="rect">
+            <a:avLst/>
+          </a:prstGeom>
+          <a:solidFill>
+            <a:srgbClr val="C1642B"/>
+          </a:solidFill>
+          <a:ln>
+            <a:noFill/>
+          </a:ln>
+          <a:effectLst/>
+        </p:spPr>
+        <p:txBody>
+          <a:bodyPr rtlCol="0" anchor="ctr"/>
+          <a:lstStyle/>
+          <a:p>
+            <a:pPr algn="ctr"/>
+          </a:p>
+        </p:txBody>
+      </p:sp>
+      <p:sp>
+        <p:nvSpPr>
+          <p:cNvPr id="11" name="TextBox 10"/>
+          <p:cNvSpPr/>
+          <p:nvPr>
+            <p:ph type="body" idx="6"/>
+          </p:nvPr>
+        </p:nvSpPr>
+        <p:spPr>
+          <a:xfrm>
+            <a:off x="1584960" y="3767328"/>
+            <a:ext cx="9022080" cy="859536"/>
+          </a:xfrm>
+          <a:prstGeom prst="rect">
+            <a:avLst/>
+          </a:prstGeom>
+          <a:noFill/>
+        </p:spPr>
+        <p:txBody>
+          <a:bodyPr wrap="none" lIns="0" rIns="0">
+            <a:noAutofit/>
+          </a:bodyPr>
+          <a:lstStyle/>
+          <a:p>
+            <a:pPr algn="l"/>
+            <a:r>
+              <a:rPr sz="3400" b="1" i="0">
+                <a:solidFill>
+                  <a:srgbClr val="FFFFFF"/>
+                </a:solidFill>
+                <a:latin typeface="Arial"/>
+              </a:rPr>
+              <a:t>Goals</a:t>
+            </a:r>
+          </a:p>
+        </p:txBody>
+      </p:sp>
+      <p:sp>
+        <p:nvSpPr>
+          <p:cNvPr id="12" name="Rectangle 11"/>
+          <p:cNvSpPr/>
+          <p:nvPr>
+            <p:ph type="body" idx="7"/>
           </p:nvPr>
         </p:nvSpPr>
         <p:spPr>
@@ -12503,6 +11813,38 @@
           <a:prstGeom prst="rect">
             <a:avLst/>
           </a:prstGeom>
+          <a:solidFill>
+            <a:srgbClr val="C1642B"/>
+          </a:solidFill>
+          <a:ln>
+            <a:noFill/>
+          </a:ln>
+          <a:effectLst/>
+        </p:spPr>
+        <p:txBody>
+          <a:bodyPr rtlCol="0" anchor="ctr"/>
+          <a:lstStyle/>
+          <a:p>
+            <a:pPr algn="ctr"/>
+          </a:p>
+        </p:txBody>
+      </p:sp>
+      <p:sp>
+        <p:nvSpPr>
+          <p:cNvPr id="13" name="TextBox 12"/>
+          <p:cNvSpPr/>
+          <p:nvPr>
+            <p:ph type="body" idx="8"/>
+          </p:nvPr>
+        </p:nvSpPr>
+        <p:spPr>
+          <a:xfrm>
+            <a:off x="457200" y="4901184"/>
+            <a:ext cx="11277600" cy="859536"/>
+          </a:xfrm>
+          <a:prstGeom prst="rect">
+            <a:avLst/>
+          </a:prstGeom>
           <a:noFill/>
         </p:spPr>
         <p:txBody>
@@ -12520,6 +11862,533 @@
                 <a:latin typeface="Arial"/>
               </a:rPr>
               <a:t>Tactics</a:t>
+            </a:r>
+          </a:p>
+        </p:txBody>
+      </p:sp>
+    </p:spTree>
+    <p:extLst>
+      <p:ext uri="{BB962C8B-B14F-4D97-AF65-F5344CB8AC3E}">
+        <p14:creationId xmlns:p14="http://schemas.microsoft.com/office/powerpoint/2010/main" val="1212999818"/>
+      </p:ext>
+    </p:extLst>
+  </p:cSld>
+  <p:clrMapOvr>
+    <a:masterClrMapping/>
+  </p:clrMapOvr>
+</p:sldLayout>
+</file>
+
+<file path=ppt/slideLayouts/slideLayout39.xml><?xml version="1.0" encoding="utf-8"?>
+<p:sldLayout xmlns:a="http://schemas.openxmlformats.org/drawingml/2006/main" xmlns:r="http://schemas.openxmlformats.org/officeDocument/2006/relationships" xmlns:p="http://schemas.openxmlformats.org/presentationml/2006/main" type="blank" preserve="1">
+  <p:cSld name="slidekit · SWOT">
+    <p:bg>
+      <p:bgPr>
+        <a:solidFill>
+          <a:srgbClr val="FFFFFF"/>
+        </a:solidFill>
+        <a:effectLst/>
+      </p:bgPr>
+    </p:bg>
+    <p:spTree>
+      <p:nvGrpSpPr>
+        <p:cNvPr id="1" name=""/>
+        <p:cNvGrpSpPr/>
+        <p:nvPr/>
+      </p:nvGrpSpPr>
+      <p:grpSpPr>
+        <a:xfrm>
+          <a:off x="0" y="0"/>
+          <a:ext cx="0" cy="0"/>
+          <a:chOff x="0" y="0"/>
+          <a:chExt cx="0" cy="0"/>
+        </a:xfrm>
+      </p:grpSpPr>
+      <p:sp>
+        <p:nvSpPr>
+          <p:cNvPr id="4" name="Slide Number Placeholder 3"/>
+          <p:cNvSpPr>
+            <a:spLocks noGrp="1"/>
+          </p:cNvSpPr>
+          <p:nvPr>
+            <p:ph type="sldNum" sz="quarter" idx="12"/>
+          </p:nvPr>
+        </p:nvSpPr>
+        <p:spPr>
+          <a:xfrm>
+            <a:off x="11186160" y="6035040"/>
+            <a:ext cx="548640" cy="365760"/>
+          </a:xfrm>
+        </p:spPr>
+        <p:txBody>
+          <a:bodyPr/>
+          <a:lstStyle/>
+          <a:p>
+            <a:fld id="{C1FF6DA9-008F-8B48-92A6-B652298478BF}" type="slidenum">
+              <a:rPr lang="en-US" smtClean="0"/>
+              <a:t>‹#›</a:t>
+            </a:fld>
+            <a:endParaRPr lang="en-US"/>
+          </a:p>
+        </p:txBody>
+      </p:sp>
+      <p:sp>
+        <p:nvSpPr>
+          <p:cNvPr id="5" name="TextBox 4"/>
+          <p:cNvSpPr/>
+          <p:nvPr>
+            <p:ph type="title"/>
+          </p:nvPr>
+        </p:nvSpPr>
+        <p:spPr>
+          <a:xfrm>
+            <a:off x="457200" y="457200"/>
+            <a:ext cx="11277600" cy="768096"/>
+          </a:xfrm>
+          <a:prstGeom prst="rect">
+            <a:avLst/>
+          </a:prstGeom>
+          <a:noFill/>
+        </p:spPr>
+        <p:txBody>
+          <a:bodyPr wrap="none" lIns="0" rIns="0">
+            <a:noAutofit/>
+          </a:bodyPr>
+          <a:lstStyle/>
+          <a:p>
+            <a:pPr algn="l"/>
+            <a:r>
+              <a:rPr sz="4200" b="1" i="0">
+                <a:solidFill>
+                  <a:srgbClr val="C1642B"/>
+                </a:solidFill>
+                <a:latin typeface="Arial"/>
+              </a:rPr>
+              <a:t>SWOT Analysis</a:t>
+            </a:r>
+          </a:p>
+        </p:txBody>
+      </p:sp>
+      <p:sp>
+        <p:nvSpPr>
+          <p:cNvPr id="6" name="TextBox 5"/>
+          <p:cNvSpPr/>
+          <p:nvPr>
+            <p:ph type="body" idx="1"/>
+          </p:nvPr>
+        </p:nvSpPr>
+        <p:spPr>
+          <a:xfrm>
+            <a:off x="457200" y="1499616"/>
+            <a:ext cx="5501640" cy="621791"/>
+          </a:xfrm>
+          <a:prstGeom prst="rect">
+            <a:avLst/>
+          </a:prstGeom>
+          <a:noFill/>
+        </p:spPr>
+        <p:txBody>
+          <a:bodyPr wrap="none" lIns="0" rIns="0">
+            <a:noAutofit/>
+          </a:bodyPr>
+          <a:lstStyle/>
+          <a:p>
+            <a:pPr algn="l"/>
+            <a:r>
+              <a:rPr sz="3400" b="1" i="0">
+                <a:solidFill>
+                  <a:srgbClr val="C1642B"/>
+                </a:solidFill>
+                <a:latin typeface="Arial"/>
+              </a:rPr>
+              <a:t>Strengths</a:t>
+            </a:r>
+          </a:p>
+        </p:txBody>
+      </p:sp>
+      <p:sp>
+        <p:nvSpPr>
+          <p:cNvPr id="7" name="Rectangle 6"/>
+          <p:cNvSpPr/>
+          <p:nvPr>
+            <p:ph type="body" idx="2"/>
+          </p:nvPr>
+        </p:nvSpPr>
+        <p:spPr>
+          <a:xfrm>
+            <a:off x="457200" y="2176271"/>
+            <a:ext cx="2015207" cy="54864"/>
+          </a:xfrm>
+          <a:prstGeom prst="rect">
+            <a:avLst/>
+          </a:prstGeom>
+          <a:solidFill>
+            <a:srgbClr val="C1642B"/>
+          </a:solidFill>
+          <a:ln>
+            <a:noFill/>
+          </a:ln>
+          <a:effectLst/>
+        </p:spPr>
+        <p:txBody>
+          <a:bodyPr rtlCol="0" anchor="ctr"/>
+          <a:lstStyle/>
+          <a:p>
+            <a:pPr algn="ctr"/>
+          </a:p>
+        </p:txBody>
+      </p:sp>
+      <p:sp>
+        <p:nvSpPr>
+          <p:cNvPr id="8" name="TextBox 7"/>
+          <p:cNvSpPr/>
+          <p:nvPr>
+            <p:ph type="body" idx="3"/>
+          </p:nvPr>
+        </p:nvSpPr>
+        <p:spPr>
+          <a:xfrm>
+            <a:off x="457200" y="2395727"/>
+            <a:ext cx="7863523" cy="609600"/>
+          </a:xfrm>
+          <a:prstGeom prst="rect">
+            <a:avLst/>
+          </a:prstGeom>
+          <a:noFill/>
+        </p:spPr>
+        <p:txBody>
+          <a:bodyPr wrap="none" lIns="0" rIns="0">
+            <a:noAutofit/>
+          </a:bodyPr>
+          <a:lstStyle/>
+          <a:p>
+            <a:pPr algn="l"/>
+            <a:r>
+              <a:rPr sz="3400" b="0" i="0">
+                <a:solidFill>
+                  <a:srgbClr val="1A1A24"/>
+                </a:solidFill>
+                <a:latin typeface="Arial"/>
+              </a:rPr>
+              <a:t>Strong brand, loyal users</a:t>
+            </a:r>
+          </a:p>
+        </p:txBody>
+      </p:sp>
+      <p:sp>
+        <p:nvSpPr>
+          <p:cNvPr id="9" name="TextBox 8"/>
+          <p:cNvSpPr/>
+          <p:nvPr>
+            <p:ph type="body" idx="4"/>
+          </p:nvPr>
+        </p:nvSpPr>
+        <p:spPr>
+          <a:xfrm>
+            <a:off x="6233160" y="1499616"/>
+            <a:ext cx="5501640" cy="621791"/>
+          </a:xfrm>
+          <a:prstGeom prst="rect">
+            <a:avLst/>
+          </a:prstGeom>
+          <a:noFill/>
+        </p:spPr>
+        <p:txBody>
+          <a:bodyPr wrap="none" lIns="0" rIns="0">
+            <a:noAutofit/>
+          </a:bodyPr>
+          <a:lstStyle/>
+          <a:p>
+            <a:pPr algn="l"/>
+            <a:r>
+              <a:rPr sz="3400" b="1" i="0">
+                <a:solidFill>
+                  <a:srgbClr val="1A1A24"/>
+                </a:solidFill>
+                <a:latin typeface="Arial"/>
+              </a:rPr>
+              <a:t>Weaknesses</a:t>
+            </a:r>
+          </a:p>
+        </p:txBody>
+      </p:sp>
+      <p:sp>
+        <p:nvSpPr>
+          <p:cNvPr id="10" name="Rectangle 9"/>
+          <p:cNvSpPr/>
+          <p:nvPr>
+            <p:ph type="body" idx="5"/>
+          </p:nvPr>
+        </p:nvSpPr>
+        <p:spPr>
+          <a:xfrm>
+            <a:off x="6233160" y="2176271"/>
+            <a:ext cx="2584686" cy="54864"/>
+          </a:xfrm>
+          <a:prstGeom prst="rect">
+            <a:avLst/>
+          </a:prstGeom>
+          <a:solidFill>
+            <a:srgbClr val="1A1A24"/>
+          </a:solidFill>
+          <a:ln>
+            <a:noFill/>
+          </a:ln>
+          <a:effectLst/>
+        </p:spPr>
+        <p:txBody>
+          <a:bodyPr rtlCol="0" anchor="ctr"/>
+          <a:lstStyle/>
+          <a:p>
+            <a:pPr algn="ctr"/>
+          </a:p>
+        </p:txBody>
+      </p:sp>
+      <p:sp>
+        <p:nvSpPr>
+          <p:cNvPr id="11" name="TextBox 10"/>
+          <p:cNvSpPr/>
+          <p:nvPr>
+            <p:ph type="body" idx="6"/>
+          </p:nvPr>
+        </p:nvSpPr>
+        <p:spPr>
+          <a:xfrm>
+            <a:off x="6233160" y="2395727"/>
+            <a:ext cx="5958840" cy="609600"/>
+          </a:xfrm>
+          <a:prstGeom prst="rect">
+            <a:avLst/>
+          </a:prstGeom>
+          <a:noFill/>
+        </p:spPr>
+        <p:txBody>
+          <a:bodyPr wrap="none" lIns="0" rIns="0">
+            <a:noAutofit/>
+          </a:bodyPr>
+          <a:lstStyle/>
+          <a:p>
+            <a:pPr algn="l"/>
+            <a:r>
+              <a:rPr sz="3400" b="0" i="0">
+                <a:solidFill>
+                  <a:srgbClr val="1A1A24"/>
+                </a:solidFill>
+                <a:latin typeface="Arial"/>
+              </a:rPr>
+              <a:t>Thin margins, small team</a:t>
+            </a:r>
+          </a:p>
+        </p:txBody>
+      </p:sp>
+      <p:sp>
+        <p:nvSpPr>
+          <p:cNvPr id="12" name="TextBox 11"/>
+          <p:cNvSpPr/>
+          <p:nvPr>
+            <p:ph type="body" idx="7"/>
+          </p:nvPr>
+        </p:nvSpPr>
+        <p:spPr>
+          <a:xfrm>
+            <a:off x="457200" y="3767328"/>
+            <a:ext cx="5501640" cy="621791"/>
+          </a:xfrm>
+          <a:prstGeom prst="rect">
+            <a:avLst/>
+          </a:prstGeom>
+          <a:noFill/>
+        </p:spPr>
+        <p:txBody>
+          <a:bodyPr wrap="none" lIns="0" rIns="0">
+            <a:noAutofit/>
+          </a:bodyPr>
+          <a:lstStyle/>
+          <a:p>
+            <a:pPr algn="l"/>
+            <a:r>
+              <a:rPr sz="3400" b="1" i="0">
+                <a:solidFill>
+                  <a:srgbClr val="C1642B"/>
+                </a:solidFill>
+                <a:latin typeface="Arial"/>
+              </a:rPr>
+              <a:t>Opportunities</a:t>
+            </a:r>
+          </a:p>
+        </p:txBody>
+      </p:sp>
+      <p:sp>
+        <p:nvSpPr>
+          <p:cNvPr id="13" name="Rectangle 12"/>
+          <p:cNvSpPr/>
+          <p:nvPr>
+            <p:ph type="body" idx="8"/>
+          </p:nvPr>
+        </p:nvSpPr>
+        <p:spPr>
+          <a:xfrm>
+            <a:off x="457200" y="4443983"/>
+            <a:ext cx="2830525" cy="54864"/>
+          </a:xfrm>
+          <a:prstGeom prst="rect">
+            <a:avLst/>
+          </a:prstGeom>
+          <a:solidFill>
+            <a:srgbClr val="C1642B"/>
+          </a:solidFill>
+          <a:ln>
+            <a:noFill/>
+          </a:ln>
+          <a:effectLst/>
+        </p:spPr>
+        <p:txBody>
+          <a:bodyPr rtlCol="0" anchor="ctr"/>
+          <a:lstStyle/>
+          <a:p>
+            <a:pPr algn="ctr"/>
+          </a:p>
+        </p:txBody>
+      </p:sp>
+      <p:sp>
+        <p:nvSpPr>
+          <p:cNvPr id="14" name="TextBox 13"/>
+          <p:cNvSpPr/>
+          <p:nvPr>
+            <p:ph type="body" idx="9"/>
+          </p:nvPr>
+        </p:nvSpPr>
+        <p:spPr>
+          <a:xfrm>
+            <a:off x="457200" y="4663439"/>
+            <a:ext cx="8015326" cy="609600"/>
+          </a:xfrm>
+          <a:prstGeom prst="rect">
+            <a:avLst/>
+          </a:prstGeom>
+          <a:noFill/>
+        </p:spPr>
+        <p:txBody>
+          <a:bodyPr wrap="none" lIns="0" rIns="0">
+            <a:noAutofit/>
+          </a:bodyPr>
+          <a:lstStyle/>
+          <a:p>
+            <a:pPr algn="l"/>
+            <a:r>
+              <a:rPr sz="3400" b="0" i="0">
+                <a:solidFill>
+                  <a:srgbClr val="1A1A24"/>
+                </a:solidFill>
+                <a:latin typeface="Arial"/>
+              </a:rPr>
+              <a:t>New markets via partners</a:t>
+            </a:r>
+          </a:p>
+        </p:txBody>
+      </p:sp>
+      <p:sp>
+        <p:nvSpPr>
+          <p:cNvPr id="15" name="TextBox 14"/>
+          <p:cNvSpPr/>
+          <p:nvPr>
+            <p:ph type="body" idx="13"/>
+          </p:nvPr>
+        </p:nvSpPr>
+        <p:spPr>
+          <a:xfrm>
+            <a:off x="6233160" y="3767328"/>
+            <a:ext cx="5501640" cy="621791"/>
+          </a:xfrm>
+          <a:prstGeom prst="rect">
+            <a:avLst/>
+          </a:prstGeom>
+          <a:noFill/>
+        </p:spPr>
+        <p:txBody>
+          <a:bodyPr wrap="none" lIns="0" rIns="0">
+            <a:noAutofit/>
+          </a:bodyPr>
+          <a:lstStyle/>
+          <a:p>
+            <a:pPr algn="l"/>
+            <a:r>
+              <a:rPr sz="3400" b="1" i="0">
+                <a:solidFill>
+                  <a:srgbClr val="1A1A24"/>
+                </a:solidFill>
+                <a:latin typeface="Arial"/>
+              </a:rPr>
+              <a:t>Threats</a:t>
+            </a:r>
+          </a:p>
+        </p:txBody>
+      </p:sp>
+      <p:sp>
+        <p:nvSpPr>
+          <p:cNvPr id="16" name="Rectangle 15"/>
+          <p:cNvSpPr/>
+          <p:nvPr>
+            <p:ph type="body" idx="14"/>
+          </p:nvPr>
+        </p:nvSpPr>
+        <p:spPr>
+          <a:xfrm>
+            <a:off x="6233160" y="4443983"/>
+            <a:ext cx="1559793" cy="54864"/>
+          </a:xfrm>
+          <a:prstGeom prst="rect">
+            <a:avLst/>
+          </a:prstGeom>
+          <a:solidFill>
+            <a:srgbClr val="1A1A24"/>
+          </a:solidFill>
+          <a:ln>
+            <a:noFill/>
+          </a:ln>
+          <a:effectLst/>
+        </p:spPr>
+        <p:txBody>
+          <a:bodyPr rtlCol="0" anchor="ctr"/>
+          <a:lstStyle/>
+          <a:p>
+            <a:pPr algn="ctr"/>
+          </a:p>
+        </p:txBody>
+      </p:sp>
+      <p:sp>
+        <p:nvSpPr>
+          <p:cNvPr id="17" name="TextBox 16"/>
+          <p:cNvSpPr/>
+          <p:nvPr>
+            <p:ph type="body" idx="15"/>
+          </p:nvPr>
+        </p:nvSpPr>
+        <p:spPr>
+          <a:xfrm>
+            <a:off x="6233160" y="4663439"/>
+            <a:ext cx="5958840" cy="609600"/>
+          </a:xfrm>
+          <a:prstGeom prst="rect">
+            <a:avLst/>
+          </a:prstGeom>
+          <a:noFill/>
+        </p:spPr>
+        <p:txBody>
+          <a:bodyPr wrap="none" lIns="0" rIns="0">
+            <a:noAutofit/>
+          </a:bodyPr>
+          <a:lstStyle/>
+          <a:p>
+            <a:pPr algn="l"/>
+            <a:r>
+              <a:rPr sz="3400" b="0" i="0">
+                <a:solidFill>
+                  <a:srgbClr val="1A1A24"/>
+                </a:solidFill>
+                <a:latin typeface="Arial"/>
+              </a:rPr>
+              <a:t>New entrants cut prices</a:t>
             </a:r>
           </a:p>
         </p:txBody>
@@ -12827,533 +12696,6 @@
 
 <file path=ppt/slideLayouts/slideLayout40.xml><?xml version="1.0" encoding="utf-8"?>
 <p:sldLayout xmlns:a="http://schemas.openxmlformats.org/drawingml/2006/main" xmlns:r="http://schemas.openxmlformats.org/officeDocument/2006/relationships" xmlns:p="http://schemas.openxmlformats.org/presentationml/2006/main" type="blank" preserve="1">
-  <p:cSld name="slidekit · SWOT">
-    <p:bg>
-      <p:bgPr>
-        <a:solidFill>
-          <a:srgbClr val="FFFFFF"/>
-        </a:solidFill>
-        <a:effectLst/>
-      </p:bgPr>
-    </p:bg>
-    <p:spTree>
-      <p:nvGrpSpPr>
-        <p:cNvPr id="1" name=""/>
-        <p:cNvGrpSpPr/>
-        <p:nvPr/>
-      </p:nvGrpSpPr>
-      <p:grpSpPr>
-        <a:xfrm>
-          <a:off x="0" y="0"/>
-          <a:ext cx="0" cy="0"/>
-          <a:chOff x="0" y="0"/>
-          <a:chExt cx="0" cy="0"/>
-        </a:xfrm>
-      </p:grpSpPr>
-      <p:sp>
-        <p:nvSpPr>
-          <p:cNvPr id="4" name="Slide Number Placeholder 3"/>
-          <p:cNvSpPr>
-            <a:spLocks noGrp="1"/>
-          </p:cNvSpPr>
-          <p:nvPr>
-            <p:ph type="sldNum" sz="quarter" idx="12"/>
-          </p:nvPr>
-        </p:nvSpPr>
-        <p:spPr>
-          <a:xfrm>
-            <a:off x="10363200" y="6035040"/>
-            <a:ext cx="1371600" cy="365760"/>
-          </a:xfrm>
-        </p:spPr>
-        <p:txBody>
-          <a:bodyPr/>
-          <a:lstStyle/>
-          <a:p>
-            <a:fld id="{C1FF6DA9-008F-8B48-92A6-B652298478BF}" type="slidenum">
-              <a:rPr lang="en-US" smtClean="0"/>
-              <a:t>‹#›</a:t>
-            </a:fld>
-            <a:endParaRPr lang="en-US"/>
-          </a:p>
-        </p:txBody>
-      </p:sp>
-      <p:sp>
-        <p:nvSpPr>
-          <p:cNvPr id="5" name="TextBox 4"/>
-          <p:cNvSpPr/>
-          <p:nvPr>
-            <p:ph type="title"/>
-          </p:nvPr>
-        </p:nvSpPr>
-        <p:spPr>
-          <a:xfrm>
-            <a:off x="457200" y="457200"/>
-            <a:ext cx="11277600" cy="768096"/>
-          </a:xfrm>
-          <a:prstGeom prst="rect">
-            <a:avLst/>
-          </a:prstGeom>
-          <a:noFill/>
-        </p:spPr>
-        <p:txBody>
-          <a:bodyPr wrap="none" lIns="0" rIns="0">
-            <a:noAutofit/>
-          </a:bodyPr>
-          <a:lstStyle/>
-          <a:p>
-            <a:pPr algn="l"/>
-            <a:r>
-              <a:rPr sz="4200" b="1" i="0">
-                <a:solidFill>
-                  <a:srgbClr val="1F3A5F"/>
-                </a:solidFill>
-                <a:latin typeface="Arial"/>
-              </a:rPr>
-              <a:t>SWOT Analysis</a:t>
-            </a:r>
-          </a:p>
-        </p:txBody>
-      </p:sp>
-      <p:sp>
-        <p:nvSpPr>
-          <p:cNvPr id="6" name="TextBox 5"/>
-          <p:cNvSpPr/>
-          <p:nvPr>
-            <p:ph type="body" idx="1"/>
-          </p:nvPr>
-        </p:nvSpPr>
-        <p:spPr>
-          <a:xfrm>
-            <a:off x="457200" y="1499616"/>
-            <a:ext cx="5501640" cy="621791"/>
-          </a:xfrm>
-          <a:prstGeom prst="rect">
-            <a:avLst/>
-          </a:prstGeom>
-          <a:noFill/>
-        </p:spPr>
-        <p:txBody>
-          <a:bodyPr wrap="none" lIns="0" rIns="0">
-            <a:noAutofit/>
-          </a:bodyPr>
-          <a:lstStyle/>
-          <a:p>
-            <a:pPr algn="l"/>
-            <a:r>
-              <a:rPr sz="3400" b="1" i="0">
-                <a:solidFill>
-                  <a:srgbClr val="C1642B"/>
-                </a:solidFill>
-                <a:latin typeface="Arial"/>
-              </a:rPr>
-              <a:t>Strengths</a:t>
-            </a:r>
-          </a:p>
-        </p:txBody>
-      </p:sp>
-      <p:sp>
-        <p:nvSpPr>
-          <p:cNvPr id="7" name="Rectangle 6"/>
-          <p:cNvSpPr/>
-          <p:nvPr>
-            <p:ph type="body" idx="2"/>
-          </p:nvPr>
-        </p:nvSpPr>
-        <p:spPr>
-          <a:xfrm>
-            <a:off x="457200" y="2176271"/>
-            <a:ext cx="1650492" cy="54864"/>
-          </a:xfrm>
-          <a:prstGeom prst="rect">
-            <a:avLst/>
-          </a:prstGeom>
-          <a:solidFill>
-            <a:srgbClr val="C1642B"/>
-          </a:solidFill>
-          <a:ln>
-            <a:noFill/>
-          </a:ln>
-          <a:effectLst/>
-        </p:spPr>
-        <p:txBody>
-          <a:bodyPr rtlCol="0" anchor="ctr"/>
-          <a:lstStyle/>
-          <a:p>
-            <a:pPr algn="ctr"/>
-          </a:p>
-        </p:txBody>
-      </p:sp>
-      <p:sp>
-        <p:nvSpPr>
-          <p:cNvPr id="8" name="TextBox 7"/>
-          <p:cNvSpPr/>
-          <p:nvPr>
-            <p:ph type="body" idx="3"/>
-          </p:nvPr>
-        </p:nvSpPr>
-        <p:spPr>
-          <a:xfrm>
-            <a:off x="457200" y="2395727"/>
-            <a:ext cx="5501640" cy="1097281"/>
-          </a:xfrm>
-          <a:prstGeom prst="rect">
-            <a:avLst/>
-          </a:prstGeom>
-          <a:noFill/>
-        </p:spPr>
-        <p:txBody>
-          <a:bodyPr wrap="square" lIns="0" rIns="0">
-            <a:noAutofit/>
-          </a:bodyPr>
-          <a:lstStyle/>
-          <a:p>
-            <a:pPr algn="l"/>
-            <a:r>
-              <a:rPr sz="3400" b="0" i="0">
-                <a:solidFill>
-                  <a:srgbClr val="1A1A24"/>
-                </a:solidFill>
-                <a:latin typeface="Arial"/>
-              </a:rPr>
-              <a:t>A strong brand with loyal users</a:t>
-            </a:r>
-          </a:p>
-        </p:txBody>
-      </p:sp>
-      <p:sp>
-        <p:nvSpPr>
-          <p:cNvPr id="9" name="TextBox 8"/>
-          <p:cNvSpPr/>
-          <p:nvPr>
-            <p:ph type="body" idx="4"/>
-          </p:nvPr>
-        </p:nvSpPr>
-        <p:spPr>
-          <a:xfrm>
-            <a:off x="6233160" y="1499616"/>
-            <a:ext cx="5501640" cy="621791"/>
-          </a:xfrm>
-          <a:prstGeom prst="rect">
-            <a:avLst/>
-          </a:prstGeom>
-          <a:noFill/>
-        </p:spPr>
-        <p:txBody>
-          <a:bodyPr wrap="none" lIns="0" rIns="0">
-            <a:noAutofit/>
-          </a:bodyPr>
-          <a:lstStyle/>
-          <a:p>
-            <a:pPr algn="l"/>
-            <a:r>
-              <a:rPr sz="3400" b="1" i="0">
-                <a:solidFill>
-                  <a:srgbClr val="7C8794"/>
-                </a:solidFill>
-                <a:latin typeface="Arial"/>
-              </a:rPr>
-              <a:t>Weaknesses</a:t>
-            </a:r>
-          </a:p>
-        </p:txBody>
-      </p:sp>
-      <p:sp>
-        <p:nvSpPr>
-          <p:cNvPr id="10" name="Rectangle 9"/>
-          <p:cNvSpPr/>
-          <p:nvPr>
-            <p:ph type="body" idx="5"/>
-          </p:nvPr>
-        </p:nvSpPr>
-        <p:spPr>
-          <a:xfrm>
-            <a:off x="6233160" y="2176271"/>
-            <a:ext cx="1650492" cy="54864"/>
-          </a:xfrm>
-          <a:prstGeom prst="rect">
-            <a:avLst/>
-          </a:prstGeom>
-          <a:solidFill>
-            <a:srgbClr val="7C8794"/>
-          </a:solidFill>
-          <a:ln>
-            <a:noFill/>
-          </a:ln>
-          <a:effectLst/>
-        </p:spPr>
-        <p:txBody>
-          <a:bodyPr rtlCol="0" anchor="ctr"/>
-          <a:lstStyle/>
-          <a:p>
-            <a:pPr algn="ctr"/>
-          </a:p>
-        </p:txBody>
-      </p:sp>
-      <p:sp>
-        <p:nvSpPr>
-          <p:cNvPr id="11" name="TextBox 10"/>
-          <p:cNvSpPr/>
-          <p:nvPr>
-            <p:ph type="body" idx="6"/>
-          </p:nvPr>
-        </p:nvSpPr>
-        <p:spPr>
-          <a:xfrm>
-            <a:off x="6233160" y="2395727"/>
-            <a:ext cx="5501640" cy="1097281"/>
-          </a:xfrm>
-          <a:prstGeom prst="rect">
-            <a:avLst/>
-          </a:prstGeom>
-          <a:noFill/>
-        </p:spPr>
-        <p:txBody>
-          <a:bodyPr wrap="square" lIns="0" rIns="0">
-            <a:noAutofit/>
-          </a:bodyPr>
-          <a:lstStyle/>
-          <a:p>
-            <a:pPr algn="l"/>
-            <a:r>
-              <a:rPr sz="3400" b="0" i="0">
-                <a:solidFill>
-                  <a:srgbClr val="1A1A24"/>
-                </a:solidFill>
-                <a:latin typeface="Arial"/>
-              </a:rPr>
-              <a:t>Thin margins and a small team</a:t>
-            </a:r>
-          </a:p>
-        </p:txBody>
-      </p:sp>
-      <p:sp>
-        <p:nvSpPr>
-          <p:cNvPr id="12" name="TextBox 11"/>
-          <p:cNvSpPr/>
-          <p:nvPr>
-            <p:ph type="body" idx="7"/>
-          </p:nvPr>
-        </p:nvSpPr>
-        <p:spPr>
-          <a:xfrm>
-            <a:off x="457200" y="3767328"/>
-            <a:ext cx="5501640" cy="621791"/>
-          </a:xfrm>
-          <a:prstGeom prst="rect">
-            <a:avLst/>
-          </a:prstGeom>
-          <a:noFill/>
-        </p:spPr>
-        <p:txBody>
-          <a:bodyPr wrap="none" lIns="0" rIns="0">
-            <a:noAutofit/>
-          </a:bodyPr>
-          <a:lstStyle/>
-          <a:p>
-            <a:pPr algn="l"/>
-            <a:r>
-              <a:rPr sz="3400" b="1" i="0">
-                <a:solidFill>
-                  <a:srgbClr val="C1642B"/>
-                </a:solidFill>
-                <a:latin typeface="Arial"/>
-              </a:rPr>
-              <a:t>Opportunities</a:t>
-            </a:r>
-          </a:p>
-        </p:txBody>
-      </p:sp>
-      <p:sp>
-        <p:nvSpPr>
-          <p:cNvPr id="13" name="Rectangle 12"/>
-          <p:cNvSpPr/>
-          <p:nvPr>
-            <p:ph type="body" idx="8"/>
-          </p:nvPr>
-        </p:nvSpPr>
-        <p:spPr>
-          <a:xfrm>
-            <a:off x="457200" y="4443983"/>
-            <a:ext cx="1650492" cy="54864"/>
-          </a:xfrm>
-          <a:prstGeom prst="rect">
-            <a:avLst/>
-          </a:prstGeom>
-          <a:solidFill>
-            <a:srgbClr val="C1642B"/>
-          </a:solidFill>
-          <a:ln>
-            <a:noFill/>
-          </a:ln>
-          <a:effectLst/>
-        </p:spPr>
-        <p:txBody>
-          <a:bodyPr rtlCol="0" anchor="ctr"/>
-          <a:lstStyle/>
-          <a:p>
-            <a:pPr algn="ctr"/>
-          </a:p>
-        </p:txBody>
-      </p:sp>
-      <p:sp>
-        <p:nvSpPr>
-          <p:cNvPr id="14" name="TextBox 13"/>
-          <p:cNvSpPr/>
-          <p:nvPr>
-            <p:ph type="body" idx="9"/>
-          </p:nvPr>
-        </p:nvSpPr>
-        <p:spPr>
-          <a:xfrm>
-            <a:off x="457200" y="4663439"/>
-            <a:ext cx="5501640" cy="1097281"/>
-          </a:xfrm>
-          <a:prstGeom prst="rect">
-            <a:avLst/>
-          </a:prstGeom>
-          <a:noFill/>
-        </p:spPr>
-        <p:txBody>
-          <a:bodyPr wrap="square" lIns="0" rIns="0">
-            <a:noAutofit/>
-          </a:bodyPr>
-          <a:lstStyle/>
-          <a:p>
-            <a:pPr algn="l"/>
-            <a:r>
-              <a:rPr sz="3400" b="0" i="0">
-                <a:solidFill>
-                  <a:srgbClr val="1A1A24"/>
-                </a:solidFill>
-                <a:latin typeface="Arial"/>
-              </a:rPr>
-              <a:t>New markets through partnerships</a:t>
-            </a:r>
-          </a:p>
-        </p:txBody>
-      </p:sp>
-      <p:sp>
-        <p:nvSpPr>
-          <p:cNvPr id="15" name="TextBox 14"/>
-          <p:cNvSpPr/>
-          <p:nvPr>
-            <p:ph type="body" idx="13"/>
-          </p:nvPr>
-        </p:nvSpPr>
-        <p:spPr>
-          <a:xfrm>
-            <a:off x="6233160" y="3767328"/>
-            <a:ext cx="5501640" cy="621791"/>
-          </a:xfrm>
-          <a:prstGeom prst="rect">
-            <a:avLst/>
-          </a:prstGeom>
-          <a:noFill/>
-        </p:spPr>
-        <p:txBody>
-          <a:bodyPr wrap="none" lIns="0" rIns="0">
-            <a:noAutofit/>
-          </a:bodyPr>
-          <a:lstStyle/>
-          <a:p>
-            <a:pPr algn="l"/>
-            <a:r>
-              <a:rPr sz="3400" b="1" i="0">
-                <a:solidFill>
-                  <a:srgbClr val="7C8794"/>
-                </a:solidFill>
-                <a:latin typeface="Arial"/>
-              </a:rPr>
-              <a:t>Threats</a:t>
-            </a:r>
-          </a:p>
-        </p:txBody>
-      </p:sp>
-      <p:sp>
-        <p:nvSpPr>
-          <p:cNvPr id="16" name="Rectangle 15"/>
-          <p:cNvSpPr/>
-          <p:nvPr>
-            <p:ph type="body" idx="14"/>
-          </p:nvPr>
-        </p:nvSpPr>
-        <p:spPr>
-          <a:xfrm>
-            <a:off x="6233160" y="4443983"/>
-            <a:ext cx="1650492" cy="54864"/>
-          </a:xfrm>
-          <a:prstGeom prst="rect">
-            <a:avLst/>
-          </a:prstGeom>
-          <a:solidFill>
-            <a:srgbClr val="7C8794"/>
-          </a:solidFill>
-          <a:ln>
-            <a:noFill/>
-          </a:ln>
-          <a:effectLst/>
-        </p:spPr>
-        <p:txBody>
-          <a:bodyPr rtlCol="0" anchor="ctr"/>
-          <a:lstStyle/>
-          <a:p>
-            <a:pPr algn="ctr"/>
-          </a:p>
-        </p:txBody>
-      </p:sp>
-      <p:sp>
-        <p:nvSpPr>
-          <p:cNvPr id="17" name="TextBox 16"/>
-          <p:cNvSpPr/>
-          <p:nvPr>
-            <p:ph type="body" idx="15"/>
-          </p:nvPr>
-        </p:nvSpPr>
-        <p:spPr>
-          <a:xfrm>
-            <a:off x="6233160" y="4663439"/>
-            <a:ext cx="5501640" cy="1097281"/>
-          </a:xfrm>
-          <a:prstGeom prst="rect">
-            <a:avLst/>
-          </a:prstGeom>
-          <a:noFill/>
-        </p:spPr>
-        <p:txBody>
-          <a:bodyPr wrap="square" lIns="0" rIns="0">
-            <a:noAutofit/>
-          </a:bodyPr>
-          <a:lstStyle/>
-          <a:p>
-            <a:pPr algn="l"/>
-            <a:r>
-              <a:rPr sz="3400" b="0" i="0">
-                <a:solidFill>
-                  <a:srgbClr val="1A1A24"/>
-                </a:solidFill>
-                <a:latin typeface="Arial"/>
-              </a:rPr>
-              <a:t>New entrants driving price pressure</a:t>
-            </a:r>
-          </a:p>
-        </p:txBody>
-      </p:sp>
-    </p:spTree>
-    <p:extLst>
-      <p:ext uri="{BB962C8B-B14F-4D97-AF65-F5344CB8AC3E}">
-        <p14:creationId xmlns:p14="http://schemas.microsoft.com/office/powerpoint/2010/main" val="1212999818"/>
-      </p:ext>
-    </p:extLst>
-  </p:cSld>
-  <p:clrMapOvr>
-    <a:masterClrMapping/>
-  </p:clrMapOvr>
-</p:sldLayout>
-</file>
-
-<file path=ppt/slideLayouts/slideLayout41.xml><?xml version="1.0" encoding="utf-8"?>
-<p:sldLayout xmlns:a="http://schemas.openxmlformats.org/drawingml/2006/main" xmlns:r="http://schemas.openxmlformats.org/officeDocument/2006/relationships" xmlns:p="http://schemas.openxmlformats.org/presentationml/2006/main" type="blank" preserve="1">
   <p:cSld name="slidekit · Comparison Matrix">
     <p:bg>
       <p:bgPr>
@@ -13389,8 +12731,8 @@
         </p:nvSpPr>
         <p:spPr>
           <a:xfrm>
-            <a:off x="10363200" y="6035040"/>
-            <a:ext cx="1371600" cy="365760"/>
+            <a:off x="11186160" y="6035040"/>
+            <a:ext cx="548640" cy="365760"/>
           </a:xfrm>
         </p:spPr>
         <p:txBody>
@@ -13433,7 +12775,7 @@
             <a:r>
               <a:rPr sz="4200" b="1" i="0">
                 <a:solidFill>
-                  <a:srgbClr val="1F3A5F"/>
+                  <a:srgbClr val="C1642B"/>
                 </a:solidFill>
                 <a:latin typeface="Arial"/>
               </a:rPr>
@@ -15556,7 +14898,6 @@
     <p:sldLayoutId id="2147483738" r:id="rId39"/>
     <p:sldLayoutId id="2147483739" r:id="rId40"/>
     <p:sldLayoutId id="2147483740" r:id="rId41"/>
-    <p:sldLayoutId id="2147483741" r:id="rId42"/>
   </p:sldLayoutIdLst>
   <p:txStyles>
     <p:titleStyle>
@@ -15855,7 +15196,7 @@
             <a:r>
               <a:rPr sz="6000" b="1" i="0">
                 <a:solidFill>
-                  <a:srgbClr val="1F3A5F"/>
+                  <a:srgbClr val="C1642B"/>
                 </a:solidFill>
                 <a:latin typeface="Arial"/>
               </a:rPr>
@@ -15951,7 +15292,7 @@
             <a:r>
               <a:rPr sz="4200" b="1" i="0">
                 <a:solidFill>
-                  <a:srgbClr val="1A1A24"/>
+                  <a:srgbClr val="C1642B"/>
                 </a:solidFill>
                 <a:latin typeface="Arial"/>
               </a:rPr>
@@ -15986,7 +15327,7 @@
             <a:r>
               <a:rPr sz="4200" b="1" i="0">
                 <a:solidFill>
-                  <a:srgbClr val="1F3A5F"/>
+                  <a:srgbClr val="C1642B"/>
                 </a:solidFill>
                 <a:latin typeface="Arial"/>
               </a:rPr>
@@ -16021,7 +15362,7 @@
             <a:r>
               <a:rPr sz="4200" b="1" i="0">
                 <a:solidFill>
-                  <a:srgbClr val="1F3A5F"/>
+                  <a:srgbClr val="C1642B"/>
                 </a:solidFill>
                 <a:latin typeface="Arial"/>
               </a:rPr>
@@ -16091,7 +15432,7 @@
             <a:r>
               <a:rPr sz="4200" b="1" i="0">
                 <a:solidFill>
-                  <a:srgbClr val="1F3A5F"/>
+                  <a:srgbClr val="C1642B"/>
                 </a:solidFill>
                 <a:latin typeface="Arial"/>
               </a:rPr>
@@ -16126,7 +15467,7 @@
             <a:r>
               <a:rPr sz="4200" b="1" i="0">
                 <a:solidFill>
-                  <a:srgbClr val="1F3A5F"/>
+                  <a:srgbClr val="C1642B"/>
                 </a:solidFill>
                 <a:latin typeface="Arial"/>
               </a:rPr>
@@ -16196,7 +15537,7 @@
             <a:r>
               <a:rPr sz="4200" b="1" i="0">
                 <a:solidFill>
-                  <a:srgbClr val="1F3A5F"/>
+                  <a:srgbClr val="C1642B"/>
                 </a:solidFill>
                 <a:latin typeface="Arial"/>
               </a:rPr>
@@ -16231,7 +15572,7 @@
             <a:r>
               <a:rPr sz="4200" b="1" i="0">
                 <a:solidFill>
-                  <a:srgbClr val="1F3A5F"/>
+                  <a:srgbClr val="C1642B"/>
                 </a:solidFill>
                 <a:latin typeface="Arial"/>
               </a:rPr>
@@ -16285,25 +15626,25 @@
         </p:nvSpPr>
         <p:spPr>
           <a:xfrm>
-            <a:off x="10363200" y="6035040"/>
-            <a:ext cx="1371600" cy="365760"/>
-          </a:xfrm>
-          <a:prstGeom prst="rect">
-            <a:avLst/>
-          </a:prstGeom>
-          <a:noFill/>
-        </p:spPr>
-        <p:txBody>
-          <a:bodyPr wrap="none" lIns="0" rIns="0">
-            <a:noAutofit/>
-          </a:bodyPr>
-          <a:lstStyle/>
-          <a:p>
-            <a:pPr algn="l"/>
+            <a:off x="11186160" y="6035040"/>
+            <a:ext cx="548640" cy="365760"/>
+          </a:xfrm>
+          <a:prstGeom prst="rect">
+            <a:avLst/>
+          </a:prstGeom>
+          <a:noFill/>
+        </p:spPr>
+        <p:txBody>
+          <a:bodyPr wrap="none" lIns="0" rIns="0">
+            <a:noAutofit/>
+          </a:bodyPr>
+          <a:lstStyle/>
+          <a:p>
+            <a:pPr algn="r"/>
             <a:fld id="{4B0E1F8A-6C1D-4E2A-9F3B-7A5C8D2E1F60}" type="slidenum">
               <a:rPr sz="1600" b="0" i="0">
                 <a:solidFill>
-                  <a:srgbClr val="7C8794"/>
+                  <a:srgbClr val="1A1A24"/>
                 </a:solidFill>
                 <a:latin typeface="Arial"/>
               </a:rPr>
@@ -16364,7 +15705,7 @@
             <a:r>
               <a:rPr sz="4200" b="1" i="0">
                 <a:solidFill>
-                  <a:srgbClr val="1F3A5F"/>
+                  <a:srgbClr val="C1642B"/>
                 </a:solidFill>
                 <a:latin typeface="Arial"/>
               </a:rPr>
@@ -16593,25 +15934,25 @@
         </p:nvSpPr>
         <p:spPr>
           <a:xfrm>
-            <a:off x="10363200" y="6035040"/>
-            <a:ext cx="1371600" cy="365760"/>
-          </a:xfrm>
-          <a:prstGeom prst="rect">
-            <a:avLst/>
-          </a:prstGeom>
-          <a:noFill/>
-        </p:spPr>
-        <p:txBody>
-          <a:bodyPr wrap="none" lIns="0" rIns="0">
-            <a:noAutofit/>
-          </a:bodyPr>
-          <a:lstStyle/>
-          <a:p>
-            <a:pPr algn="l"/>
+            <a:off x="11186160" y="6035040"/>
+            <a:ext cx="548640" cy="365760"/>
+          </a:xfrm>
+          <a:prstGeom prst="rect">
+            <a:avLst/>
+          </a:prstGeom>
+          <a:noFill/>
+        </p:spPr>
+        <p:txBody>
+          <a:bodyPr wrap="none" lIns="0" rIns="0">
+            <a:noAutofit/>
+          </a:bodyPr>
+          <a:lstStyle/>
+          <a:p>
+            <a:pPr algn="r"/>
             <a:fld id="{4B0E1F8A-6C1D-4E2A-9F3B-7A5C8D2E1F60}" type="slidenum">
               <a:rPr sz="1600" b="0" i="0">
                 <a:solidFill>
-                  <a:srgbClr val="7C8794"/>
+                  <a:srgbClr val="1A1A24"/>
                 </a:solidFill>
                 <a:latin typeface="Arial"/>
               </a:rPr>
@@ -16672,7 +16013,7 @@
             <a:r>
               <a:rPr sz="4200" b="1" i="0">
                 <a:solidFill>
-                  <a:srgbClr val="1F3A5F"/>
+                  <a:srgbClr val="C1642B"/>
                 </a:solidFill>
                 <a:latin typeface="Arial"/>
               </a:rPr>
@@ -16690,7 +16031,7 @@
         <p:spPr>
           <a:xfrm>
             <a:off x="457200" y="1499616"/>
-            <a:ext cx="3576320" cy="518159"/>
+            <a:ext cx="11277600" cy="518159"/>
           </a:xfrm>
           <a:prstGeom prst="rect">
             <a:avLst/>
@@ -16724,8 +16065,8 @@
         </p:nvSpPr>
         <p:spPr>
           <a:xfrm>
-            <a:off x="457200" y="2154935"/>
-            <a:ext cx="3576320" cy="3605785"/>
+            <a:off x="457200" y="2109215"/>
+            <a:ext cx="11277600" cy="627889"/>
           </a:xfrm>
           <a:prstGeom prst="rect">
             <a:avLst/>
@@ -16759,8 +16100,8 @@
         </p:nvSpPr>
         <p:spPr>
           <a:xfrm>
-            <a:off x="4307840" y="1499616"/>
-            <a:ext cx="3576320" cy="518159"/>
+            <a:off x="457200" y="3011424"/>
+            <a:ext cx="11277600" cy="518159"/>
           </a:xfrm>
           <a:prstGeom prst="rect">
             <a:avLst/>
@@ -16794,8 +16135,8 @@
         </p:nvSpPr>
         <p:spPr>
           <a:xfrm>
-            <a:off x="4307840" y="2154935"/>
-            <a:ext cx="3576320" cy="3605785"/>
+            <a:off x="457200" y="3621023"/>
+            <a:ext cx="11277600" cy="627889"/>
           </a:xfrm>
           <a:prstGeom prst="rect">
             <a:avLst/>
@@ -16829,8 +16170,8 @@
         </p:nvSpPr>
         <p:spPr>
           <a:xfrm>
-            <a:off x="8158480" y="1499616"/>
-            <a:ext cx="3637617" cy="518159"/>
+            <a:off x="457200" y="4523232"/>
+            <a:ext cx="11277600" cy="518159"/>
           </a:xfrm>
           <a:prstGeom prst="rect">
             <a:avLst/>
@@ -16864,8 +16205,8 @@
         </p:nvSpPr>
         <p:spPr>
           <a:xfrm>
-            <a:off x="8158480" y="2154935"/>
-            <a:ext cx="3639304" cy="3605785"/>
+            <a:off x="457200" y="5132831"/>
+            <a:ext cx="11277600" cy="627889"/>
           </a:xfrm>
           <a:prstGeom prst="rect">
             <a:avLst/>
@@ -16901,25 +16242,25 @@
         </p:nvSpPr>
         <p:spPr>
           <a:xfrm>
-            <a:off x="10363200" y="6035040"/>
-            <a:ext cx="1371600" cy="365760"/>
-          </a:xfrm>
-          <a:prstGeom prst="rect">
-            <a:avLst/>
-          </a:prstGeom>
-          <a:noFill/>
-        </p:spPr>
-        <p:txBody>
-          <a:bodyPr wrap="none" lIns="0" rIns="0">
-            <a:noAutofit/>
-          </a:bodyPr>
-          <a:lstStyle/>
-          <a:p>
-            <a:pPr algn="l"/>
+            <a:off x="11186160" y="6035040"/>
+            <a:ext cx="548640" cy="365760"/>
+          </a:xfrm>
+          <a:prstGeom prst="rect">
+            <a:avLst/>
+          </a:prstGeom>
+          <a:noFill/>
+        </p:spPr>
+        <p:txBody>
+          <a:bodyPr wrap="none" lIns="0" rIns="0">
+            <a:noAutofit/>
+          </a:bodyPr>
+          <a:lstStyle/>
+          <a:p>
+            <a:pPr algn="r"/>
             <a:fld id="{4B0E1F8A-6C1D-4E2A-9F3B-7A5C8D2E1F60}" type="slidenum">
               <a:rPr sz="1600" b="0" i="0">
                 <a:solidFill>
-                  <a:srgbClr val="7C8794"/>
+                  <a:srgbClr val="1A1A24"/>
                 </a:solidFill>
                 <a:latin typeface="Arial"/>
               </a:rPr>
@@ -16980,7 +16321,7 @@
             <a:r>
               <a:rPr sz="4200" b="1" i="0">
                 <a:solidFill>
-                  <a:srgbClr val="1F3A5F"/>
+                  <a:srgbClr val="C1642B"/>
                 </a:solidFill>
                 <a:latin typeface="Arial"/>
               </a:rPr>
@@ -17015,7 +16356,7 @@
             <a:r>
               <a:rPr sz="3400" b="1" i="0">
                 <a:solidFill>
-                  <a:srgbClr val="1F3A5F"/>
+                  <a:srgbClr val="C1642B"/>
                 </a:solidFill>
                 <a:latin typeface="Arial"/>
               </a:rPr>
@@ -17032,14 +16373,14 @@
         </p:nvSpPr>
         <p:spPr>
           <a:xfrm>
-            <a:off x="548640" y="2176271"/>
-            <a:ext cx="1650492" cy="54864"/>
+            <a:off x="457200" y="2176271"/>
+            <a:ext cx="1271997" cy="54864"/>
           </a:xfrm>
           <a:prstGeom prst="rect">
             <a:avLst/>
           </a:prstGeom>
           <a:solidFill>
-            <a:srgbClr val="1F3A5F"/>
+            <a:srgbClr val="C1642B"/>
           </a:solidFill>
           <a:ln>
             <a:noFill/>
@@ -17094,7 +16435,7 @@
             <a:r>
               <a:rPr sz="3400" b="1" i="0">
                 <a:solidFill>
-                  <a:srgbClr val="7C8794"/>
+                  <a:srgbClr val="1A1A24"/>
                 </a:solidFill>
                 <a:latin typeface="Arial"/>
               </a:rPr>
@@ -17111,14 +16452,14 @@
         </p:nvSpPr>
         <p:spPr>
           <a:xfrm>
-            <a:off x="6324600" y="2176271"/>
-            <a:ext cx="1650492" cy="54864"/>
+            <a:off x="6233160" y="2176271"/>
+            <a:ext cx="2327672" cy="54864"/>
           </a:xfrm>
           <a:prstGeom prst="rect">
             <a:avLst/>
           </a:prstGeom>
           <a:solidFill>
-            <a:srgbClr val="7C8794"/>
+            <a:srgbClr val="1A1A24"/>
           </a:solidFill>
           <a:ln>
             <a:noFill/>
@@ -17367,25 +16708,25 @@
         </p:nvSpPr>
         <p:spPr>
           <a:xfrm>
-            <a:off x="10363200" y="6035040"/>
-            <a:ext cx="1371600" cy="365760"/>
-          </a:xfrm>
-          <a:prstGeom prst="rect">
-            <a:avLst/>
-          </a:prstGeom>
-          <a:noFill/>
-        </p:spPr>
-        <p:txBody>
-          <a:bodyPr wrap="none" lIns="0" rIns="0">
-            <a:noAutofit/>
-          </a:bodyPr>
-          <a:lstStyle/>
-          <a:p>
-            <a:pPr algn="l"/>
+            <a:off x="11186160" y="6035040"/>
+            <a:ext cx="548640" cy="365760"/>
+          </a:xfrm>
+          <a:prstGeom prst="rect">
+            <a:avLst/>
+          </a:prstGeom>
+          <a:noFill/>
+        </p:spPr>
+        <p:txBody>
+          <a:bodyPr wrap="none" lIns="0" rIns="0">
+            <a:noAutofit/>
+          </a:bodyPr>
+          <a:lstStyle/>
+          <a:p>
+            <a:pPr algn="r"/>
             <a:fld id="{4B0E1F8A-6C1D-4E2A-9F3B-7A5C8D2E1F60}" type="slidenum">
               <a:rPr sz="1600" b="0" i="0">
                 <a:solidFill>
-                  <a:srgbClr val="7C8794"/>
+                  <a:srgbClr val="1A1A24"/>
                 </a:solidFill>
                 <a:latin typeface="Arial"/>
               </a:rPr>
@@ -17525,7 +16866,7 @@
             <a:r>
               <a:rPr sz="3400" b="0" i="0">
                 <a:solidFill>
-                  <a:srgbClr val="7C8794"/>
+                  <a:srgbClr val="1A1A24"/>
                 </a:solidFill>
                 <a:latin typeface="Arial"/>
               </a:rPr>
@@ -17544,25 +16885,25 @@
         </p:nvSpPr>
         <p:spPr>
           <a:xfrm>
-            <a:off x="10363200" y="6035040"/>
-            <a:ext cx="1371600" cy="365760"/>
-          </a:xfrm>
-          <a:prstGeom prst="rect">
-            <a:avLst/>
-          </a:prstGeom>
-          <a:noFill/>
-        </p:spPr>
-        <p:txBody>
-          <a:bodyPr wrap="none" lIns="0" rIns="0">
-            <a:noAutofit/>
-          </a:bodyPr>
-          <a:lstStyle/>
-          <a:p>
-            <a:pPr algn="l"/>
+            <a:off x="11186160" y="6035040"/>
+            <a:ext cx="548640" cy="365760"/>
+          </a:xfrm>
+          <a:prstGeom prst="rect">
+            <a:avLst/>
+          </a:prstGeom>
+          <a:noFill/>
+        </p:spPr>
+        <p:txBody>
+          <a:bodyPr wrap="none" lIns="0" rIns="0">
+            <a:noAutofit/>
+          </a:bodyPr>
+          <a:lstStyle/>
+          <a:p>
+            <a:pPr algn="r"/>
             <a:fld id="{4B0E1F8A-6C1D-4E2A-9F3B-7A5C8D2E1F60}" type="slidenum">
               <a:rPr sz="1600" b="0" i="0">
                 <a:solidFill>
-                  <a:srgbClr val="7C8794"/>
+                  <a:srgbClr val="1A1A24"/>
                 </a:solidFill>
                 <a:latin typeface="Arial"/>
               </a:rPr>
@@ -17623,7 +16964,7 @@
             <a:r>
               <a:rPr sz="4200" b="1" i="0">
                 <a:solidFill>
-                  <a:srgbClr val="1F3A5F"/>
+                  <a:srgbClr val="C1642B"/>
                 </a:solidFill>
                 <a:latin typeface="Arial"/>
               </a:rPr>
@@ -17852,25 +17193,25 @@
         </p:nvSpPr>
         <p:spPr>
           <a:xfrm>
-            <a:off x="10363200" y="6035040"/>
-            <a:ext cx="1371600" cy="365760"/>
-          </a:xfrm>
-          <a:prstGeom prst="rect">
-            <a:avLst/>
-          </a:prstGeom>
-          <a:noFill/>
-        </p:spPr>
-        <p:txBody>
-          <a:bodyPr wrap="none" lIns="0" rIns="0">
-            <a:noAutofit/>
-          </a:bodyPr>
-          <a:lstStyle/>
-          <a:p>
-            <a:pPr algn="l"/>
+            <a:off x="11186160" y="6035040"/>
+            <a:ext cx="548640" cy="365760"/>
+          </a:xfrm>
+          <a:prstGeom prst="rect">
+            <a:avLst/>
+          </a:prstGeom>
+          <a:noFill/>
+        </p:spPr>
+        <p:txBody>
+          <a:bodyPr wrap="none" lIns="0" rIns="0">
+            <a:noAutofit/>
+          </a:bodyPr>
+          <a:lstStyle/>
+          <a:p>
+            <a:pPr algn="r"/>
             <a:fld id="{4B0E1F8A-6C1D-4E2A-9F3B-7A5C8D2E1F60}" type="slidenum">
               <a:rPr sz="1600" b="0" i="0">
                 <a:solidFill>
-                  <a:srgbClr val="7C8794"/>
+                  <a:srgbClr val="1A1A24"/>
                 </a:solidFill>
                 <a:latin typeface="Arial"/>
               </a:rPr>
@@ -17931,7 +17272,7 @@
             <a:r>
               <a:rPr sz="4200" b="1" i="0">
                 <a:solidFill>
-                  <a:srgbClr val="1F3A5F"/>
+                  <a:srgbClr val="C1642B"/>
                 </a:solidFill>
                 <a:latin typeface="Arial"/>
               </a:rPr>
@@ -17966,7 +17307,7 @@
             <a:r>
               <a:rPr sz="4200" b="1" i="0">
                 <a:solidFill>
-                  <a:srgbClr val="1F3A5F"/>
+                  <a:srgbClr val="C1642B"/>
                 </a:solidFill>
                 <a:latin typeface="Arial"/>
               </a:rPr>
@@ -17984,13 +17325,13 @@
         <p:spPr>
           <a:xfrm>
             <a:off x="457200" y="2194560"/>
-            <a:ext cx="784098" cy="54864"/>
+            <a:ext cx="593303" cy="54864"/>
           </a:xfrm>
           <a:prstGeom prst="rect">
             <a:avLst/>
           </a:prstGeom>
           <a:solidFill>
-            <a:srgbClr val="1F3A5F"/>
+            <a:srgbClr val="C1642B"/>
           </a:solidFill>
           <a:ln>
             <a:noFill/>
@@ -18045,7 +17386,7 @@
             <a:r>
               <a:rPr sz="3400" b="1" i="0">
                 <a:solidFill>
-                  <a:srgbClr val="1F3A5F"/>
+                  <a:srgbClr val="C1642B"/>
                 </a:solidFill>
                 <a:latin typeface="Arial"/>
               </a:rPr>
@@ -18115,7 +17456,7 @@
             <a:r>
               <a:rPr sz="4200" b="1" i="0">
                 <a:solidFill>
-                  <a:srgbClr val="1F3A5F"/>
+                  <a:srgbClr val="C1642B"/>
                 </a:solidFill>
                 <a:latin typeface="Arial"/>
               </a:rPr>
@@ -18133,13 +17474,13 @@
         <p:spPr>
           <a:xfrm>
             <a:off x="3345180" y="2194560"/>
-            <a:ext cx="784098" cy="54864"/>
+            <a:ext cx="593303" cy="54864"/>
           </a:xfrm>
           <a:prstGeom prst="rect">
             <a:avLst/>
           </a:prstGeom>
           <a:solidFill>
-            <a:srgbClr val="1F3A5F"/>
+            <a:srgbClr val="C1642B"/>
           </a:solidFill>
           <a:ln>
             <a:noFill/>
@@ -18194,7 +17535,7 @@
             <a:r>
               <a:rPr sz="3400" b="1" i="0">
                 <a:solidFill>
-                  <a:srgbClr val="1F3A5F"/>
+                  <a:srgbClr val="C1642B"/>
                 </a:solidFill>
                 <a:latin typeface="Arial"/>
               </a:rPr>
@@ -18264,7 +17605,7 @@
             <a:r>
               <a:rPr sz="4200" b="1" i="0">
                 <a:solidFill>
-                  <a:srgbClr val="1F3A5F"/>
+                  <a:srgbClr val="C1642B"/>
                 </a:solidFill>
                 <a:latin typeface="Arial"/>
               </a:rPr>
@@ -18282,13 +17623,13 @@
         <p:spPr>
           <a:xfrm>
             <a:off x="6233160" y="2194560"/>
-            <a:ext cx="784098" cy="54864"/>
+            <a:ext cx="593303" cy="54864"/>
           </a:xfrm>
           <a:prstGeom prst="rect">
             <a:avLst/>
           </a:prstGeom>
           <a:solidFill>
-            <a:srgbClr val="1F3A5F"/>
+            <a:srgbClr val="C1642B"/>
           </a:solidFill>
           <a:ln>
             <a:noFill/>
@@ -18343,7 +17684,7 @@
             <a:r>
               <a:rPr sz="3400" b="1" i="0">
                 <a:solidFill>
-                  <a:srgbClr val="1F3A5F"/>
+                  <a:srgbClr val="C1642B"/>
                 </a:solidFill>
                 <a:latin typeface="Arial"/>
               </a:rPr>
@@ -18413,7 +17754,7 @@
             <a:r>
               <a:rPr sz="4200" b="1" i="0">
                 <a:solidFill>
-                  <a:srgbClr val="1F3A5F"/>
+                  <a:srgbClr val="C1642B"/>
                 </a:solidFill>
                 <a:latin typeface="Arial"/>
               </a:rPr>
@@ -18431,13 +17772,13 @@
         <p:spPr>
           <a:xfrm>
             <a:off x="9121140" y="2194560"/>
-            <a:ext cx="784098" cy="54864"/>
+            <a:ext cx="593303" cy="54864"/>
           </a:xfrm>
           <a:prstGeom prst="rect">
             <a:avLst/>
           </a:prstGeom>
           <a:solidFill>
-            <a:srgbClr val="1F3A5F"/>
+            <a:srgbClr val="C1642B"/>
           </a:solidFill>
           <a:ln>
             <a:noFill/>
@@ -18492,7 +17833,7 @@
             <a:r>
               <a:rPr sz="3400" b="1" i="0">
                 <a:solidFill>
-                  <a:srgbClr val="1F3A5F"/>
+                  <a:srgbClr val="C1642B"/>
                 </a:solidFill>
                 <a:latin typeface="Arial"/>
               </a:rPr>
@@ -18546,25 +17887,25 @@
         </p:nvSpPr>
         <p:spPr>
           <a:xfrm>
-            <a:off x="10363200" y="6035040"/>
-            <a:ext cx="1371600" cy="365760"/>
-          </a:xfrm>
-          <a:prstGeom prst="rect">
-            <a:avLst/>
-          </a:prstGeom>
-          <a:noFill/>
-        </p:spPr>
-        <p:txBody>
-          <a:bodyPr wrap="none" lIns="0" rIns="0">
-            <a:noAutofit/>
-          </a:bodyPr>
-          <a:lstStyle/>
-          <a:p>
-            <a:pPr algn="l"/>
+            <a:off x="11186160" y="6035040"/>
+            <a:ext cx="548640" cy="365760"/>
+          </a:xfrm>
+          <a:prstGeom prst="rect">
+            <a:avLst/>
+          </a:prstGeom>
+          <a:noFill/>
+        </p:spPr>
+        <p:txBody>
+          <a:bodyPr wrap="none" lIns="0" rIns="0">
+            <a:noAutofit/>
+          </a:bodyPr>
+          <a:lstStyle/>
+          <a:p>
+            <a:pPr algn="r"/>
             <a:fld id="{4B0E1F8A-6C1D-4E2A-9F3B-7A5C8D2E1F60}" type="slidenum">
               <a:rPr sz="1600" b="0" i="0">
                 <a:solidFill>
-                  <a:srgbClr val="7C8794"/>
+                  <a:srgbClr val="1A1A24"/>
                 </a:solidFill>
                 <a:latin typeface="Arial"/>
               </a:rPr>
@@ -18625,7 +17966,7 @@
             <a:r>
               <a:rPr sz="4200" b="1" i="0">
                 <a:solidFill>
-                  <a:srgbClr val="1F3A5F"/>
+                  <a:srgbClr val="C1642B"/>
                 </a:solidFill>
                 <a:latin typeface="Arial"/>
               </a:rPr>
@@ -19064,25 +18405,25 @@
         </p:nvSpPr>
         <p:spPr>
           <a:xfrm>
-            <a:off x="10363200" y="6035040"/>
-            <a:ext cx="1371600" cy="365760"/>
-          </a:xfrm>
-          <a:prstGeom prst="rect">
-            <a:avLst/>
-          </a:prstGeom>
-          <a:noFill/>
-        </p:spPr>
-        <p:txBody>
-          <a:bodyPr wrap="none" lIns="0" rIns="0">
-            <a:noAutofit/>
-          </a:bodyPr>
-          <a:lstStyle/>
-          <a:p>
-            <a:pPr algn="l"/>
+            <a:off x="11186160" y="6035040"/>
+            <a:ext cx="548640" cy="365760"/>
+          </a:xfrm>
+          <a:prstGeom prst="rect">
+            <a:avLst/>
+          </a:prstGeom>
+          <a:noFill/>
+        </p:spPr>
+        <p:txBody>
+          <a:bodyPr wrap="none" lIns="0" rIns="0">
+            <a:noAutofit/>
+          </a:bodyPr>
+          <a:lstStyle/>
+          <a:p>
+            <a:pPr algn="r"/>
             <a:fld id="{4B0E1F8A-6C1D-4E2A-9F3B-7A5C8D2E1F60}" type="slidenum">
               <a:rPr sz="1600" b="0" i="0">
                 <a:solidFill>
-                  <a:srgbClr val="7C8794"/>
+                  <a:srgbClr val="1A1A24"/>
                 </a:solidFill>
                 <a:latin typeface="Arial"/>
               </a:rPr>
@@ -19143,7 +18484,7 @@
             <a:r>
               <a:rPr sz="4200" b="1" i="0">
                 <a:solidFill>
-                  <a:srgbClr val="1F3A5F"/>
+                  <a:srgbClr val="C1642B"/>
                 </a:solidFill>
                 <a:latin typeface="Arial"/>
               </a:rPr>
@@ -19178,7 +18519,7 @@
             <a:r>
               <a:rPr sz="3400" b="1" i="0">
                 <a:solidFill>
-                  <a:srgbClr val="1F3A5F"/>
+                  <a:srgbClr val="C1642B"/>
                 </a:solidFill>
                 <a:latin typeface="Arial"/>
               </a:rPr>
@@ -19213,7 +18554,7 @@
             <a:r>
               <a:rPr sz="3400" b="1" i="0">
                 <a:solidFill>
-                  <a:srgbClr val="1F3A5F"/>
+                  <a:srgbClr val="C1642B"/>
                 </a:solidFill>
                 <a:latin typeface="Arial"/>
               </a:rPr>
@@ -19556,25 +18897,25 @@
         </p:nvSpPr>
         <p:spPr>
           <a:xfrm>
-            <a:off x="10363200" y="6035040"/>
-            <a:ext cx="1371600" cy="365760"/>
-          </a:xfrm>
-          <a:prstGeom prst="rect">
-            <a:avLst/>
-          </a:prstGeom>
-          <a:noFill/>
-        </p:spPr>
-        <p:txBody>
-          <a:bodyPr wrap="none" lIns="0" rIns="0">
-            <a:noAutofit/>
-          </a:bodyPr>
-          <a:lstStyle/>
-          <a:p>
-            <a:pPr algn="l"/>
+            <a:off x="11186160" y="6035040"/>
+            <a:ext cx="548640" cy="365760"/>
+          </a:xfrm>
+          <a:prstGeom prst="rect">
+            <a:avLst/>
+          </a:prstGeom>
+          <a:noFill/>
+        </p:spPr>
+        <p:txBody>
+          <a:bodyPr wrap="none" lIns="0" rIns="0">
+            <a:noAutofit/>
+          </a:bodyPr>
+          <a:lstStyle/>
+          <a:p>
+            <a:pPr algn="r"/>
             <a:fld id="{4B0E1F8A-6C1D-4E2A-9F3B-7A5C8D2E1F60}" type="slidenum">
               <a:rPr sz="1600" b="0" i="0">
                 <a:solidFill>
-                  <a:srgbClr val="7C8794"/>
+                  <a:srgbClr val="1A1A24"/>
                 </a:solidFill>
                 <a:latin typeface="Arial"/>
               </a:rPr>
@@ -19635,7 +18976,7 @@
             <a:r>
               <a:rPr sz="4200" b="1" i="0">
                 <a:solidFill>
-                  <a:srgbClr val="1F3A5F"/>
+                  <a:srgbClr val="C1642B"/>
                 </a:solidFill>
                 <a:latin typeface="Arial"/>
               </a:rPr>
@@ -19670,7 +19011,7 @@
             <a:r>
               <a:rPr sz="3400" b="1" i="0">
                 <a:solidFill>
-                  <a:srgbClr val="1F3A5F"/>
+                  <a:srgbClr val="C1642B"/>
                 </a:solidFill>
                 <a:latin typeface="Arial"/>
               </a:rPr>
@@ -19705,7 +19046,7 @@
             <a:r>
               <a:rPr sz="3400" b="1" i="0">
                 <a:solidFill>
-                  <a:srgbClr val="1F3A5F"/>
+                  <a:srgbClr val="C1642B"/>
                 </a:solidFill>
                 <a:latin typeface="Arial"/>
               </a:rPr>
@@ -19934,25 +19275,25 @@
         </p:nvSpPr>
         <p:spPr>
           <a:xfrm>
-            <a:off x="10363200" y="6035040"/>
-            <a:ext cx="1371600" cy="365760"/>
-          </a:xfrm>
-          <a:prstGeom prst="rect">
-            <a:avLst/>
-          </a:prstGeom>
-          <a:noFill/>
-        </p:spPr>
-        <p:txBody>
-          <a:bodyPr wrap="none" lIns="0" rIns="0">
-            <a:noAutofit/>
-          </a:bodyPr>
-          <a:lstStyle/>
-          <a:p>
-            <a:pPr algn="l"/>
+            <a:off x="11186160" y="6035040"/>
+            <a:ext cx="548640" cy="365760"/>
+          </a:xfrm>
+          <a:prstGeom prst="rect">
+            <a:avLst/>
+          </a:prstGeom>
+          <a:noFill/>
+        </p:spPr>
+        <p:txBody>
+          <a:bodyPr wrap="none" lIns="0" rIns="0">
+            <a:noAutofit/>
+          </a:bodyPr>
+          <a:lstStyle/>
+          <a:p>
+            <a:pPr algn="r"/>
             <a:fld id="{4B0E1F8A-6C1D-4E2A-9F3B-7A5C8D2E1F60}" type="slidenum">
               <a:rPr sz="1600" b="0" i="0">
                 <a:solidFill>
-                  <a:srgbClr val="7C8794"/>
+                  <a:srgbClr val="1A1A24"/>
                 </a:solidFill>
                 <a:latin typeface="Arial"/>
               </a:rPr>
@@ -20013,7 +19354,7 @@
             <a:r>
               <a:rPr sz="4200" b="1" i="0">
                 <a:solidFill>
-                  <a:srgbClr val="1A1A24"/>
+                  <a:srgbClr val="C1642B"/>
                 </a:solidFill>
                 <a:latin typeface="Arial"/>
               </a:rPr>
@@ -20426,25 +19767,25 @@
         </p:nvSpPr>
         <p:spPr>
           <a:xfrm>
-            <a:off x="10363200" y="6035040"/>
-            <a:ext cx="1371600" cy="365760"/>
-          </a:xfrm>
-          <a:prstGeom prst="rect">
-            <a:avLst/>
-          </a:prstGeom>
-          <a:noFill/>
-        </p:spPr>
-        <p:txBody>
-          <a:bodyPr wrap="none" lIns="0" rIns="0">
-            <a:noAutofit/>
-          </a:bodyPr>
-          <a:lstStyle/>
-          <a:p>
-            <a:pPr algn="l"/>
+            <a:off x="11186160" y="6035040"/>
+            <a:ext cx="548640" cy="365760"/>
+          </a:xfrm>
+          <a:prstGeom prst="rect">
+            <a:avLst/>
+          </a:prstGeom>
+          <a:noFill/>
+        </p:spPr>
+        <p:txBody>
+          <a:bodyPr wrap="none" lIns="0" rIns="0">
+            <a:noAutofit/>
+          </a:bodyPr>
+          <a:lstStyle/>
+          <a:p>
+            <a:pPr algn="r"/>
             <a:fld id="{4B0E1F8A-6C1D-4E2A-9F3B-7A5C8D2E1F60}" type="slidenum">
               <a:rPr sz="1600" b="0" i="0">
                 <a:solidFill>
-                  <a:srgbClr val="7C8794"/>
+                  <a:srgbClr val="1A1A24"/>
                 </a:solidFill>
                 <a:latin typeface="Arial"/>
               </a:rPr>
@@ -20505,7 +19846,7 @@
             <a:r>
               <a:rPr sz="4200" b="1" i="0">
                 <a:solidFill>
-                  <a:srgbClr val="1F3A5F"/>
+                  <a:srgbClr val="C1642B"/>
                 </a:solidFill>
                 <a:latin typeface="Arial"/>
               </a:rPr>
@@ -20680,7 +20021,7 @@
             <a:r>
               <a:rPr sz="4200" b="1" i="0">
                 <a:solidFill>
-                  <a:srgbClr val="7C8794"/>
+                  <a:srgbClr val="1A1A24"/>
                 </a:solidFill>
                 <a:latin typeface="Arial"/>
               </a:rPr>
@@ -20699,25 +20040,25 @@
         </p:nvSpPr>
         <p:spPr>
           <a:xfrm>
-            <a:off x="10363200" y="6035040"/>
-            <a:ext cx="1371600" cy="365760"/>
-          </a:xfrm>
-          <a:prstGeom prst="rect">
-            <a:avLst/>
-          </a:prstGeom>
-          <a:noFill/>
-        </p:spPr>
-        <p:txBody>
-          <a:bodyPr wrap="none" lIns="0" rIns="0">
-            <a:noAutofit/>
-          </a:bodyPr>
-          <a:lstStyle/>
-          <a:p>
-            <a:pPr algn="l"/>
+            <a:off x="11186160" y="6035040"/>
+            <a:ext cx="548640" cy="365760"/>
+          </a:xfrm>
+          <a:prstGeom prst="rect">
+            <a:avLst/>
+          </a:prstGeom>
+          <a:noFill/>
+        </p:spPr>
+        <p:txBody>
+          <a:bodyPr wrap="none" lIns="0" rIns="0">
+            <a:noAutofit/>
+          </a:bodyPr>
+          <a:lstStyle/>
+          <a:p>
+            <a:pPr algn="r"/>
             <a:fld id="{4B0E1F8A-6C1D-4E2A-9F3B-7A5C8D2E1F60}" type="slidenum">
               <a:rPr sz="1600" b="0" i="0">
                 <a:solidFill>
-                  <a:srgbClr val="7C8794"/>
+                  <a:srgbClr val="1A1A24"/>
                 </a:solidFill>
                 <a:latin typeface="Arial"/>
               </a:rPr>
@@ -20778,7 +20119,7 @@
             <a:r>
               <a:rPr sz="4200" b="1" i="0">
                 <a:solidFill>
-                  <a:srgbClr val="1F3A5F"/>
+                  <a:srgbClr val="C1642B"/>
                 </a:solidFill>
                 <a:latin typeface="Arial"/>
               </a:rPr>
@@ -21244,25 +20585,25 @@
         </p:nvSpPr>
         <p:spPr>
           <a:xfrm>
-            <a:off x="10363200" y="6035040"/>
-            <a:ext cx="1371600" cy="365760"/>
-          </a:xfrm>
-          <a:prstGeom prst="rect">
-            <a:avLst/>
-          </a:prstGeom>
-          <a:noFill/>
-        </p:spPr>
-        <p:txBody>
-          <a:bodyPr wrap="none" lIns="0" rIns="0">
-            <a:noAutofit/>
-          </a:bodyPr>
-          <a:lstStyle/>
-          <a:p>
-            <a:pPr algn="l"/>
+            <a:off x="11186160" y="6035040"/>
+            <a:ext cx="548640" cy="365760"/>
+          </a:xfrm>
+          <a:prstGeom prst="rect">
+            <a:avLst/>
+          </a:prstGeom>
+          <a:noFill/>
+        </p:spPr>
+        <p:txBody>
+          <a:bodyPr wrap="none" lIns="0" rIns="0">
+            <a:noAutofit/>
+          </a:bodyPr>
+          <a:lstStyle/>
+          <a:p>
+            <a:pPr algn="r"/>
             <a:fld id="{4B0E1F8A-6C1D-4E2A-9F3B-7A5C8D2E1F60}" type="slidenum">
               <a:rPr sz="1600" b="0" i="0">
                 <a:solidFill>
-                  <a:srgbClr val="7C8794"/>
+                  <a:srgbClr val="1A1A24"/>
                 </a:solidFill>
                 <a:latin typeface="Arial"/>
               </a:rPr>
@@ -21323,7 +20664,7 @@
             <a:r>
               <a:rPr sz="4200" b="1" i="0">
                 <a:solidFill>
-                  <a:srgbClr val="1F3A5F"/>
+                  <a:srgbClr val="C1642B"/>
                 </a:solidFill>
                 <a:latin typeface="Arial"/>
               </a:rPr>
@@ -21798,25 +21139,25 @@
         </p:nvSpPr>
         <p:spPr>
           <a:xfrm>
-            <a:off x="10363200" y="6035040"/>
-            <a:ext cx="1371600" cy="365760"/>
-          </a:xfrm>
-          <a:prstGeom prst="rect">
-            <a:avLst/>
-          </a:prstGeom>
-          <a:noFill/>
-        </p:spPr>
-        <p:txBody>
-          <a:bodyPr wrap="none" lIns="0" rIns="0">
-            <a:noAutofit/>
-          </a:bodyPr>
-          <a:lstStyle/>
-          <a:p>
-            <a:pPr algn="l"/>
+            <a:off x="11186160" y="6035040"/>
+            <a:ext cx="548640" cy="365760"/>
+          </a:xfrm>
+          <a:prstGeom prst="rect">
+            <a:avLst/>
+          </a:prstGeom>
+          <a:noFill/>
+        </p:spPr>
+        <p:txBody>
+          <a:bodyPr wrap="none" lIns="0" rIns="0">
+            <a:noAutofit/>
+          </a:bodyPr>
+          <a:lstStyle/>
+          <a:p>
+            <a:pPr algn="r"/>
             <a:fld id="{4B0E1F8A-6C1D-4E2A-9F3B-7A5C8D2E1F60}" type="slidenum">
               <a:rPr sz="1600" b="0" i="0">
                 <a:solidFill>
-                  <a:srgbClr val="7C8794"/>
+                  <a:srgbClr val="1A1A24"/>
                 </a:solidFill>
                 <a:latin typeface="Arial"/>
               </a:rPr>
@@ -21877,7 +21218,7 @@
             <a:r>
               <a:rPr sz="4200" b="1" i="0">
                 <a:solidFill>
-                  <a:srgbClr val="1F3A5F"/>
+                  <a:srgbClr val="C1642B"/>
                 </a:solidFill>
                 <a:latin typeface="Arial"/>
               </a:rPr>
@@ -21991,7 +21332,7 @@
             <a:r>
               <a:rPr sz="2500" b="0" i="0">
                 <a:solidFill>
-                  <a:srgbClr val="7C8794"/>
+                  <a:srgbClr val="1A1A24"/>
                 </a:solidFill>
                 <a:latin typeface="Arial"/>
               </a:rPr>
@@ -22105,7 +21446,7 @@
             <a:r>
               <a:rPr sz="2500" b="0" i="0">
                 <a:solidFill>
-                  <a:srgbClr val="7C8794"/>
+                  <a:srgbClr val="1A1A24"/>
                 </a:solidFill>
                 <a:latin typeface="Arial"/>
               </a:rPr>
@@ -22203,25 +21544,25 @@
         </p:nvSpPr>
         <p:spPr>
           <a:xfrm>
-            <a:off x="10363200" y="6035040"/>
-            <a:ext cx="1371600" cy="365760"/>
-          </a:xfrm>
-          <a:prstGeom prst="rect">
-            <a:avLst/>
-          </a:prstGeom>
-          <a:noFill/>
-        </p:spPr>
-        <p:txBody>
-          <a:bodyPr wrap="none" lIns="0" rIns="0">
-            <a:noAutofit/>
-          </a:bodyPr>
-          <a:lstStyle/>
-          <a:p>
-            <a:pPr algn="l"/>
+            <a:off x="11186160" y="6035040"/>
+            <a:ext cx="548640" cy="365760"/>
+          </a:xfrm>
+          <a:prstGeom prst="rect">
+            <a:avLst/>
+          </a:prstGeom>
+          <a:noFill/>
+        </p:spPr>
+        <p:txBody>
+          <a:bodyPr wrap="none" lIns="0" rIns="0">
+            <a:noAutofit/>
+          </a:bodyPr>
+          <a:lstStyle/>
+          <a:p>
+            <a:pPr algn="r"/>
             <a:fld id="{4B0E1F8A-6C1D-4E2A-9F3B-7A5C8D2E1F60}" type="slidenum">
               <a:rPr sz="1600" b="0" i="0">
                 <a:solidFill>
-                  <a:srgbClr val="7C8794"/>
+                  <a:srgbClr val="1A1A24"/>
                 </a:solidFill>
                 <a:latin typeface="Arial"/>
               </a:rPr>
@@ -22282,7 +21623,7 @@
             <a:r>
               <a:rPr sz="4200" b="1" i="0">
                 <a:solidFill>
-                  <a:srgbClr val="1F3A5F"/>
+                  <a:srgbClr val="C1642B"/>
                 </a:solidFill>
                 <a:latin typeface="Arial"/>
               </a:rPr>
@@ -22306,7 +21647,7 @@
             <a:avLst/>
           </a:prstGeom>
           <a:solidFill>
-            <a:srgbClr val="1F3A5F"/>
+            <a:srgbClr val="C1642B"/>
           </a:solidFill>
           <a:ln>
             <a:noFill/>
@@ -22464,7 +21805,7 @@
             <a:avLst/>
           </a:prstGeom>
           <a:solidFill>
-            <a:srgbClr val="1F3A5F"/>
+            <a:srgbClr val="C1642B"/>
           </a:solidFill>
           <a:ln>
             <a:noFill/>
@@ -22617,25 +21958,25 @@
         </p:nvSpPr>
         <p:spPr>
           <a:xfrm>
-            <a:off x="10363200" y="6035040"/>
-            <a:ext cx="1371600" cy="365760"/>
-          </a:xfrm>
-          <a:prstGeom prst="rect">
-            <a:avLst/>
-          </a:prstGeom>
-          <a:noFill/>
-        </p:spPr>
-        <p:txBody>
-          <a:bodyPr wrap="none" lIns="0" rIns="0">
-            <a:noAutofit/>
-          </a:bodyPr>
-          <a:lstStyle/>
-          <a:p>
-            <a:pPr algn="l"/>
+            <a:off x="11186160" y="6035040"/>
+            <a:ext cx="548640" cy="365760"/>
+          </a:xfrm>
+          <a:prstGeom prst="rect">
+            <a:avLst/>
+          </a:prstGeom>
+          <a:noFill/>
+        </p:spPr>
+        <p:txBody>
+          <a:bodyPr wrap="none" lIns="0" rIns="0">
+            <a:noAutofit/>
+          </a:bodyPr>
+          <a:lstStyle/>
+          <a:p>
+            <a:pPr algn="r"/>
             <a:fld id="{4B0E1F8A-6C1D-4E2A-9F3B-7A5C8D2E1F60}" type="slidenum">
               <a:rPr sz="1600" b="0" i="0">
                 <a:solidFill>
-                  <a:srgbClr val="7C8794"/>
+                  <a:srgbClr val="1A1A24"/>
                 </a:solidFill>
                 <a:latin typeface="Arial"/>
               </a:rPr>
@@ -22696,7 +22037,7 @@
             <a:r>
               <a:rPr sz="4200" b="1" i="0">
                 <a:solidFill>
-                  <a:srgbClr val="1F3A5F"/>
+                  <a:srgbClr val="C1642B"/>
                 </a:solidFill>
                 <a:latin typeface="Arial"/>
               </a:rPr>
@@ -23031,25 +22372,25 @@
         </p:nvSpPr>
         <p:spPr>
           <a:xfrm>
-            <a:off x="10363200" y="6035040"/>
-            <a:ext cx="1371600" cy="365760"/>
-          </a:xfrm>
-          <a:prstGeom prst="rect">
-            <a:avLst/>
-          </a:prstGeom>
-          <a:noFill/>
-        </p:spPr>
-        <p:txBody>
-          <a:bodyPr wrap="none" lIns="0" rIns="0">
-            <a:noAutofit/>
-          </a:bodyPr>
-          <a:lstStyle/>
-          <a:p>
-            <a:pPr algn="l"/>
+            <a:off x="11186160" y="6035040"/>
+            <a:ext cx="548640" cy="365760"/>
+          </a:xfrm>
+          <a:prstGeom prst="rect">
+            <a:avLst/>
+          </a:prstGeom>
+          <a:noFill/>
+        </p:spPr>
+        <p:txBody>
+          <a:bodyPr wrap="none" lIns="0" rIns="0">
+            <a:noAutofit/>
+          </a:bodyPr>
+          <a:lstStyle/>
+          <a:p>
+            <a:pPr algn="r"/>
             <a:fld id="{4B0E1F8A-6C1D-4E2A-9F3B-7A5C8D2E1F60}" type="slidenum">
               <a:rPr sz="1600" b="0" i="0">
                 <a:solidFill>
-                  <a:srgbClr val="7C8794"/>
+                  <a:srgbClr val="1A1A24"/>
                 </a:solidFill>
                 <a:latin typeface="Arial"/>
               </a:rPr>
@@ -23110,7 +22451,7 @@
             <a:r>
               <a:rPr sz="4200" b="1" i="0">
                 <a:solidFill>
-                  <a:srgbClr val="1F3A5F"/>
+                  <a:srgbClr val="C1642B"/>
                 </a:solidFill>
                 <a:latin typeface="Arial"/>
               </a:rPr>
@@ -23134,7 +22475,7 @@
             <a:avLst/>
           </a:prstGeom>
           <a:solidFill>
-            <a:srgbClr val="7C8794"/>
+            <a:srgbClr val="1A1A24"/>
           </a:solidFill>
           <a:ln>
             <a:noFill/>
@@ -23222,7 +22563,7 @@
             <a:avLst/>
           </a:prstGeom>
           <a:solidFill>
-            <a:srgbClr val="1F3A5F"/>
+            <a:srgbClr val="1A1A24"/>
           </a:solidFill>
           <a:ln>
             <a:noFill/>
@@ -23471,25 +22812,25 @@
         </p:nvSpPr>
         <p:spPr>
           <a:xfrm>
-            <a:off x="10363200" y="6035040"/>
-            <a:ext cx="1371600" cy="365760"/>
-          </a:xfrm>
-          <a:prstGeom prst="rect">
-            <a:avLst/>
-          </a:prstGeom>
-          <a:noFill/>
-        </p:spPr>
-        <p:txBody>
-          <a:bodyPr wrap="none" lIns="0" rIns="0">
-            <a:noAutofit/>
-          </a:bodyPr>
-          <a:lstStyle/>
-          <a:p>
-            <a:pPr algn="l"/>
+            <a:off x="11186160" y="6035040"/>
+            <a:ext cx="548640" cy="365760"/>
+          </a:xfrm>
+          <a:prstGeom prst="rect">
+            <a:avLst/>
+          </a:prstGeom>
+          <a:noFill/>
+        </p:spPr>
+        <p:txBody>
+          <a:bodyPr wrap="none" lIns="0" rIns="0">
+            <a:noAutofit/>
+          </a:bodyPr>
+          <a:lstStyle/>
+          <a:p>
+            <a:pPr algn="r"/>
             <a:fld id="{4B0E1F8A-6C1D-4E2A-9F3B-7A5C8D2E1F60}" type="slidenum">
               <a:rPr sz="1600" b="0" i="0">
                 <a:solidFill>
-                  <a:srgbClr val="7C8794"/>
+                  <a:srgbClr val="1A1A24"/>
                 </a:solidFill>
                 <a:latin typeface="Arial"/>
               </a:rPr>
@@ -23550,7 +22891,7 @@
             <a:r>
               <a:rPr sz="4200" b="1" i="0">
                 <a:solidFill>
-                  <a:srgbClr val="1F3A5F"/>
+                  <a:srgbClr val="C1642B"/>
                 </a:solidFill>
                 <a:latin typeface="Arial"/>
               </a:rPr>
@@ -24016,25 +23357,25 @@
         </p:nvSpPr>
         <p:spPr>
           <a:xfrm>
-            <a:off x="10363200" y="6035040"/>
-            <a:ext cx="1371600" cy="365760"/>
-          </a:xfrm>
-          <a:prstGeom prst="rect">
-            <a:avLst/>
-          </a:prstGeom>
-          <a:noFill/>
-        </p:spPr>
-        <p:txBody>
-          <a:bodyPr wrap="none" lIns="0" rIns="0">
-            <a:noAutofit/>
-          </a:bodyPr>
-          <a:lstStyle/>
-          <a:p>
-            <a:pPr algn="l"/>
+            <a:off x="11186160" y="6035040"/>
+            <a:ext cx="548640" cy="365760"/>
+          </a:xfrm>
+          <a:prstGeom prst="rect">
+            <a:avLst/>
+          </a:prstGeom>
+          <a:noFill/>
+        </p:spPr>
+        <p:txBody>
+          <a:bodyPr wrap="none" lIns="0" rIns="0">
+            <a:noAutofit/>
+          </a:bodyPr>
+          <a:lstStyle/>
+          <a:p>
+            <a:pPr algn="r"/>
             <a:fld id="{4B0E1F8A-6C1D-4E2A-9F3B-7A5C8D2E1F60}" type="slidenum">
               <a:rPr sz="1600" b="0" i="0">
                 <a:solidFill>
-                  <a:srgbClr val="7C8794"/>
+                  <a:srgbClr val="1A1A24"/>
                 </a:solidFill>
                 <a:latin typeface="Arial"/>
               </a:rPr>
@@ -24095,7 +23436,7 @@
             <a:r>
               <a:rPr sz="4200" b="1" i="0">
                 <a:solidFill>
-                  <a:srgbClr val="1F3A5F"/>
+                  <a:srgbClr val="C1642B"/>
                 </a:solidFill>
                 <a:latin typeface="Arial"/>
               </a:rPr>
@@ -24148,7 +23489,7 @@
         <p:spPr>
           <a:xfrm>
             <a:off x="457200" y="2176271"/>
-            <a:ext cx="1650492" cy="54864"/>
+            <a:ext cx="2015207" cy="54864"/>
           </a:xfrm>
           <a:prstGeom prst="rect">
             <a:avLst/>
@@ -24244,7 +23585,7 @@
             <a:r>
               <a:rPr sz="3400" b="1" i="0">
                 <a:solidFill>
-                  <a:srgbClr val="7C8794"/>
+                  <a:srgbClr val="1A1A24"/>
                 </a:solidFill>
                 <a:latin typeface="Arial"/>
               </a:rPr>
@@ -24262,13 +23603,13 @@
         <p:spPr>
           <a:xfrm>
             <a:off x="6233160" y="2176271"/>
-            <a:ext cx="1650492" cy="54864"/>
+            <a:ext cx="2584686" cy="54864"/>
           </a:xfrm>
           <a:prstGeom prst="rect">
             <a:avLst/>
           </a:prstGeom>
           <a:solidFill>
-            <a:srgbClr val="7C8794"/>
+            <a:srgbClr val="1A1A24"/>
           </a:solidFill>
           <a:ln>
             <a:noFill/>
@@ -24376,7 +23717,7 @@
         <p:spPr>
           <a:xfrm>
             <a:off x="457200" y="4443983"/>
-            <a:ext cx="1650492" cy="54864"/>
+            <a:ext cx="2830525" cy="54864"/>
           </a:xfrm>
           <a:prstGeom prst="rect">
             <a:avLst/>
@@ -24472,7 +23813,7 @@
             <a:r>
               <a:rPr sz="3400" b="1" i="0">
                 <a:solidFill>
-                  <a:srgbClr val="7C8794"/>
+                  <a:srgbClr val="1A1A24"/>
                 </a:solidFill>
                 <a:latin typeface="Arial"/>
               </a:rPr>
@@ -24490,13 +23831,13 @@
         <p:spPr>
           <a:xfrm>
             <a:off x="6233160" y="4443983"/>
-            <a:ext cx="1650492" cy="54864"/>
+            <a:ext cx="1559793" cy="54864"/>
           </a:xfrm>
           <a:prstGeom prst="rect">
             <a:avLst/>
           </a:prstGeom>
           <a:solidFill>
-            <a:srgbClr val="7C8794"/>
+            <a:srgbClr val="1A1A24"/>
           </a:solidFill>
           <a:ln>
             <a:noFill/>
@@ -24570,25 +23911,25 @@
         </p:nvSpPr>
         <p:spPr>
           <a:xfrm>
-            <a:off x="10363200" y="6035040"/>
-            <a:ext cx="1371600" cy="365760"/>
-          </a:xfrm>
-          <a:prstGeom prst="rect">
-            <a:avLst/>
-          </a:prstGeom>
-          <a:noFill/>
-        </p:spPr>
-        <p:txBody>
-          <a:bodyPr wrap="none" lIns="0" rIns="0">
-            <a:noAutofit/>
-          </a:bodyPr>
-          <a:lstStyle/>
-          <a:p>
-            <a:pPr algn="l"/>
+            <a:off x="11186160" y="6035040"/>
+            <a:ext cx="548640" cy="365760"/>
+          </a:xfrm>
+          <a:prstGeom prst="rect">
+            <a:avLst/>
+          </a:prstGeom>
+          <a:noFill/>
+        </p:spPr>
+        <p:txBody>
+          <a:bodyPr wrap="none" lIns="0" rIns="0">
+            <a:noAutofit/>
+          </a:bodyPr>
+          <a:lstStyle/>
+          <a:p>
+            <a:pPr algn="r"/>
             <a:fld id="{4B0E1F8A-6C1D-4E2A-9F3B-7A5C8D2E1F60}" type="slidenum">
               <a:rPr sz="1600" b="0" i="0">
                 <a:solidFill>
-                  <a:srgbClr val="7C8794"/>
+                  <a:srgbClr val="1A1A24"/>
                 </a:solidFill>
                 <a:latin typeface="Arial"/>
               </a:rPr>
@@ -24649,7 +23990,7 @@
             <a:r>
               <a:rPr sz="4200" b="1" i="0">
                 <a:solidFill>
-                  <a:srgbClr val="1F3A5F"/>
+                  <a:srgbClr val="C1642B"/>
                 </a:solidFill>
                 <a:latin typeface="Arial"/>
               </a:rPr>
@@ -25325,25 +24666,25 @@
         </p:nvSpPr>
         <p:spPr>
           <a:xfrm>
-            <a:off x="10363200" y="6035040"/>
-            <a:ext cx="1371600" cy="365760"/>
-          </a:xfrm>
-          <a:prstGeom prst="rect">
-            <a:avLst/>
-          </a:prstGeom>
-          <a:noFill/>
-        </p:spPr>
-        <p:txBody>
-          <a:bodyPr wrap="none" lIns="0" rIns="0">
-            <a:noAutofit/>
-          </a:bodyPr>
-          <a:lstStyle/>
-          <a:p>
-            <a:pPr algn="l"/>
+            <a:off x="11186160" y="6035040"/>
+            <a:ext cx="548640" cy="365760"/>
+          </a:xfrm>
+          <a:prstGeom prst="rect">
+            <a:avLst/>
+          </a:prstGeom>
+          <a:noFill/>
+        </p:spPr>
+        <p:txBody>
+          <a:bodyPr wrap="none" lIns="0" rIns="0">
+            <a:noAutofit/>
+          </a:bodyPr>
+          <a:lstStyle/>
+          <a:p>
+            <a:pPr algn="r"/>
             <a:fld id="{4B0E1F8A-6C1D-4E2A-9F3B-7A5C8D2E1F60}" type="slidenum">
               <a:rPr sz="1600" b="0" i="0">
                 <a:solidFill>
-                  <a:srgbClr val="7C8794"/>
+                  <a:srgbClr val="1A1A24"/>
                 </a:solidFill>
                 <a:latin typeface="Arial"/>
               </a:rPr>
@@ -25467,25 +24808,25 @@
         </p:nvSpPr>
         <p:spPr>
           <a:xfrm>
-            <a:off x="10363200" y="6035040"/>
-            <a:ext cx="1371600" cy="365760"/>
-          </a:xfrm>
-          <a:prstGeom prst="rect">
-            <a:avLst/>
-          </a:prstGeom>
-          <a:noFill/>
-        </p:spPr>
-        <p:txBody>
-          <a:bodyPr wrap="none" lIns="0" rIns="0">
-            <a:noAutofit/>
-          </a:bodyPr>
-          <a:lstStyle/>
-          <a:p>
-            <a:pPr algn="l"/>
+            <a:off x="11186160" y="6035040"/>
+            <a:ext cx="548640" cy="365760"/>
+          </a:xfrm>
+          <a:prstGeom prst="rect">
+            <a:avLst/>
+          </a:prstGeom>
+          <a:noFill/>
+        </p:spPr>
+        <p:txBody>
+          <a:bodyPr wrap="none" lIns="0" rIns="0">
+            <a:noAutofit/>
+          </a:bodyPr>
+          <a:lstStyle/>
+          <a:p>
+            <a:pPr algn="r"/>
             <a:fld id="{4B0E1F8A-6C1D-4E2A-9F3B-7A5C8D2E1F60}" type="slidenum">
               <a:rPr sz="1600" b="0" i="0">
                 <a:solidFill>
-                  <a:srgbClr val="7C8794"/>
+                  <a:srgbClr val="1A1A24"/>
                 </a:solidFill>
                 <a:latin typeface="Arial"/>
               </a:rPr>
@@ -25546,7 +24887,7 @@
             <a:r>
               <a:rPr sz="4200" b="1" i="0">
                 <a:solidFill>
-                  <a:srgbClr val="1F3A5F"/>
+                  <a:srgbClr val="C1642B"/>
                 </a:solidFill>
                 <a:latin typeface="Arial"/>
               </a:rPr>
@@ -25635,25 +24976,25 @@
         </p:nvSpPr>
         <p:spPr>
           <a:xfrm>
-            <a:off x="10363200" y="6035040"/>
-            <a:ext cx="1371600" cy="365760"/>
-          </a:xfrm>
-          <a:prstGeom prst="rect">
-            <a:avLst/>
-          </a:prstGeom>
-          <a:noFill/>
-        </p:spPr>
-        <p:txBody>
-          <a:bodyPr wrap="none" lIns="0" rIns="0">
-            <a:noAutofit/>
-          </a:bodyPr>
-          <a:lstStyle/>
-          <a:p>
-            <a:pPr algn="l"/>
+            <a:off x="11186160" y="6035040"/>
+            <a:ext cx="548640" cy="365760"/>
+          </a:xfrm>
+          <a:prstGeom prst="rect">
+            <a:avLst/>
+          </a:prstGeom>
+          <a:noFill/>
+        </p:spPr>
+        <p:txBody>
+          <a:bodyPr wrap="none" lIns="0" rIns="0">
+            <a:noAutofit/>
+          </a:bodyPr>
+          <a:lstStyle/>
+          <a:p>
+            <a:pPr algn="r"/>
             <a:fld id="{4B0E1F8A-6C1D-4E2A-9F3B-7A5C8D2E1F60}" type="slidenum">
               <a:rPr sz="1600" b="0" i="0">
                 <a:solidFill>
-                  <a:srgbClr val="7C8794"/>
+                  <a:srgbClr val="1A1A24"/>
                 </a:solidFill>
                 <a:latin typeface="Arial"/>
               </a:rPr>
@@ -25812,25 +25153,25 @@
         </p:nvSpPr>
         <p:spPr>
           <a:xfrm>
-            <a:off x="10363200" y="6035040"/>
-            <a:ext cx="1371600" cy="365760"/>
-          </a:xfrm>
-          <a:prstGeom prst="rect">
-            <a:avLst/>
-          </a:prstGeom>
-          <a:noFill/>
-        </p:spPr>
-        <p:txBody>
-          <a:bodyPr wrap="none" lIns="0" rIns="0">
-            <a:noAutofit/>
-          </a:bodyPr>
-          <a:lstStyle/>
-          <a:p>
-            <a:pPr algn="l"/>
+            <a:off x="11186160" y="6035040"/>
+            <a:ext cx="548640" cy="365760"/>
+          </a:xfrm>
+          <a:prstGeom prst="rect">
+            <a:avLst/>
+          </a:prstGeom>
+          <a:noFill/>
+        </p:spPr>
+        <p:txBody>
+          <a:bodyPr wrap="none" lIns="0" rIns="0">
+            <a:noAutofit/>
+          </a:bodyPr>
+          <a:lstStyle/>
+          <a:p>
+            <a:pPr algn="r"/>
             <a:fld id="{4B0E1F8A-6C1D-4E2A-9F3B-7A5C8D2E1F60}" type="slidenum">
               <a:rPr sz="1600" b="0" i="0">
                 <a:solidFill>
-                  <a:srgbClr val="7C8794"/>
+                  <a:srgbClr val="1A1A24"/>
                 </a:solidFill>
                 <a:latin typeface="Arial"/>
               </a:rPr>
@@ -26005,7 +25346,7 @@
             <a:r>
               <a:rPr sz="3400" b="0" i="0">
                 <a:solidFill>
-                  <a:srgbClr val="7C8794"/>
+                  <a:srgbClr val="1A1A24"/>
                 </a:solidFill>
                 <a:latin typeface="Arial"/>
               </a:rPr>
@@ -26024,25 +25365,25 @@
         </p:nvSpPr>
         <p:spPr>
           <a:xfrm>
-            <a:off x="10363200" y="6035040"/>
-            <a:ext cx="1371600" cy="365760"/>
-          </a:xfrm>
-          <a:prstGeom prst="rect">
-            <a:avLst/>
-          </a:prstGeom>
-          <a:noFill/>
-        </p:spPr>
-        <p:txBody>
-          <a:bodyPr wrap="none" lIns="0" rIns="0">
-            <a:noAutofit/>
-          </a:bodyPr>
-          <a:lstStyle/>
-          <a:p>
-            <a:pPr algn="l"/>
+            <a:off x="11186160" y="6035040"/>
+            <a:ext cx="548640" cy="365760"/>
+          </a:xfrm>
+          <a:prstGeom prst="rect">
+            <a:avLst/>
+          </a:prstGeom>
+          <a:noFill/>
+        </p:spPr>
+        <p:txBody>
+          <a:bodyPr wrap="none" lIns="0" rIns="0">
+            <a:noAutofit/>
+          </a:bodyPr>
+          <a:lstStyle/>
+          <a:p>
+            <a:pPr algn="r"/>
             <a:fld id="{4B0E1F8A-6C1D-4E2A-9F3B-7A5C8D2E1F60}" type="slidenum">
               <a:rPr sz="1600" b="0" i="0">
                 <a:solidFill>
-                  <a:srgbClr val="7C8794"/>
+                  <a:srgbClr val="1A1A24"/>
                 </a:solidFill>
                 <a:latin typeface="Arial"/>
               </a:rPr>
@@ -26182,7 +25523,7 @@
             <a:r>
               <a:rPr sz="4200" b="1" i="0">
                 <a:solidFill>
-                  <a:srgbClr val="1A1A24"/>
+                  <a:srgbClr val="C1642B"/>
                 </a:solidFill>
                 <a:latin typeface="Arial"/>
               </a:rPr>
@@ -26201,25 +25542,25 @@
         </p:nvSpPr>
         <p:spPr>
           <a:xfrm>
-            <a:off x="10363200" y="6035040"/>
-            <a:ext cx="1371600" cy="365760"/>
-          </a:xfrm>
-          <a:prstGeom prst="rect">
-            <a:avLst/>
-          </a:prstGeom>
-          <a:noFill/>
-        </p:spPr>
-        <p:txBody>
-          <a:bodyPr wrap="none" lIns="0" rIns="0">
-            <a:noAutofit/>
-          </a:bodyPr>
-          <a:lstStyle/>
-          <a:p>
-            <a:pPr algn="l"/>
+            <a:off x="11186160" y="6035040"/>
+            <a:ext cx="548640" cy="365760"/>
+          </a:xfrm>
+          <a:prstGeom prst="rect">
+            <a:avLst/>
+          </a:prstGeom>
+          <a:noFill/>
+        </p:spPr>
+        <p:txBody>
+          <a:bodyPr wrap="none" lIns="0" rIns="0">
+            <a:noAutofit/>
+          </a:bodyPr>
+          <a:lstStyle/>
+          <a:p>
+            <a:pPr algn="r"/>
             <a:fld id="{4B0E1F8A-6C1D-4E2A-9F3B-7A5C8D2E1F60}" type="slidenum">
               <a:rPr sz="1600" b="0" i="0">
                 <a:solidFill>
-                  <a:srgbClr val="7C8794"/>
+                  <a:srgbClr val="1A1A24"/>
                 </a:solidFill>
                 <a:latin typeface="Arial"/>
               </a:rPr>
@@ -26280,7 +25621,7 @@
             <a:r>
               <a:rPr sz="4200" b="1" i="0">
                 <a:solidFill>
-                  <a:srgbClr val="1F3A5F"/>
+                  <a:srgbClr val="C1642B"/>
                 </a:solidFill>
                 <a:latin typeface="Arial"/>
               </a:rPr>
@@ -26306,7 +25647,7 @@
             </a:avLst>
           </a:prstGeom>
           <a:solidFill>
-            <a:srgbClr val="0C1A1C"/>
+            <a:srgbClr val="1A1A24"/>
           </a:solidFill>
           <a:ln>
             <a:noFill/>
@@ -26361,7 +25702,7 @@
             <a:r>
               <a:rPr sz="3200" b="1" i="0">
                 <a:solidFill>
-                  <a:srgbClr val="569CD6"/>
+                  <a:srgbClr val="C1642B"/>
                 </a:solidFill>
                 <a:latin typeface="Courier New"/>
               </a:rPr>
@@ -26396,7 +25737,7 @@
             <a:r>
               <a:rPr sz="3200" b="0" i="0">
                 <a:solidFill>
-                  <a:srgbClr val="55707A"/>
+                  <a:srgbClr val="C1642B"/>
                 </a:solidFill>
                 <a:latin typeface="Courier New"/>
               </a:rPr>
@@ -26431,7 +25772,7 @@
             <a:r>
               <a:rPr sz="3200" b="0" i="0">
                 <a:solidFill>
-                  <a:srgbClr val="D4D4D4"/>
+                  <a:srgbClr val="FFFFFF"/>
                 </a:solidFill>
                 <a:latin typeface="Courier New"/>
               </a:rPr>
@@ -26466,7 +25807,7 @@
             <a:r>
               <a:rPr sz="3200" b="0" i="0">
                 <a:solidFill>
-                  <a:srgbClr val="55707A"/>
+                  <a:srgbClr val="C1642B"/>
                 </a:solidFill>
                 <a:latin typeface="Courier New"/>
               </a:rPr>
@@ -26501,7 +25842,7 @@
             <a:r>
               <a:rPr sz="3200" b="1" i="0">
                 <a:solidFill>
-                  <a:srgbClr val="569CD6"/>
+                  <a:srgbClr val="C1642B"/>
                 </a:solidFill>
                 <a:latin typeface="Courier New"/>
               </a:rPr>
@@ -26536,7 +25877,7 @@
             <a:r>
               <a:rPr sz="3200" b="0" i="0">
                 <a:solidFill>
-                  <a:srgbClr val="55707A"/>
+                  <a:srgbClr val="C1642B"/>
                 </a:solidFill>
                 <a:latin typeface="Courier New"/>
               </a:rPr>
@@ -26571,7 +25912,7 @@
             <a:r>
               <a:rPr sz="3200" b="1" i="0">
                 <a:solidFill>
-                  <a:srgbClr val="569CD6"/>
+                  <a:srgbClr val="C1642B"/>
                 </a:solidFill>
                 <a:latin typeface="Courier New"/>
               </a:rPr>
@@ -26606,7 +25947,7 @@
             <a:r>
               <a:rPr sz="3200" b="0" i="0">
                 <a:solidFill>
-                  <a:srgbClr val="55707A"/>
+                  <a:srgbClr val="C1642B"/>
                 </a:solidFill>
                 <a:latin typeface="Courier New"/>
               </a:rPr>
@@ -26641,7 +25982,7 @@
             <a:r>
               <a:rPr sz="3200" b="1" i="0">
                 <a:solidFill>
-                  <a:srgbClr val="569CD6"/>
+                  <a:srgbClr val="C1642B"/>
                 </a:solidFill>
                 <a:latin typeface="Courier New"/>
               </a:rPr>
@@ -26676,7 +26017,7 @@
             <a:r>
               <a:rPr sz="3200" b="0" i="0">
                 <a:solidFill>
-                  <a:srgbClr val="55707A"/>
+                  <a:srgbClr val="C1642B"/>
                 </a:solidFill>
                 <a:latin typeface="Courier New"/>
               </a:rPr>
@@ -26711,7 +26052,7 @@
             <a:r>
               <a:rPr sz="3200" b="1" i="0">
                 <a:solidFill>
-                  <a:srgbClr val="569CD6"/>
+                  <a:srgbClr val="C1642B"/>
                 </a:solidFill>
                 <a:latin typeface="Courier New"/>
               </a:rPr>
@@ -26746,7 +26087,7 @@
             <a:r>
               <a:rPr sz="3200" b="0" i="0">
                 <a:solidFill>
-                  <a:srgbClr val="55707A"/>
+                  <a:srgbClr val="C1642B"/>
                 </a:solidFill>
                 <a:latin typeface="Courier New"/>
               </a:rPr>
@@ -26781,7 +26122,7 @@
             <a:r>
               <a:rPr sz="3200" b="1" i="0">
                 <a:solidFill>
-                  <a:srgbClr val="569CD6"/>
+                  <a:srgbClr val="C1642B"/>
                 </a:solidFill>
                 <a:latin typeface="Courier New"/>
               </a:rPr>
@@ -26800,25 +26141,25 @@
         </p:nvSpPr>
         <p:spPr>
           <a:xfrm>
-            <a:off x="10363200" y="6035040"/>
-            <a:ext cx="1371600" cy="365760"/>
-          </a:xfrm>
-          <a:prstGeom prst="rect">
-            <a:avLst/>
-          </a:prstGeom>
-          <a:noFill/>
-        </p:spPr>
-        <p:txBody>
-          <a:bodyPr wrap="none" lIns="0" rIns="0">
-            <a:noAutofit/>
-          </a:bodyPr>
-          <a:lstStyle/>
-          <a:p>
-            <a:pPr algn="l"/>
+            <a:off x="11186160" y="6035040"/>
+            <a:ext cx="548640" cy="365760"/>
+          </a:xfrm>
+          <a:prstGeom prst="rect">
+            <a:avLst/>
+          </a:prstGeom>
+          <a:noFill/>
+        </p:spPr>
+        <p:txBody>
+          <a:bodyPr wrap="none" lIns="0" rIns="0">
+            <a:noAutofit/>
+          </a:bodyPr>
+          <a:lstStyle/>
+          <a:p>
+            <a:pPr algn="r"/>
             <a:fld id="{4B0E1F8A-6C1D-4E2A-9F3B-7A5C8D2E1F60}" type="slidenum">
               <a:rPr sz="1600" b="0" i="0">
                 <a:solidFill>
-                  <a:srgbClr val="7C8794"/>
+                  <a:srgbClr val="1A1A24"/>
                 </a:solidFill>
                 <a:latin typeface="Arial"/>
               </a:rPr>
@@ -26868,7 +26209,7 @@
             <a:avLst/>
           </a:prstGeom>
           <a:solidFill>
-            <a:srgbClr val="FF5F56"/>
+            <a:srgbClr val="FFFFFF"/>
           </a:solidFill>
           <a:ln>
             <a:noFill/>
@@ -26912,7 +26253,7 @@
             <a:avLst/>
           </a:prstGeom>
           <a:solidFill>
-            <a:srgbClr val="FFBD2E"/>
+            <a:srgbClr val="FFFFFF"/>
           </a:solidFill>
           <a:ln>
             <a:noFill/>
@@ -26956,7 +26297,7 @@
             <a:avLst/>
           </a:prstGeom>
           <a:solidFill>
-            <a:srgbClr val="27C93F"/>
+            <a:srgbClr val="FFFFFF"/>
           </a:solidFill>
           <a:ln>
             <a:noFill/>
@@ -27011,7 +26352,7 @@
             <a:r>
               <a:rPr sz="4200" b="0" i="0">
                 <a:solidFill>
-                  <a:srgbClr val="D4D4D4"/>
+                  <a:srgbClr val="FFFFFF"/>
                 </a:solidFill>
                 <a:latin typeface="Arial"/>
               </a:rPr>
@@ -27046,7 +26387,7 @@
             <a:r>
               <a:rPr sz="3400" b="0" i="0">
                 <a:solidFill>
-                  <a:srgbClr val="D4D4D4"/>
+                  <a:srgbClr val="FFFFFF"/>
                 </a:solidFill>
                 <a:latin typeface="Arial"/>
               </a:rPr>
@@ -27081,7 +26422,7 @@
             <a:r>
               <a:rPr sz="3400" b="0" i="0">
                 <a:solidFill>
-                  <a:srgbClr val="D4D4D4"/>
+                  <a:srgbClr val="FFFFFF"/>
                 </a:solidFill>
                 <a:latin typeface="Arial"/>
               </a:rPr>
@@ -27116,7 +26457,7 @@
             <a:r>
               <a:rPr sz="3400" b="0" i="0">
                 <a:solidFill>
-                  <a:srgbClr val="D4D4D4"/>
+                  <a:srgbClr val="FFFFFF"/>
                 </a:solidFill>
                 <a:latin typeface="Arial"/>
               </a:rPr>
@@ -27186,7 +26527,7 @@
             <a:r>
               <a:rPr sz="3400" b="0" i="0">
                 <a:solidFill>
-                  <a:srgbClr val="D4D4D4"/>
+                  <a:srgbClr val="FFFFFF"/>
                 </a:solidFill>
                 <a:latin typeface="Arial"/>
               </a:rPr>
@@ -27221,7 +26562,7 @@
             <a:r>
               <a:rPr sz="3400" b="0" i="0">
                 <a:solidFill>
-                  <a:srgbClr val="D4D4D4"/>
+                  <a:srgbClr val="FFFFFF"/>
                 </a:solidFill>
                 <a:latin typeface="Arial"/>
               </a:rPr>
@@ -27256,7 +26597,7 @@
             <a:r>
               <a:rPr sz="3400" b="0" i="0">
                 <a:solidFill>
-                  <a:srgbClr val="6A9955"/>
+                  <a:srgbClr val="FFFFFF"/>
                 </a:solidFill>
                 <a:latin typeface="Arial"/>
               </a:rPr>
@@ -27274,7 +26615,7 @@
         <p:spPr>
           <a:xfrm>
             <a:off x="457200" y="4946898"/>
-            <a:ext cx="567115" cy="518159"/>
+            <a:ext cx="8016339" cy="518159"/>
           </a:xfrm>
           <a:prstGeom prst="rect">
             <a:avLst/>
@@ -27291,11 +26632,11 @@
             <a:r>
               <a:rPr sz="3400" b="0" i="0">
                 <a:solidFill>
-                  <a:srgbClr val="B5CEA8"/>
-                </a:solidFill>
-                <a:latin typeface="Arial"/>
-              </a:rPr>
-              <a:t>1</a:t>
+                  <a:srgbClr val="FFFFFF"/>
+                </a:solidFill>
+                <a:latin typeface="Arial"/>
+              </a:rPr>
+              <a:t>1. slidekit build deck.yaml</a:t>
             </a:r>
           </a:p>
         </p:txBody>
@@ -27308,8 +26649,8 @@
         </p:nvSpPr>
         <p:spPr>
           <a:xfrm>
-            <a:off x="697347" y="4946898"/>
-            <a:ext cx="7632104" cy="518159"/>
+            <a:off x="457200" y="5465057"/>
+            <a:ext cx="7899955" cy="518159"/>
           </a:xfrm>
           <a:prstGeom prst="rect">
             <a:avLst/>
@@ -27326,11 +26667,11 @@
             <a:r>
               <a:rPr sz="3400" b="0" i="0">
                 <a:solidFill>
-                  <a:srgbClr val="D4D4D4"/>
-                </a:solidFill>
-                <a:latin typeface="Arial"/>
-              </a:rPr>
-              <a:t>. slidekit build deck.yaml</a:t>
+                  <a:srgbClr val="FFFFFF"/>
+                </a:solidFill>
+                <a:latin typeface="Arial"/>
+              </a:rPr>
+              <a:t>2. fix the JSON lint errors</a:t>
             </a:r>
           </a:p>
         </p:txBody>
@@ -27338,76 +26679,6 @@
       <p:sp>
         <p:nvSpPr>
           <p:cNvPr id="15" name="TextBox 14"/>
-          <p:cNvSpPr txBox="1"/>
-          <p:nvPr/>
-        </p:nvSpPr>
-        <p:spPr>
-          <a:xfrm>
-            <a:off x="457200" y="5465057"/>
-            <a:ext cx="567115" cy="518159"/>
-          </a:xfrm>
-          <a:prstGeom prst="rect">
-            <a:avLst/>
-          </a:prstGeom>
-          <a:noFill/>
-        </p:spPr>
-        <p:txBody>
-          <a:bodyPr wrap="none" lIns="0" rIns="0">
-            <a:noAutofit/>
-          </a:bodyPr>
-          <a:lstStyle/>
-          <a:p>
-            <a:pPr algn="l"/>
-            <a:r>
-              <a:rPr sz="3400" b="0" i="0">
-                <a:solidFill>
-                  <a:srgbClr val="B5CEA8"/>
-                </a:solidFill>
-                <a:latin typeface="Arial"/>
-              </a:rPr>
-              <a:t>2</a:t>
-            </a:r>
-          </a:p>
-        </p:txBody>
-      </p:sp>
-      <p:sp>
-        <p:nvSpPr>
-          <p:cNvPr id="16" name="TextBox 15"/>
-          <p:cNvSpPr txBox="1"/>
-          <p:nvPr/>
-        </p:nvSpPr>
-        <p:spPr>
-          <a:xfrm>
-            <a:off x="697347" y="5465057"/>
-            <a:ext cx="7515721" cy="518159"/>
-          </a:xfrm>
-          <a:prstGeom prst="rect">
-            <a:avLst/>
-          </a:prstGeom>
-          <a:noFill/>
-        </p:spPr>
-        <p:txBody>
-          <a:bodyPr wrap="none" lIns="0" rIns="0">
-            <a:noAutofit/>
-          </a:bodyPr>
-          <a:lstStyle/>
-          <a:p>
-            <a:pPr algn="l"/>
-            <a:r>
-              <a:rPr sz="3400" b="0" i="0">
-                <a:solidFill>
-                  <a:srgbClr val="D4D4D4"/>
-                </a:solidFill>
-                <a:latin typeface="Arial"/>
-              </a:rPr>
-              <a:t>. fix the JSON lint errors</a:t>
-            </a:r>
-          </a:p>
-        </p:txBody>
-      </p:sp>
-      <p:sp>
-        <p:nvSpPr>
-          <p:cNvPr id="17" name="TextBox 16"/>
           <p:cNvSpPr/>
           <p:nvPr>
             <p:ph type="sldNum" idx="12"/>
@@ -27415,25 +26686,25 @@
         </p:nvSpPr>
         <p:spPr>
           <a:xfrm>
-            <a:off x="10363200" y="6035040"/>
-            <a:ext cx="1371600" cy="365760"/>
-          </a:xfrm>
-          <a:prstGeom prst="rect">
-            <a:avLst/>
-          </a:prstGeom>
-          <a:noFill/>
-        </p:spPr>
-        <p:txBody>
-          <a:bodyPr wrap="none" lIns="0" rIns="0">
-            <a:noAutofit/>
-          </a:bodyPr>
-          <a:lstStyle/>
-          <a:p>
-            <a:pPr algn="l"/>
+            <a:off x="11186160" y="6035040"/>
+            <a:ext cx="548640" cy="365760"/>
+          </a:xfrm>
+          <a:prstGeom prst="rect">
+            <a:avLst/>
+          </a:prstGeom>
+          <a:noFill/>
+        </p:spPr>
+        <p:txBody>
+          <a:bodyPr wrap="none" lIns="0" rIns="0">
+            <a:noAutofit/>
+          </a:bodyPr>
+          <a:lstStyle/>
+          <a:p>
+            <a:pPr algn="r"/>
             <a:fld id="{4B0E1F8A-6C1D-4E2A-9F3B-7A5C8D2E1F60}" type="slidenum">
               <a:rPr sz="1600" b="0" i="0">
                 <a:solidFill>
-                  <a:srgbClr val="7C8794"/>
+                  <a:srgbClr val="1A1A24"/>
                 </a:solidFill>
                 <a:latin typeface="Arial"/>
               </a:rPr>
@@ -27494,7 +26765,7 @@
             <a:r>
               <a:rPr sz="4200" b="1" i="0">
                 <a:solidFill>
-                  <a:srgbClr val="1A1A24"/>
+                  <a:srgbClr val="C1642B"/>
                 </a:solidFill>
                 <a:latin typeface="Arial"/>
               </a:rPr>
@@ -27688,25 +26959,25 @@
         </p:nvSpPr>
         <p:spPr>
           <a:xfrm>
-            <a:off x="10363200" y="6035040"/>
-            <a:ext cx="1371600" cy="365760"/>
-          </a:xfrm>
-          <a:prstGeom prst="rect">
-            <a:avLst/>
-          </a:prstGeom>
-          <a:noFill/>
-        </p:spPr>
-        <p:txBody>
-          <a:bodyPr wrap="none" lIns="0" rIns="0">
-            <a:noAutofit/>
-          </a:bodyPr>
-          <a:lstStyle/>
-          <a:p>
-            <a:pPr algn="l"/>
+            <a:off x="11186160" y="6035040"/>
+            <a:ext cx="548640" cy="365760"/>
+          </a:xfrm>
+          <a:prstGeom prst="rect">
+            <a:avLst/>
+          </a:prstGeom>
+          <a:noFill/>
+        </p:spPr>
+        <p:txBody>
+          <a:bodyPr wrap="none" lIns="0" rIns="0">
+            <a:noAutofit/>
+          </a:bodyPr>
+          <a:lstStyle/>
+          <a:p>
+            <a:pPr algn="r"/>
             <a:fld id="{4B0E1F8A-6C1D-4E2A-9F3B-7A5C8D2E1F60}" type="slidenum">
               <a:rPr sz="1600" b="0" i="0">
                 <a:solidFill>
-                  <a:srgbClr val="7C8794"/>
+                  <a:srgbClr val="1A1A24"/>
                 </a:solidFill>
                 <a:latin typeface="Arial"/>
               </a:rPr>
